--- a/INSWITCH_Bank_CIO_Deck.pptx
+++ b/INSWITCH_Bank_CIO_Deck.pptx
@@ -12,16 +12,20 @@
     <p:sldId xmlns:r="http://schemas.openxmlformats.org/officeDocument/2006/relationships" id="257" r:id="Redd1a8b8e2b04357"/>
     <p:sldId xmlns:r="http://schemas.openxmlformats.org/officeDocument/2006/relationships" id="258" r:id="R6baf75d502e94d47"/>
     <p:sldId xmlns:r="http://schemas.openxmlformats.org/officeDocument/2006/relationships" id="259" r:id="R69ddce484f73407a"/>
+    <p:sldId xmlns:r="http://schemas.openxmlformats.org/officeDocument/2006/relationships" id="275" r:id="rId1"/>
     <p:sldId xmlns:r="http://schemas.openxmlformats.org/officeDocument/2006/relationships" id="260" r:id="Reff82c39804f43e0"/>
     <p:sldId xmlns:r="http://schemas.openxmlformats.org/officeDocument/2006/relationships" id="261" r:id="R860e17b10d7b49cd"/>
     <p:sldId xmlns:r="http://schemas.openxmlformats.org/officeDocument/2006/relationships" id="262" r:id="Rb88abc61b89c494a"/>
+    <p:sldId xmlns:r="http://schemas.openxmlformats.org/officeDocument/2006/relationships" id="276" r:id="rId2"/>
     <p:sldId xmlns:r="http://schemas.openxmlformats.org/officeDocument/2006/relationships" id="263" r:id="Red18528c866844cf"/>
     <p:sldId xmlns:r="http://schemas.openxmlformats.org/officeDocument/2006/relationships" id="264" r:id="Rffea2db2a4204e8b"/>
     <p:sldId xmlns:r="http://schemas.openxmlformats.org/officeDocument/2006/relationships" id="265" r:id="R85416d0b25934a3a"/>
     <p:sldId xmlns:r="http://schemas.openxmlformats.org/officeDocument/2006/relationships" id="266" r:id="Raa86ad3eda274cb7"/>
+    <p:sldId xmlns:r="http://schemas.openxmlformats.org/officeDocument/2006/relationships" id="277" r:id="rId3"/>
     <p:sldId xmlns:r="http://schemas.openxmlformats.org/officeDocument/2006/relationships" id="267" r:id="R56a8c34eabae41e4"/>
     <p:sldId xmlns:r="http://schemas.openxmlformats.org/officeDocument/2006/relationships" id="268" r:id="R128c18fbe8eb49f2"/>
     <p:sldId xmlns:r="http://schemas.openxmlformats.org/officeDocument/2006/relationships" id="269" r:id="R1d0b95f9ca0c48b5"/>
+    <p:sldId xmlns:r="http://schemas.openxmlformats.org/officeDocument/2006/relationships" id="278" r:id="rId4"/>
     <p:sldId xmlns:r="http://schemas.openxmlformats.org/officeDocument/2006/relationships" id="270" r:id="R4fd8b5da0a564af1"/>
     <p:sldId xmlns:r="http://schemas.openxmlformats.org/officeDocument/2006/relationships" id="271" r:id="R526e829c93f242ac"/>
     <p:sldId xmlns:r="http://schemas.openxmlformats.org/officeDocument/2006/relationships" id="272" r:id="Re5e107a248724c4d"/>
@@ -2403,7 +2407,7 @@
         </p:nvSpPr>
         <p:spPr>
           <a:xfrm xmlns:a="http://schemas.openxmlformats.org/drawingml/2006/main">
-            <a:off x="647700" y="3257550"/>
+            <a:off x="647700" y="3619500"/>
             <a:ext cx="6191250" cy="666750"/>
           </a:xfrm>
           <a:prstGeom xmlns:a="http://schemas.openxmlformats.org/drawingml/2006/main" prst="rect">
@@ -2446,7 +2450,7 @@
                 <a:ea typeface="Aptos"/>
                 <a:cs typeface="Aptos"/>
               </a:rPr>
-              <a:t>CloudSpace Technologies is presenting a controlled switching and repair platform for the local settlement leg: fewer unresolved transfers, safer reversals, better provider decisions, and cleaner audit evidence.</a:t>
+              <a:t>Response to the Bank's EIMRPP RFP: one gateway for IMTO onboarding, remittance processing, settlement, and reporting.</a:t>
             </a:r>
           </a:p>
         </p:txBody>
@@ -3225,7 +3229,7 @@
                 <a:ea typeface="Aptos"/>
                 <a:cs typeface="Aptos"/>
               </a:rPr>
-              <a:t>CloudSpace Technologies delivers a switching and operations layer that integrates with existing channels, approved local providers, core ledger evidence, reconciliation files, identity controls, and MariaDB-backed audit records.</a:t>
+              <a:t>CloudSpace Technologies delivers a switching and operations layer that integrates with the core banking system, AML and fraud systems, data warehouse, identity management, approved local providers, reconciliation files, and MariaDB-backed audit records.</a:t>
             </a:r>
           </a:p>
         </p:txBody>
@@ -4244,7 +4248,7 @@
                 <a:ea typeface="Aptos"/>
                 <a:cs typeface="Aptos"/>
               </a:rPr>
-              <a:t>10</a:t>
+              <a:t>12</a:t>
             </a:r>
           </a:p>
         </p:txBody>
@@ -4305,6 +4309,10 @@
             <a:prstDash val="solid"/>
           </a:ln>
         </p:spPr>
+        <p:txBody xmlns:a="http://schemas.openxmlformats.org/drawingml/2006/main">
+          <a:bodyPr/>
+          <a:p/>
+        </p:txBody>
       </p:sp>
       <p:sp>
         <p:nvSpPr>
@@ -4340,6 +4348,10 @@
             <a:prstDash val="solid"/>
           </a:ln>
         </p:spPr>
+        <p:txBody xmlns:a="http://schemas.openxmlformats.org/drawingml/2006/main">
+          <a:bodyPr/>
+          <a:p/>
+        </p:txBody>
       </p:sp>
       <p:sp>
         <p:nvSpPr>
@@ -4464,7 +4476,7 @@
                 <a:ea typeface="Aptos Display"/>
                 <a:cs typeface="Aptos Display"/>
               </a:rPr>
-              <a:t>The enterprise case is cross-functional, which is why it belongs with the CIO and ED.</a:t>
+              <a:t>The enterprise case is cross-functional because every disputed transfer needs one owner and one evidence path.</a:t>
             </a:r>
           </a:p>
         </p:txBody>
@@ -4528,7 +4540,7 @@
                 <a:ea typeface="Aptos"/>
                 <a:cs typeface="Aptos"/>
               </a:rPr>
-              <a:t>INSWITCH creates one operating source of truth across the teams that normally chase the same failed transfer from different systems.</a:t>
+              <a:t>INSWITCH gives Technology, Operations, Risk, Settlement, and CX the same transfer status, evidence, and escalation record.</a:t>
             </a:r>
           </a:p>
         </p:txBody>
@@ -4565,6 +4577,10 @@
             <a:prstDash val="solid"/>
           </a:ln>
         </p:spPr>
+        <p:txBody xmlns:a="http://schemas.openxmlformats.org/drawingml/2006/main">
+          <a:bodyPr/>
+          <a:p/>
+        </p:txBody>
       </p:sp>
       <p:sp>
         <p:nvSpPr>
@@ -4726,6 +4742,10 @@
             <a:prstDash val="solid"/>
           </a:ln>
         </p:spPr>
+        <p:txBody xmlns:a="http://schemas.openxmlformats.org/drawingml/2006/main">
+          <a:bodyPr/>
+          <a:p/>
+        </p:txBody>
       </p:sp>
       <p:sp>
         <p:nvSpPr>
@@ -4887,6 +4907,10 @@
             <a:prstDash val="solid"/>
           </a:ln>
         </p:spPr>
+        <p:txBody xmlns:a="http://schemas.openxmlformats.org/drawingml/2006/main">
+          <a:bodyPr/>
+          <a:p/>
+        </p:txBody>
       </p:sp>
       <p:sp>
         <p:nvSpPr>
@@ -5011,7 +5035,7 @@
                 <a:ea typeface="Aptos"/>
                 <a:cs typeface="Aptos"/>
               </a:rPr>
-              <a:t>Evidence-led closure, maker-checker control, and audit history for disputed outcomes.</a:t>
+              <a:t>Evidence-led closure with callback, status API, provider email, and double-payment guard.</a:t>
             </a:r>
           </a:p>
         </p:txBody>
@@ -5048,6 +5072,10 @@
             <a:prstDash val="solid"/>
           </a:ln>
         </p:spPr>
+        <p:txBody xmlns:a="http://schemas.openxmlformats.org/drawingml/2006/main">
+          <a:bodyPr/>
+          <a:p/>
+        </p:txBody>
       </p:sp>
       <p:sp>
         <p:nvSpPr>
@@ -5172,7 +5200,7 @@
                 <a:ea typeface="Aptos"/>
                 <a:cs typeface="Aptos"/>
               </a:rPr>
-              <a:t>Provider pressure, settlement session context, and reconciliation breaks surfaced earlier.</a:t>
+              <a:t>NIP/session status, suspense checks, and reconciliation breaks surfaced before payout decisions.</a:t>
             </a:r>
           </a:p>
         </p:txBody>
@@ -5209,6 +5237,10 @@
             <a:prstDash val="solid"/>
           </a:ln>
         </p:spPr>
+        <p:txBody xmlns:a="http://schemas.openxmlformats.org/drawingml/2006/main">
+          <a:bodyPr/>
+          <a:p/>
+        </p:txBody>
       </p:sp>
       <p:sp>
         <p:nvSpPr>
@@ -5333,7 +5365,7 @@
                 <a:ea typeface="Aptos"/>
                 <a:cs typeface="Aptos"/>
               </a:rPr>
-              <a:t>Faster, more defensible answers when customers report debit-without-credit cases.</a:t>
+              <a:t>Named staff owners can update customers from the same status and evidence trail.</a:t>
             </a:r>
           </a:p>
         </p:txBody>
@@ -5372,6 +5404,10 @@
             <a:prstDash val="solid"/>
           </a:ln>
         </p:spPr>
+        <p:txBody xmlns:a="http://schemas.openxmlformats.org/drawingml/2006/main">
+          <a:bodyPr/>
+          <a:p/>
+        </p:txBody>
       </p:sp>
       <p:sp>
         <p:nvSpPr>
@@ -5496,7 +5532,7 @@
                 <a:ea typeface="Aptos"/>
                 <a:cs typeface="Aptos"/>
               </a:rPr>
-              <a:t>11</a:t>
+              <a:t>13</a:t>
             </a:r>
           </a:p>
         </p:txBody>
@@ -5557,6 +5593,10 @@
             <a:prstDash val="solid"/>
           </a:ln>
         </p:spPr>
+        <p:txBody xmlns:a="http://schemas.openxmlformats.org/drawingml/2006/main">
+          <a:bodyPr/>
+          <a:p/>
+        </p:txBody>
       </p:sp>
       <p:sp>
         <p:nvSpPr>
@@ -5592,6 +5632,10 @@
             <a:prstDash val="solid"/>
           </a:ln>
         </p:spPr>
+        <p:txBody xmlns:a="http://schemas.openxmlformats.org/drawingml/2006/main">
+          <a:bodyPr/>
+          <a:p/>
+        </p:txBody>
       </p:sp>
       <p:sp>
         <p:nvSpPr>
@@ -5780,7 +5824,7 @@
                 <a:ea typeface="Aptos"/>
                 <a:cs typeface="Aptos"/>
               </a:rPr>
-              <a:t>The deployment path is staged to protect production settlement operations while proving value against real exception queues and provider telemetry.</a:t>
+              <a:t>The deployment path protects production settlement operations while proving value on real exception queues, webhooks, status APIs, and provider escalations.</a:t>
             </a:r>
           </a:p>
         </p:txBody>
@@ -5817,6 +5861,10 @@
             <a:prstDash val="solid"/>
           </a:ln>
         </p:spPr>
+        <p:txBody xmlns:a="http://schemas.openxmlformats.org/drawingml/2006/main">
+          <a:bodyPr/>
+          <a:p/>
+        </p:txBody>
       </p:sp>
       <p:sp>
         <p:nvSpPr>
@@ -5852,6 +5900,10 @@
             <a:prstDash val="solid"/>
           </a:ln>
         </p:spPr>
+        <p:txBody xmlns:a="http://schemas.openxmlformats.org/drawingml/2006/main">
+          <a:bodyPr/>
+          <a:p/>
+        </p:txBody>
       </p:sp>
       <p:sp>
         <p:nvSpPr>
@@ -5887,6 +5939,10 @@
             <a:prstDash val="solid"/>
           </a:ln>
         </p:spPr>
+        <p:txBody xmlns:a="http://schemas.openxmlformats.org/drawingml/2006/main">
+          <a:bodyPr/>
+          <a:p/>
+        </p:txBody>
       </p:sp>
       <p:sp>
         <p:nvSpPr>
@@ -6075,7 +6131,7 @@
                 <a:ea typeface="Aptos"/>
                 <a:cs typeface="Aptos"/>
               </a:rPr>
-              <a:t>Confirm routes, contracts, data fields, identity model, approval workflow.</a:t>
+              <a:t>Confirm routes, contracts, data fields, staff assignment rules, and closure controls.</a:t>
             </a:r>
           </a:p>
         </p:txBody>
@@ -6112,6 +6168,10 @@
             <a:prstDash val="solid"/>
           </a:ln>
         </p:spPr>
+        <p:txBody xmlns:a="http://schemas.openxmlformats.org/drawingml/2006/main">
+          <a:bodyPr/>
+          <a:p/>
+        </p:txBody>
       </p:sp>
       <p:sp>
         <p:nvSpPr>
@@ -6147,6 +6207,10 @@
             <a:prstDash val="solid"/>
           </a:ln>
         </p:spPr>
+        <p:txBody xmlns:a="http://schemas.openxmlformats.org/drawingml/2006/main">
+          <a:bodyPr/>
+          <a:p/>
+        </p:txBody>
       </p:sp>
       <p:sp>
         <p:nvSpPr>
@@ -6182,6 +6246,10 @@
             <a:prstDash val="solid"/>
           </a:ln>
         </p:spPr>
+        <p:txBody xmlns:a="http://schemas.openxmlformats.org/drawingml/2006/main">
+          <a:bodyPr/>
+          <a:p/>
+        </p:txBody>
       </p:sp>
       <p:sp>
         <p:nvSpPr>
@@ -6370,7 +6438,7 @@
                 <a:ea typeface="Aptos"/>
                 <a:cs typeface="Aptos"/>
               </a:rPr>
-              <a:t>Connect intake API, provider status sources, callback flow, ledger/reconciliation evidence.</a:t>
+              <a:t>Connect intake API, webhooks, status APIs, ledger/suspense evidence, and provider escalation email.</a:t>
             </a:r>
           </a:p>
         </p:txBody>
@@ -6407,6 +6475,10 @@
             <a:prstDash val="solid"/>
           </a:ln>
         </p:spPr>
+        <p:txBody xmlns:a="http://schemas.openxmlformats.org/drawingml/2006/main">
+          <a:bodyPr/>
+          <a:p/>
+        </p:txBody>
       </p:sp>
       <p:sp>
         <p:nvSpPr>
@@ -6442,6 +6514,10 @@
             <a:prstDash val="solid"/>
           </a:ln>
         </p:spPr>
+        <p:txBody xmlns:a="http://schemas.openxmlformats.org/drawingml/2006/main">
+          <a:bodyPr/>
+          <a:p/>
+        </p:txBody>
       </p:sp>
       <p:sp>
         <p:nvSpPr>
@@ -6477,6 +6553,10 @@
             <a:prstDash val="solid"/>
           </a:ln>
         </p:spPr>
+        <p:txBody xmlns:a="http://schemas.openxmlformats.org/drawingml/2006/main">
+          <a:bodyPr/>
+          <a:p/>
+        </p:txBody>
       </p:sp>
       <p:sp>
         <p:nvSpPr>
@@ -6665,7 +6745,7 @@
                 <a:ea typeface="Aptos"/>
                 <a:cs typeface="Aptos"/>
               </a:rPr>
-              <a:t>Run selected corridors/providers with Payment Ops, Settlement, Risk, and CX.</a:t>
+              <a:t>Run selected local rails with Payment Ops, Settlement, Risk, and CX on real exception queues.</a:t>
             </a:r>
           </a:p>
         </p:txBody>
@@ -6702,6 +6782,10 @@
             <a:prstDash val="solid"/>
           </a:ln>
         </p:spPr>
+        <p:txBody xmlns:a="http://schemas.openxmlformats.org/drawingml/2006/main">
+          <a:bodyPr/>
+          <a:p/>
+        </p:txBody>
       </p:sp>
       <p:sp>
         <p:nvSpPr>
@@ -6737,6 +6821,10 @@
             <a:prstDash val="solid"/>
           </a:ln>
         </p:spPr>
+        <p:txBody xmlns:a="http://schemas.openxmlformats.org/drawingml/2006/main">
+          <a:bodyPr/>
+          <a:p/>
+        </p:txBody>
       </p:sp>
       <p:sp>
         <p:nvSpPr>
@@ -6772,6 +6860,10 @@
             <a:prstDash val="solid"/>
           </a:ln>
         </p:spPr>
+        <p:txBody xmlns:a="http://schemas.openxmlformats.org/drawingml/2006/main">
+          <a:bodyPr/>
+          <a:p/>
+        </p:txBody>
       </p:sp>
       <p:sp>
         <p:nvSpPr>
@@ -6960,7 +7052,7 @@
                 <a:ea typeface="Aptos"/>
                 <a:cs typeface="Aptos"/>
               </a:rPr>
-              <a:t>Review pilot evidence, finalize SLA policy, train operators, approve production rollout.</a:t>
+              <a:t>Review pilot evidence, tune escalation windows, train operators, approve production rollout.</a:t>
             </a:r>
           </a:p>
         </p:txBody>
@@ -7024,7 +7116,7 @@
                 <a:ea typeface="Aptos"/>
                 <a:cs typeface="Aptos"/>
               </a:rPr>
-              <a:t>The pilot is measured on real bank outcomes: unresolved cases, requery turnaround, reversal safety, provider routing stance, and evidence completeness.</a:t>
+              <a:t>Pilot measures: unresolved cases, webhook/status API turnaround, provider escalation aging, reversal safety, and evidence completeness.</a:t>
             </a:r>
           </a:p>
         </p:txBody>
@@ -7063,6 +7155,10 @@
             <a:prstDash val="solid"/>
           </a:ln>
         </p:spPr>
+        <p:txBody xmlns:a="http://schemas.openxmlformats.org/drawingml/2006/main">
+          <a:bodyPr/>
+          <a:p/>
+        </p:txBody>
       </p:sp>
       <p:sp>
         <p:nvSpPr>
@@ -7187,7 +7283,7 @@
                 <a:ea typeface="Aptos"/>
                 <a:cs typeface="Aptos"/>
               </a:rPr>
-              <a:t>12</a:t>
+              <a:t>15</a:t>
             </a:r>
           </a:p>
         </p:txBody>
@@ -8744,7 +8840,7 @@
                 <a:ea typeface="Aptos"/>
                 <a:cs typeface="Aptos"/>
               </a:rPr>
-              <a:t>13</a:t>
+              <a:t>16</a:t>
             </a:r>
           </a:p>
         </p:txBody>
@@ -10157,7 +10253,7 @@
                 <a:ea typeface="Aptos"/>
                 <a:cs typeface="Aptos"/>
               </a:rPr>
-              <a:t>14</a:t>
+              <a:t>17</a:t>
             </a:r>
           </a:p>
         </p:txBody>
@@ -10697,7 +10793,7 @@
                 <a:ea typeface="Aptos"/>
                 <a:cs typeface="Aptos"/>
               </a:rPr>
-              <a:t>15</a:t>
+              <a:t>19</a:t>
             </a:r>
           </a:p>
         </p:txBody>
@@ -11266,7 +11362,7 @@
                 <a:ea typeface="Aptos"/>
                 <a:cs typeface="Aptos"/>
               </a:rPr>
-              <a:t>16</a:t>
+              <a:t>20</a:t>
             </a:r>
           </a:p>
         </p:txBody>
@@ -11835,7 +11931,7 @@
                 <a:ea typeface="Aptos"/>
                 <a:cs typeface="Aptos"/>
               </a:rPr>
-              <a:t>17</a:t>
+              <a:t>21</a:t>
             </a:r>
           </a:p>
         </p:txBody>
@@ -12526,7 +12622,7 @@
                 <a:ea typeface="Aptos"/>
                 <a:cs typeface="Aptos"/>
               </a:rPr>
-              <a:t>18</a:t>
+              <a:t>22</a:t>
             </a:r>
           </a:p>
         </p:txBody>
@@ -14015,7 +14111,7 @@
                 <a:ea typeface="Aptos"/>
                 <a:cs typeface="Aptos"/>
               </a:rPr>
-              <a:t>19</a:t>
+              <a:t>23</a:t>
             </a:r>
           </a:p>
         </p:txBody>
@@ -15362,6 +15458,5914 @@
 </p:sld>
 </file>
 
+<file path=ppt/slides/slide20.xml><?xml version="1.0" encoding="utf-8"?>
+<p:sld xmlns:p="http://schemas.openxmlformats.org/presentationml/2006/main">
+  <p:cSld>
+    <p:spTree>
+      <p:nvGrpSpPr>
+        <p:cNvPr id="1" name=""/>
+        <p:cNvGrpSpPr/>
+        <p:nvPr/>
+      </p:nvGrpSpPr>
+      <p:grpSpPr>
+        <a:xfrm xmlns:a="http://schemas.openxmlformats.org/drawingml/2006/main"/>
+      </p:grpSpPr>
+      <p:sp>
+        <p:nvSpPr>
+          <p:cNvPr id="1" name="">
+            <a:extLst xmlns:a="http://schemas.openxmlformats.org/drawingml/2006/main">
+              <a:ext uri="{FF2B5EF4-FFF2-40B4-BE49-F238E27FC236}">
+                <a16:creationId xmlns:a16="http://schemas.microsoft.com/office/drawing/2014/main" id="{F8D83648-E048-4DCF-A7A1-BB1226A278F9}"/>
+              </a:ext>
+            </a:extLst>
+          </p:cNvPr>
+          <p:cNvSpPr>
+            <a:spLocks xmlns:a="http://schemas.openxmlformats.org/drawingml/2006/main" noGrp="1"/>
+          </p:cNvSpPr>
+          <p:nvPr/>
+        </p:nvSpPr>
+        <p:spPr>
+          <a:xfrm xmlns:a="http://schemas.openxmlformats.org/drawingml/2006/main">
+            <a:off x="0" y="0"/>
+            <a:ext cx="12192000" cy="6858000"/>
+          </a:xfrm>
+          <a:prstGeom xmlns:a="http://schemas.openxmlformats.org/drawingml/2006/main" prst="rect">
+            <a:avLst/>
+          </a:prstGeom>
+          <a:solidFill xmlns:a="http://schemas.openxmlformats.org/drawingml/2006/main">
+            <a:srgbClr val="F5F7FA"/>
+          </a:solidFill>
+          <a:ln xmlns:a="http://schemas.openxmlformats.org/drawingml/2006/main" w="0">
+            <a:solidFill>
+              <a:srgbClr val="000000">
+                <a:alpha val="0"/>
+              </a:srgbClr>
+            </a:solidFill>
+            <a:prstDash val="solid"/>
+          </a:ln>
+        </p:spPr>
+      </p:sp>
+      <p:sp>
+        <p:nvSpPr>
+          <p:cNvPr id="2" name="">
+            <a:extLst xmlns:a="http://schemas.openxmlformats.org/drawingml/2006/main">
+              <a:ext uri="{FF2B5EF4-FFF2-40B4-BE49-F238E27FC236}">
+                <a16:creationId xmlns:a16="http://schemas.microsoft.com/office/drawing/2014/main" id="{92210B56-3265-4C41-8BCD-03D4EBB90172}"/>
+              </a:ext>
+            </a:extLst>
+          </p:cNvPr>
+          <p:cNvSpPr>
+            <a:spLocks xmlns:a="http://schemas.openxmlformats.org/drawingml/2006/main" noGrp="1"/>
+          </p:cNvSpPr>
+          <p:nvPr/>
+        </p:nvSpPr>
+        <p:spPr>
+          <a:xfrm xmlns:a="http://schemas.openxmlformats.org/drawingml/2006/main">
+            <a:off x="609600" y="552450"/>
+            <a:ext cx="66675" cy="66675"/>
+          </a:xfrm>
+          <a:prstGeom xmlns:a="http://schemas.openxmlformats.org/drawingml/2006/main" prst="ellipse">
+            <a:avLst/>
+          </a:prstGeom>
+          <a:solidFill xmlns:a="http://schemas.openxmlformats.org/drawingml/2006/main">
+            <a:srgbClr val="0756D9"/>
+          </a:solidFill>
+          <a:ln xmlns:a="http://schemas.openxmlformats.org/drawingml/2006/main" w="0">
+            <a:solidFill>
+              <a:srgbClr val="000000">
+                <a:alpha val="0"/>
+              </a:srgbClr>
+            </a:solidFill>
+            <a:prstDash val="solid"/>
+          </a:ln>
+        </p:spPr>
+      </p:sp>
+      <p:sp>
+        <p:nvSpPr>
+          <p:cNvPr id="3" name="">
+            <a:extLst xmlns:a="http://schemas.openxmlformats.org/drawingml/2006/main">
+              <a:ext uri="{FF2B5EF4-FFF2-40B4-BE49-F238E27FC236}">
+                <a16:creationId xmlns:a16="http://schemas.microsoft.com/office/drawing/2014/main" id="{2A87F01C-2E74-4882-93A8-45A27A821DD0}"/>
+              </a:ext>
+            </a:extLst>
+          </p:cNvPr>
+          <p:cNvSpPr>
+            <a:spLocks xmlns:a="http://schemas.openxmlformats.org/drawingml/2006/main" noGrp="1"/>
+          </p:cNvSpPr>
+          <p:nvPr/>
+        </p:nvSpPr>
+        <p:spPr>
+          <a:xfrm xmlns:a="http://schemas.openxmlformats.org/drawingml/2006/main">
+            <a:off x="771525" y="495300"/>
+            <a:ext cx="4953000" cy="190500"/>
+          </a:xfrm>
+          <a:prstGeom xmlns:a="http://schemas.openxmlformats.org/drawingml/2006/main" prst="rect">
+            <a:avLst/>
+          </a:prstGeom>
+          <a:solidFill xmlns:a="http://schemas.openxmlformats.org/drawingml/2006/main">
+            <a:srgbClr val="000000">
+              <a:alpha val="0"/>
+            </a:srgbClr>
+          </a:solidFill>
+          <a:ln xmlns:a="http://schemas.openxmlformats.org/drawingml/2006/main" w="0">
+            <a:solidFill>
+              <a:srgbClr val="000000">
+                <a:alpha val="0"/>
+              </a:srgbClr>
+            </a:solidFill>
+            <a:prstDash val="solid"/>
+          </a:ln>
+        </p:spPr>
+        <p:txBody>
+          <a:bodyPr xmlns:a="http://schemas.openxmlformats.org/drawingml/2006/main" lIns="0" tIns="0" rIns="0" bIns="0" anchor="t"/>
+          <a:lstStyle xmlns:a="http://schemas.openxmlformats.org/drawingml/2006/main"/>
+          <a:p xmlns:a="http://schemas.openxmlformats.org/drawingml/2006/main">
+            <a:pPr algn="l">
+              <a:defRPr sz="825" b="1">
+                <a:solidFill>
+                  <a:srgbClr val="0756D9"/>
+                </a:solidFill>
+                <a:latin typeface="Aptos"/>
+                <a:ea typeface="Aptos"/>
+                <a:cs typeface="Aptos"/>
+              </a:defRPr>
+            </a:pPr>
+            <a:r>
+              <a:rPr sz="825" b="1">
+                <a:solidFill>
+                  <a:srgbClr val="0756D9"/>
+                </a:solidFill>
+                <a:latin typeface="Aptos"/>
+                <a:ea typeface="Aptos"/>
+                <a:cs typeface="Aptos"/>
+              </a:rPr>
+              <a:t>RFP ALIGNMENT</a:t>
+            </a:r>
+          </a:p>
+        </p:txBody>
+      </p:sp>
+      <p:sp>
+        <p:nvSpPr>
+          <p:cNvPr id="4" name="">
+            <a:extLst xmlns:a="http://schemas.openxmlformats.org/drawingml/2006/main">
+              <a:ext uri="{FF2B5EF4-FFF2-40B4-BE49-F238E27FC236}">
+                <a16:creationId xmlns:a16="http://schemas.microsoft.com/office/drawing/2014/main" id="{3212B6E3-E100-444E-9F05-4988796FF9D4}"/>
+              </a:ext>
+            </a:extLst>
+          </p:cNvPr>
+          <p:cNvSpPr>
+            <a:spLocks xmlns:a="http://schemas.openxmlformats.org/drawingml/2006/main" noGrp="1"/>
+          </p:cNvSpPr>
+          <p:nvPr/>
+        </p:nvSpPr>
+        <p:spPr>
+          <a:xfrm xmlns:a="http://schemas.openxmlformats.org/drawingml/2006/main">
+            <a:off x="609600" y="819150"/>
+            <a:ext cx="7810500" cy="1104900"/>
+          </a:xfrm>
+          <a:prstGeom xmlns:a="http://schemas.openxmlformats.org/drawingml/2006/main" prst="rect">
+            <a:avLst/>
+          </a:prstGeom>
+          <a:solidFill xmlns:a="http://schemas.openxmlformats.org/drawingml/2006/main">
+            <a:srgbClr val="000000">
+              <a:alpha val="0"/>
+            </a:srgbClr>
+          </a:solidFill>
+          <a:ln xmlns:a="http://schemas.openxmlformats.org/drawingml/2006/main" w="0">
+            <a:solidFill>
+              <a:srgbClr val="000000">
+                <a:alpha val="0"/>
+              </a:srgbClr>
+            </a:solidFill>
+            <a:prstDash val="solid"/>
+          </a:ln>
+        </p:spPr>
+        <p:txBody>
+          <a:bodyPr xmlns:a="http://schemas.openxmlformats.org/drawingml/2006/main" lIns="0" tIns="0" rIns="0" bIns="0" anchor="t"/>
+          <a:lstStyle xmlns:a="http://schemas.openxmlformats.org/drawingml/2006/main"/>
+          <a:p xmlns:a="http://schemas.openxmlformats.org/drawingml/2006/main">
+            <a:pPr algn="l">
+              <a:defRPr sz="2925" b="1">
+                <a:solidFill>
+                  <a:srgbClr val="08111F"/>
+                </a:solidFill>
+                <a:latin typeface="Aptos Display"/>
+                <a:ea typeface="Aptos Display"/>
+                <a:cs typeface="Aptos Display"/>
+              </a:defRPr>
+            </a:pPr>
+            <a:r>
+              <a:rPr sz="2925" b="1">
+                <a:solidFill>
+                  <a:srgbClr val="08111F"/>
+                </a:solidFill>
+                <a:latin typeface="Aptos Display"/>
+                <a:ea typeface="Aptos Display"/>
+                <a:cs typeface="Aptos Display"/>
+              </a:rPr>
+              <a:t>INSWITCH answers the EIMRPP RFP scope end to end.</a:t>
+            </a:r>
+          </a:p>
+        </p:txBody>
+      </p:sp>
+      <p:sp>
+        <p:nvSpPr>
+          <p:cNvPr id="5" name="">
+            <a:extLst xmlns:a="http://schemas.openxmlformats.org/drawingml/2006/main">
+              <a:ext uri="{FF2B5EF4-FFF2-40B4-BE49-F238E27FC236}">
+                <a16:creationId xmlns:a16="http://schemas.microsoft.com/office/drawing/2014/main" id="{74C07E7E-32BF-4E1A-801D-9305D8EBDBA8}"/>
+              </a:ext>
+            </a:extLst>
+          </p:cNvPr>
+          <p:cNvSpPr>
+            <a:spLocks xmlns:a="http://schemas.openxmlformats.org/drawingml/2006/main" noGrp="1"/>
+          </p:cNvSpPr>
+          <p:nvPr/>
+        </p:nvSpPr>
+        <p:spPr>
+          <a:xfrm xmlns:a="http://schemas.openxmlformats.org/drawingml/2006/main">
+            <a:off x="609600" y="2038350"/>
+            <a:ext cx="7810500" cy="647700"/>
+          </a:xfrm>
+          <a:prstGeom xmlns:a="http://schemas.openxmlformats.org/drawingml/2006/main" prst="rect">
+            <a:avLst/>
+          </a:prstGeom>
+          <a:solidFill xmlns:a="http://schemas.openxmlformats.org/drawingml/2006/main">
+            <a:srgbClr val="000000">
+              <a:alpha val="0"/>
+            </a:srgbClr>
+          </a:solidFill>
+          <a:ln xmlns:a="http://schemas.openxmlformats.org/drawingml/2006/main" w="0">
+            <a:solidFill>
+              <a:srgbClr val="000000">
+                <a:alpha val="0"/>
+              </a:srgbClr>
+            </a:solidFill>
+            <a:prstDash val="solid"/>
+          </a:ln>
+        </p:spPr>
+        <p:txBody>
+          <a:bodyPr xmlns:a="http://schemas.openxmlformats.org/drawingml/2006/main" lIns="0" tIns="0" rIns="0" bIns="0" anchor="t"/>
+          <a:lstStyle xmlns:a="http://schemas.openxmlformats.org/drawingml/2006/main"/>
+          <a:p xmlns:a="http://schemas.openxmlformats.org/drawingml/2006/main">
+            <a:pPr algn="l">
+              <a:defRPr sz="1275" b="0">
+                <a:solidFill>
+                  <a:srgbClr val="344054"/>
+                </a:solidFill>
+                <a:latin typeface="Aptos"/>
+                <a:ea typeface="Aptos"/>
+                <a:cs typeface="Aptos"/>
+              </a:defRPr>
+            </a:pPr>
+            <a:r>
+              <a:rPr sz="1275" b="0">
+                <a:solidFill>
+                  <a:srgbClr val="344054"/>
+                </a:solidFill>
+                <a:latin typeface="Aptos"/>
+                <a:ea typeface="Aptos"/>
+                <a:cs typeface="Aptos"/>
+              </a:rPr>
+              <a:t>The Enterprise IMTO Management and Remittance Processing Platform RFP asks for one gateway for onboarding, integration, processing, reconciliation, settlement, and reporting. INSWITCH covers each scope area.</a:t>
+            </a:r>
+          </a:p>
+        </p:txBody>
+      </p:sp>
+      <p:sp>
+        <p:nvSpPr>
+          <p:cNvPr id="6" name="">
+            <a:extLst xmlns:a="http://schemas.openxmlformats.org/drawingml/2006/main">
+              <a:ext uri="{FF2B5EF4-FFF2-40B4-BE49-F238E27FC236}">
+                <a16:creationId xmlns:a16="http://schemas.microsoft.com/office/drawing/2014/main" id="{0A1DB209-378A-4774-86E3-A4D9831CA54F}"/>
+              </a:ext>
+            </a:extLst>
+          </p:cNvPr>
+          <p:cNvSpPr>
+            <a:spLocks xmlns:a="http://schemas.openxmlformats.org/drawingml/2006/main" noGrp="1"/>
+          </p:cNvSpPr>
+          <p:nvPr/>
+        </p:nvSpPr>
+        <p:spPr>
+          <a:xfrm xmlns:a="http://schemas.openxmlformats.org/drawingml/2006/main">
+            <a:off x="685800" y="3486150"/>
+            <a:ext cx="3238500" cy="1695450"/>
+          </a:xfrm>
+          <a:prstGeom xmlns:a="http://schemas.openxmlformats.org/drawingml/2006/main" prst="rect">
+            <a:avLst/>
+          </a:prstGeom>
+          <a:solidFill xmlns:a="http://schemas.openxmlformats.org/drawingml/2006/main">
+            <a:srgbClr val="FFFFFF"/>
+          </a:solidFill>
+          <a:ln xmlns:a="http://schemas.openxmlformats.org/drawingml/2006/main" w="9525">
+            <a:solidFill>
+              <a:srgbClr val="EAECF0"/>
+            </a:solidFill>
+            <a:prstDash val="solid"/>
+          </a:ln>
+        </p:spPr>
+      </p:sp>
+      <p:sp>
+        <p:nvSpPr>
+          <p:cNvPr id="7" name="">
+            <a:extLst xmlns:a="http://schemas.openxmlformats.org/drawingml/2006/main">
+              <a:ext uri="{FF2B5EF4-FFF2-40B4-BE49-F238E27FC236}">
+                <a16:creationId xmlns:a16="http://schemas.microsoft.com/office/drawing/2014/main" id="{7A72528F-28E8-4D37-8130-DC78242B07D9}"/>
+              </a:ext>
+            </a:extLst>
+          </p:cNvPr>
+          <p:cNvSpPr>
+            <a:spLocks xmlns:a="http://schemas.openxmlformats.org/drawingml/2006/main" noGrp="1"/>
+          </p:cNvSpPr>
+          <p:nvPr/>
+        </p:nvSpPr>
+        <p:spPr>
+          <a:xfrm xmlns:a="http://schemas.openxmlformats.org/drawingml/2006/main">
+            <a:off x="914400" y="3695700"/>
+            <a:ext cx="2781300" cy="266700"/>
+          </a:xfrm>
+          <a:prstGeom xmlns:a="http://schemas.openxmlformats.org/drawingml/2006/main" prst="rect">
+            <a:avLst/>
+          </a:prstGeom>
+          <a:solidFill xmlns:a="http://schemas.openxmlformats.org/drawingml/2006/main">
+            <a:srgbClr val="000000">
+              <a:alpha val="0"/>
+            </a:srgbClr>
+          </a:solidFill>
+          <a:ln xmlns:a="http://schemas.openxmlformats.org/drawingml/2006/main" w="0">
+            <a:solidFill>
+              <a:srgbClr val="000000">
+                <a:alpha val="0"/>
+              </a:srgbClr>
+            </a:solidFill>
+            <a:prstDash val="solid"/>
+          </a:ln>
+        </p:spPr>
+        <p:txBody>
+          <a:bodyPr xmlns:a="http://schemas.openxmlformats.org/drawingml/2006/main" lIns="0" tIns="0" rIns="0" bIns="0" anchor="t"/>
+          <a:lstStyle xmlns:a="http://schemas.openxmlformats.org/drawingml/2006/main"/>
+          <a:p xmlns:a="http://schemas.openxmlformats.org/drawingml/2006/main">
+            <a:pPr algn="l">
+              <a:defRPr sz="1650" b="1">
+                <a:solidFill>
+                  <a:srgbClr val="08111F"/>
+                </a:solidFill>
+                <a:latin typeface="Aptos"/>
+                <a:ea typeface="Aptos"/>
+                <a:cs typeface="Aptos"/>
+              </a:defRPr>
+            </a:pPr>
+            <a:r>
+              <a:rPr sz="1650" b="1">
+                <a:solidFill>
+                  <a:srgbClr val="08111F"/>
+                </a:solidFill>
+                <a:latin typeface="Aptos"/>
+                <a:ea typeface="Aptos"/>
+                <a:cs typeface="Aptos"/>
+              </a:rPr>
+              <a:t>Partner management</a:t>
+            </a:r>
+          </a:p>
+        </p:txBody>
+      </p:sp>
+      <p:sp>
+        <p:nvSpPr>
+          <p:cNvPr id="8" name="">
+            <a:extLst xmlns:a="http://schemas.openxmlformats.org/drawingml/2006/main">
+              <a:ext uri="{FF2B5EF4-FFF2-40B4-BE49-F238E27FC236}">
+                <a16:creationId xmlns:a16="http://schemas.microsoft.com/office/drawing/2014/main" id="{9B2D9460-8E9E-4015-ABAB-1568FB400205}"/>
+              </a:ext>
+            </a:extLst>
+          </p:cNvPr>
+          <p:cNvSpPr>
+            <a:spLocks xmlns:a="http://schemas.openxmlformats.org/drawingml/2006/main" noGrp="1"/>
+          </p:cNvSpPr>
+          <p:nvPr/>
+        </p:nvSpPr>
+        <p:spPr>
+          <a:xfrm xmlns:a="http://schemas.openxmlformats.org/drawingml/2006/main">
+            <a:off x="914400" y="4114800"/>
+            <a:ext cx="2724150" cy="552450"/>
+          </a:xfrm>
+          <a:prstGeom xmlns:a="http://schemas.openxmlformats.org/drawingml/2006/main" prst="rect">
+            <a:avLst/>
+          </a:prstGeom>
+          <a:solidFill xmlns:a="http://schemas.openxmlformats.org/drawingml/2006/main">
+            <a:srgbClr val="000000">
+              <a:alpha val="0"/>
+            </a:srgbClr>
+          </a:solidFill>
+          <a:ln xmlns:a="http://schemas.openxmlformats.org/drawingml/2006/main" w="0">
+            <a:solidFill>
+              <a:srgbClr val="000000">
+                <a:alpha val="0"/>
+              </a:srgbClr>
+            </a:solidFill>
+            <a:prstDash val="solid"/>
+          </a:ln>
+        </p:spPr>
+        <p:txBody>
+          <a:bodyPr xmlns:a="http://schemas.openxmlformats.org/drawingml/2006/main" lIns="0" tIns="0" rIns="0" bIns="0" anchor="t"/>
+          <a:lstStyle xmlns:a="http://schemas.openxmlformats.org/drawingml/2006/main"/>
+          <a:p xmlns:a="http://schemas.openxmlformats.org/drawingml/2006/main">
+            <a:pPr algn="l">
+              <a:defRPr sz="1013" b="0">
+                <a:solidFill>
+                  <a:srgbClr val="344054"/>
+                </a:solidFill>
+                <a:latin typeface="Aptos"/>
+                <a:ea typeface="Aptos"/>
+                <a:cs typeface="Aptos"/>
+              </a:defRPr>
+            </a:pPr>
+            <a:r>
+              <a:rPr sz="1013" b="0">
+                <a:solidFill>
+                  <a:srgbClr val="344054"/>
+                </a:solidFill>
+                <a:latin typeface="Aptos"/>
+                <a:ea typeface="Aptos"/>
+                <a:cs typeface="Aptos"/>
+              </a:rPr>
+              <a:t>IMTO onboarding and approval workflows, partner profile, contract and SLA management, risk classification, and due diligence tracking.</a:t>
+            </a:r>
+          </a:p>
+        </p:txBody>
+      </p:sp>
+      <p:sp>
+        <p:nvSpPr>
+          <p:cNvPr id="9" name="">
+            <a:extLst xmlns:a="http://schemas.openxmlformats.org/drawingml/2006/main">
+              <a:ext uri="{FF2B5EF4-FFF2-40B4-BE49-F238E27FC236}">
+                <a16:creationId xmlns:a16="http://schemas.microsoft.com/office/drawing/2014/main" id="{737F3AD8-E1D5-4293-9931-FE9E4D593F01}"/>
+              </a:ext>
+            </a:extLst>
+          </p:cNvPr>
+          <p:cNvSpPr>
+            <a:spLocks xmlns:a="http://schemas.openxmlformats.org/drawingml/2006/main" noGrp="1"/>
+          </p:cNvSpPr>
+          <p:nvPr/>
+        </p:nvSpPr>
+        <p:spPr>
+          <a:xfrm xmlns:a="http://schemas.openxmlformats.org/drawingml/2006/main">
+            <a:off x="914400" y="4838700"/>
+            <a:ext cx="1352550" cy="285750"/>
+          </a:xfrm>
+          <a:prstGeom xmlns:a="http://schemas.openxmlformats.org/drawingml/2006/main" prst="rect">
+            <a:avLst/>
+          </a:prstGeom>
+          <a:solidFill xmlns:a="http://schemas.openxmlformats.org/drawingml/2006/main">
+            <a:srgbClr val="FEF3F2"/>
+          </a:solidFill>
+          <a:ln xmlns:a="http://schemas.openxmlformats.org/drawingml/2006/main" w="9525">
+            <a:solidFill>
+              <a:srgbClr val="B42318">
+                <a:alpha val="20000"/>
+              </a:srgbClr>
+            </a:solidFill>
+            <a:prstDash val="solid"/>
+          </a:ln>
+        </p:spPr>
+      </p:sp>
+      <p:sp>
+        <p:nvSpPr>
+          <p:cNvPr id="10" name="">
+            <a:extLst xmlns:a="http://schemas.openxmlformats.org/drawingml/2006/main">
+              <a:ext uri="{FF2B5EF4-FFF2-40B4-BE49-F238E27FC236}">
+                <a16:creationId xmlns:a16="http://schemas.microsoft.com/office/drawing/2014/main" id="{37313500-7E2B-4FA6-B266-8D8161CB1233}"/>
+              </a:ext>
+            </a:extLst>
+          </p:cNvPr>
+          <p:cNvSpPr>
+            <a:spLocks xmlns:a="http://schemas.openxmlformats.org/drawingml/2006/main" noGrp="1"/>
+          </p:cNvSpPr>
+          <p:nvPr/>
+        </p:nvSpPr>
+        <p:spPr>
+          <a:xfrm xmlns:a="http://schemas.openxmlformats.org/drawingml/2006/main">
+            <a:off x="1028700" y="4953000"/>
+            <a:ext cx="57150" cy="57150"/>
+          </a:xfrm>
+          <a:prstGeom xmlns:a="http://schemas.openxmlformats.org/drawingml/2006/main" prst="ellipse">
+            <a:avLst/>
+          </a:prstGeom>
+          <a:solidFill xmlns:a="http://schemas.openxmlformats.org/drawingml/2006/main">
+            <a:srgbClr val="B42318"/>
+          </a:solidFill>
+          <a:ln xmlns:a="http://schemas.openxmlformats.org/drawingml/2006/main" w="0">
+            <a:solidFill>
+              <a:srgbClr val="000000">
+                <a:alpha val="0"/>
+              </a:srgbClr>
+            </a:solidFill>
+            <a:prstDash val="solid"/>
+          </a:ln>
+        </p:spPr>
+      </p:sp>
+      <p:sp>
+        <p:nvSpPr>
+          <p:cNvPr id="11" name="">
+            <a:extLst xmlns:a="http://schemas.openxmlformats.org/drawingml/2006/main">
+              <a:ext uri="{FF2B5EF4-FFF2-40B4-BE49-F238E27FC236}">
+                <a16:creationId xmlns:a16="http://schemas.microsoft.com/office/drawing/2014/main" id="{83F36F60-5202-46E3-9C11-16C900E5D808}"/>
+              </a:ext>
+            </a:extLst>
+          </p:cNvPr>
+          <p:cNvSpPr>
+            <a:spLocks xmlns:a="http://schemas.openxmlformats.org/drawingml/2006/main" noGrp="1"/>
+          </p:cNvSpPr>
+          <p:nvPr/>
+        </p:nvSpPr>
+        <p:spPr>
+          <a:xfrm xmlns:a="http://schemas.openxmlformats.org/drawingml/2006/main">
+            <a:off x="1162050" y="4905375"/>
+            <a:ext cx="1009650" cy="152400"/>
+          </a:xfrm>
+          <a:prstGeom xmlns:a="http://schemas.openxmlformats.org/drawingml/2006/main" prst="rect">
+            <a:avLst/>
+          </a:prstGeom>
+          <a:solidFill xmlns:a="http://schemas.openxmlformats.org/drawingml/2006/main">
+            <a:srgbClr val="000000">
+              <a:alpha val="0"/>
+            </a:srgbClr>
+          </a:solidFill>
+          <a:ln xmlns:a="http://schemas.openxmlformats.org/drawingml/2006/main" w="0">
+            <a:solidFill>
+              <a:srgbClr val="000000">
+                <a:alpha val="0"/>
+              </a:srgbClr>
+            </a:solidFill>
+            <a:prstDash val="solid"/>
+          </a:ln>
+        </p:spPr>
+        <p:txBody>
+          <a:bodyPr xmlns:a="http://schemas.openxmlformats.org/drawingml/2006/main" lIns="0" tIns="0" rIns="0" bIns="0" anchor="t"/>
+          <a:lstStyle xmlns:a="http://schemas.openxmlformats.org/drawingml/2006/main"/>
+          <a:p xmlns:a="http://schemas.openxmlformats.org/drawingml/2006/main">
+            <a:pPr algn="l">
+              <a:defRPr sz="750" b="1">
+                <a:solidFill>
+                  <a:srgbClr val="B42318"/>
+                </a:solidFill>
+                <a:latin typeface="Aptos"/>
+                <a:ea typeface="Aptos"/>
+                <a:cs typeface="Aptos"/>
+              </a:defRPr>
+            </a:pPr>
+            <a:r>
+              <a:rPr sz="750" b="1">
+                <a:solidFill>
+                  <a:srgbClr val="B42318"/>
+                </a:solidFill>
+                <a:latin typeface="Aptos"/>
+                <a:ea typeface="Aptos"/>
+                <a:cs typeface="Aptos"/>
+              </a:rPr>
+              <a:t>RFP scope 3.1</a:t>
+            </a:r>
+          </a:p>
+        </p:txBody>
+      </p:sp>
+      <p:sp>
+        <p:nvSpPr>
+          <p:cNvPr id="12" name="">
+            <a:extLst xmlns:a="http://schemas.openxmlformats.org/drawingml/2006/main">
+              <a:ext uri="{FF2B5EF4-FFF2-40B4-BE49-F238E27FC236}">
+                <a16:creationId xmlns:a16="http://schemas.microsoft.com/office/drawing/2014/main" id="{EF08E3CB-EE04-433D-AA3B-995B4491257D}"/>
+              </a:ext>
+            </a:extLst>
+          </p:cNvPr>
+          <p:cNvSpPr>
+            <a:spLocks xmlns:a="http://schemas.openxmlformats.org/drawingml/2006/main" noGrp="1"/>
+          </p:cNvSpPr>
+          <p:nvPr/>
+        </p:nvSpPr>
+        <p:spPr>
+          <a:xfrm xmlns:a="http://schemas.openxmlformats.org/drawingml/2006/main">
+            <a:off x="4343400" y="3486150"/>
+            <a:ext cx="3238500" cy="1695450"/>
+          </a:xfrm>
+          <a:prstGeom xmlns:a="http://schemas.openxmlformats.org/drawingml/2006/main" prst="rect">
+            <a:avLst/>
+          </a:prstGeom>
+          <a:solidFill xmlns:a="http://schemas.openxmlformats.org/drawingml/2006/main">
+            <a:srgbClr val="FFFFFF"/>
+          </a:solidFill>
+          <a:ln xmlns:a="http://schemas.openxmlformats.org/drawingml/2006/main" w="9525">
+            <a:solidFill>
+              <a:srgbClr val="EAECF0"/>
+            </a:solidFill>
+            <a:prstDash val="solid"/>
+          </a:ln>
+        </p:spPr>
+      </p:sp>
+      <p:sp>
+        <p:nvSpPr>
+          <p:cNvPr id="13" name="">
+            <a:extLst xmlns:a="http://schemas.openxmlformats.org/drawingml/2006/main">
+              <a:ext uri="{FF2B5EF4-FFF2-40B4-BE49-F238E27FC236}">
+                <a16:creationId xmlns:a16="http://schemas.microsoft.com/office/drawing/2014/main" id="{CD43F224-38D4-4483-9F5B-B3014D5E51CA}"/>
+              </a:ext>
+            </a:extLst>
+          </p:cNvPr>
+          <p:cNvSpPr>
+            <a:spLocks xmlns:a="http://schemas.openxmlformats.org/drawingml/2006/main" noGrp="1"/>
+          </p:cNvSpPr>
+          <p:nvPr/>
+        </p:nvSpPr>
+        <p:spPr>
+          <a:xfrm xmlns:a="http://schemas.openxmlformats.org/drawingml/2006/main">
+            <a:off x="4572000" y="3695700"/>
+            <a:ext cx="2781300" cy="266700"/>
+          </a:xfrm>
+          <a:prstGeom xmlns:a="http://schemas.openxmlformats.org/drawingml/2006/main" prst="rect">
+            <a:avLst/>
+          </a:prstGeom>
+          <a:solidFill xmlns:a="http://schemas.openxmlformats.org/drawingml/2006/main">
+            <a:srgbClr val="000000">
+              <a:alpha val="0"/>
+            </a:srgbClr>
+          </a:solidFill>
+          <a:ln xmlns:a="http://schemas.openxmlformats.org/drawingml/2006/main" w="0">
+            <a:solidFill>
+              <a:srgbClr val="000000">
+                <a:alpha val="0"/>
+              </a:srgbClr>
+            </a:solidFill>
+            <a:prstDash val="solid"/>
+          </a:ln>
+        </p:spPr>
+        <p:txBody>
+          <a:bodyPr xmlns:a="http://schemas.openxmlformats.org/drawingml/2006/main" lIns="0" tIns="0" rIns="0" bIns="0" anchor="t"/>
+          <a:lstStyle xmlns:a="http://schemas.openxmlformats.org/drawingml/2006/main"/>
+          <a:p xmlns:a="http://schemas.openxmlformats.org/drawingml/2006/main">
+            <a:pPr algn="l">
+              <a:defRPr sz="1650" b="1">
+                <a:solidFill>
+                  <a:srgbClr val="08111F"/>
+                </a:solidFill>
+                <a:latin typeface="Aptos"/>
+                <a:ea typeface="Aptos"/>
+                <a:cs typeface="Aptos"/>
+              </a:defRPr>
+            </a:pPr>
+            <a:r>
+              <a:rPr sz="1650" b="1">
+                <a:solidFill>
+                  <a:srgbClr val="08111F"/>
+                </a:solidFill>
+                <a:latin typeface="Aptos"/>
+                <a:ea typeface="Aptos"/>
+                <a:cs typeface="Aptos"/>
+              </a:rPr>
+              <a:t>Integration</a:t>
+            </a:r>
+          </a:p>
+        </p:txBody>
+      </p:sp>
+      <p:sp>
+        <p:nvSpPr>
+          <p:cNvPr id="14" name="">
+            <a:extLst xmlns:a="http://schemas.openxmlformats.org/drawingml/2006/main">
+              <a:ext uri="{FF2B5EF4-FFF2-40B4-BE49-F238E27FC236}">
+                <a16:creationId xmlns:a16="http://schemas.microsoft.com/office/drawing/2014/main" id="{651FD933-002E-46B9-B9C7-1AA51270AE67}"/>
+              </a:ext>
+            </a:extLst>
+          </p:cNvPr>
+          <p:cNvSpPr>
+            <a:spLocks xmlns:a="http://schemas.openxmlformats.org/drawingml/2006/main" noGrp="1"/>
+          </p:cNvSpPr>
+          <p:nvPr/>
+        </p:nvSpPr>
+        <p:spPr>
+          <a:xfrm xmlns:a="http://schemas.openxmlformats.org/drawingml/2006/main">
+            <a:off x="4572000" y="4114800"/>
+            <a:ext cx="2724150" cy="552450"/>
+          </a:xfrm>
+          <a:prstGeom xmlns:a="http://schemas.openxmlformats.org/drawingml/2006/main" prst="rect">
+            <a:avLst/>
+          </a:prstGeom>
+          <a:solidFill xmlns:a="http://schemas.openxmlformats.org/drawingml/2006/main">
+            <a:srgbClr val="000000">
+              <a:alpha val="0"/>
+            </a:srgbClr>
+          </a:solidFill>
+          <a:ln xmlns:a="http://schemas.openxmlformats.org/drawingml/2006/main" w="0">
+            <a:solidFill>
+              <a:srgbClr val="000000">
+                <a:alpha val="0"/>
+              </a:srgbClr>
+            </a:solidFill>
+            <a:prstDash val="solid"/>
+          </a:ln>
+        </p:spPr>
+        <p:txBody>
+          <a:bodyPr xmlns:a="http://schemas.openxmlformats.org/drawingml/2006/main" lIns="0" tIns="0" rIns="0" bIns="0" anchor="t"/>
+          <a:lstStyle xmlns:a="http://schemas.openxmlformats.org/drawingml/2006/main"/>
+          <a:p xmlns:a="http://schemas.openxmlformats.org/drawingml/2006/main">
+            <a:pPr algn="l">
+              <a:defRPr sz="1013" b="0">
+                <a:solidFill>
+                  <a:srgbClr val="344054"/>
+                </a:solidFill>
+                <a:latin typeface="Aptos"/>
+                <a:ea typeface="Aptos"/>
+                <a:cs typeface="Aptos"/>
+              </a:defRPr>
+            </a:pPr>
+            <a:r>
+              <a:rPr sz="1013" b="0">
+                <a:solidFill>
+                  <a:srgbClr val="344054"/>
+                </a:solidFill>
+                <a:latin typeface="Aptos"/>
+                <a:ea typeface="Aptos"/>
+                <a:cs typeface="Aptos"/>
+              </a:rPr>
+              <a:t>API gateway and partner connectivity over REST, SOAP, and SFTP, message routing and transformation, partner-specific mapping, and ISO 20022 support.</a:t>
+            </a:r>
+          </a:p>
+        </p:txBody>
+      </p:sp>
+      <p:sp>
+        <p:nvSpPr>
+          <p:cNvPr id="15" name="">
+            <a:extLst xmlns:a="http://schemas.openxmlformats.org/drawingml/2006/main">
+              <a:ext uri="{FF2B5EF4-FFF2-40B4-BE49-F238E27FC236}">
+                <a16:creationId xmlns:a16="http://schemas.microsoft.com/office/drawing/2014/main" id="{64528521-E705-452B-BFDE-5EAD746E9824}"/>
+              </a:ext>
+            </a:extLst>
+          </p:cNvPr>
+          <p:cNvSpPr>
+            <a:spLocks xmlns:a="http://schemas.openxmlformats.org/drawingml/2006/main" noGrp="1"/>
+          </p:cNvSpPr>
+          <p:nvPr/>
+        </p:nvSpPr>
+        <p:spPr>
+          <a:xfrm xmlns:a="http://schemas.openxmlformats.org/drawingml/2006/main">
+            <a:off x="4572000" y="4838700"/>
+            <a:ext cx="1352550" cy="285750"/>
+          </a:xfrm>
+          <a:prstGeom xmlns:a="http://schemas.openxmlformats.org/drawingml/2006/main" prst="rect">
+            <a:avLst/>
+          </a:prstGeom>
+          <a:solidFill xmlns:a="http://schemas.openxmlformats.org/drawingml/2006/main">
+            <a:srgbClr val="FFFAEB"/>
+          </a:solidFill>
+          <a:ln xmlns:a="http://schemas.openxmlformats.org/drawingml/2006/main" w="9525">
+            <a:solidFill>
+              <a:srgbClr val="B54708">
+                <a:alpha val="20000"/>
+              </a:srgbClr>
+            </a:solidFill>
+            <a:prstDash val="solid"/>
+          </a:ln>
+        </p:spPr>
+      </p:sp>
+      <p:sp>
+        <p:nvSpPr>
+          <p:cNvPr id="16" name="">
+            <a:extLst xmlns:a="http://schemas.openxmlformats.org/drawingml/2006/main">
+              <a:ext uri="{FF2B5EF4-FFF2-40B4-BE49-F238E27FC236}">
+                <a16:creationId xmlns:a16="http://schemas.microsoft.com/office/drawing/2014/main" id="{1F96B5E7-5041-4390-8A18-BCF193FD22C5}"/>
+              </a:ext>
+            </a:extLst>
+          </p:cNvPr>
+          <p:cNvSpPr>
+            <a:spLocks xmlns:a="http://schemas.openxmlformats.org/drawingml/2006/main" noGrp="1"/>
+          </p:cNvSpPr>
+          <p:nvPr/>
+        </p:nvSpPr>
+        <p:spPr>
+          <a:xfrm xmlns:a="http://schemas.openxmlformats.org/drawingml/2006/main">
+            <a:off x="4686300" y="4953000"/>
+            <a:ext cx="57150" cy="57150"/>
+          </a:xfrm>
+          <a:prstGeom xmlns:a="http://schemas.openxmlformats.org/drawingml/2006/main" prst="ellipse">
+            <a:avLst/>
+          </a:prstGeom>
+          <a:solidFill xmlns:a="http://schemas.openxmlformats.org/drawingml/2006/main">
+            <a:srgbClr val="B54708"/>
+          </a:solidFill>
+          <a:ln xmlns:a="http://schemas.openxmlformats.org/drawingml/2006/main" w="0">
+            <a:solidFill>
+              <a:srgbClr val="000000">
+                <a:alpha val="0"/>
+              </a:srgbClr>
+            </a:solidFill>
+            <a:prstDash val="solid"/>
+          </a:ln>
+        </p:spPr>
+      </p:sp>
+      <p:sp>
+        <p:nvSpPr>
+          <p:cNvPr id="17" name="">
+            <a:extLst xmlns:a="http://schemas.openxmlformats.org/drawingml/2006/main">
+              <a:ext uri="{FF2B5EF4-FFF2-40B4-BE49-F238E27FC236}">
+                <a16:creationId xmlns:a16="http://schemas.microsoft.com/office/drawing/2014/main" id="{DFB58BB5-D983-4DA7-B992-CBF32E85ED96}"/>
+              </a:ext>
+            </a:extLst>
+          </p:cNvPr>
+          <p:cNvSpPr>
+            <a:spLocks xmlns:a="http://schemas.openxmlformats.org/drawingml/2006/main" noGrp="1"/>
+          </p:cNvSpPr>
+          <p:nvPr/>
+        </p:nvSpPr>
+        <p:spPr>
+          <a:xfrm xmlns:a="http://schemas.openxmlformats.org/drawingml/2006/main">
+            <a:off x="4819650" y="4905375"/>
+            <a:ext cx="1009650" cy="152400"/>
+          </a:xfrm>
+          <a:prstGeom xmlns:a="http://schemas.openxmlformats.org/drawingml/2006/main" prst="rect">
+            <a:avLst/>
+          </a:prstGeom>
+          <a:solidFill xmlns:a="http://schemas.openxmlformats.org/drawingml/2006/main">
+            <a:srgbClr val="000000">
+              <a:alpha val="0"/>
+            </a:srgbClr>
+          </a:solidFill>
+          <a:ln xmlns:a="http://schemas.openxmlformats.org/drawingml/2006/main" w="0">
+            <a:solidFill>
+              <a:srgbClr val="000000">
+                <a:alpha val="0"/>
+              </a:srgbClr>
+            </a:solidFill>
+            <a:prstDash val="solid"/>
+          </a:ln>
+        </p:spPr>
+        <p:txBody>
+          <a:bodyPr xmlns:a="http://schemas.openxmlformats.org/drawingml/2006/main" lIns="0" tIns="0" rIns="0" bIns="0" anchor="t"/>
+          <a:lstStyle xmlns:a="http://schemas.openxmlformats.org/drawingml/2006/main"/>
+          <a:p xmlns:a="http://schemas.openxmlformats.org/drawingml/2006/main">
+            <a:pPr algn="l">
+              <a:defRPr sz="750" b="1">
+                <a:solidFill>
+                  <a:srgbClr val="B54708"/>
+                </a:solidFill>
+                <a:latin typeface="Aptos"/>
+                <a:ea typeface="Aptos"/>
+                <a:cs typeface="Aptos"/>
+              </a:defRPr>
+            </a:pPr>
+            <a:r>
+              <a:rPr sz="750" b="1">
+                <a:solidFill>
+                  <a:srgbClr val="B54708"/>
+                </a:solidFill>
+                <a:latin typeface="Aptos"/>
+                <a:ea typeface="Aptos"/>
+                <a:cs typeface="Aptos"/>
+              </a:rPr>
+              <a:t>RFP scope 3.2</a:t>
+            </a:r>
+          </a:p>
+        </p:txBody>
+      </p:sp>
+      <p:sp>
+        <p:nvSpPr>
+          <p:cNvPr id="18" name="">
+            <a:extLst xmlns:a="http://schemas.openxmlformats.org/drawingml/2006/main">
+              <a:ext uri="{FF2B5EF4-FFF2-40B4-BE49-F238E27FC236}">
+                <a16:creationId xmlns:a16="http://schemas.microsoft.com/office/drawing/2014/main" id="{4312DA6E-D6B8-42C8-B206-75E237359A2F}"/>
+              </a:ext>
+            </a:extLst>
+          </p:cNvPr>
+          <p:cNvSpPr>
+            <a:spLocks xmlns:a="http://schemas.openxmlformats.org/drawingml/2006/main" noGrp="1"/>
+          </p:cNvSpPr>
+          <p:nvPr/>
+        </p:nvSpPr>
+        <p:spPr>
+          <a:xfrm xmlns:a="http://schemas.openxmlformats.org/drawingml/2006/main">
+            <a:off x="8001000" y="3486150"/>
+            <a:ext cx="3238500" cy="1695450"/>
+          </a:xfrm>
+          <a:prstGeom xmlns:a="http://schemas.openxmlformats.org/drawingml/2006/main" prst="rect">
+            <a:avLst/>
+          </a:prstGeom>
+          <a:solidFill xmlns:a="http://schemas.openxmlformats.org/drawingml/2006/main">
+            <a:srgbClr val="FFFFFF"/>
+          </a:solidFill>
+          <a:ln xmlns:a="http://schemas.openxmlformats.org/drawingml/2006/main" w="9525">
+            <a:solidFill>
+              <a:srgbClr val="EAECF0"/>
+            </a:solidFill>
+            <a:prstDash val="solid"/>
+          </a:ln>
+        </p:spPr>
+      </p:sp>
+      <p:sp>
+        <p:nvSpPr>
+          <p:cNvPr id="19" name="">
+            <a:extLst xmlns:a="http://schemas.openxmlformats.org/drawingml/2006/main">
+              <a:ext uri="{FF2B5EF4-FFF2-40B4-BE49-F238E27FC236}">
+                <a16:creationId xmlns:a16="http://schemas.microsoft.com/office/drawing/2014/main" id="{1A4C3A6E-8681-417C-A27E-332EB90716DE}"/>
+              </a:ext>
+            </a:extLst>
+          </p:cNvPr>
+          <p:cNvSpPr>
+            <a:spLocks xmlns:a="http://schemas.openxmlformats.org/drawingml/2006/main" noGrp="1"/>
+          </p:cNvSpPr>
+          <p:nvPr/>
+        </p:nvSpPr>
+        <p:spPr>
+          <a:xfrm xmlns:a="http://schemas.openxmlformats.org/drawingml/2006/main">
+            <a:off x="8229600" y="3695700"/>
+            <a:ext cx="2781300" cy="266700"/>
+          </a:xfrm>
+          <a:prstGeom xmlns:a="http://schemas.openxmlformats.org/drawingml/2006/main" prst="rect">
+            <a:avLst/>
+          </a:prstGeom>
+          <a:solidFill xmlns:a="http://schemas.openxmlformats.org/drawingml/2006/main">
+            <a:srgbClr val="000000">
+              <a:alpha val="0"/>
+            </a:srgbClr>
+          </a:solidFill>
+          <a:ln xmlns:a="http://schemas.openxmlformats.org/drawingml/2006/main" w="0">
+            <a:solidFill>
+              <a:srgbClr val="000000">
+                <a:alpha val="0"/>
+              </a:srgbClr>
+            </a:solidFill>
+            <a:prstDash val="solid"/>
+          </a:ln>
+        </p:spPr>
+        <p:txBody>
+          <a:bodyPr xmlns:a="http://schemas.openxmlformats.org/drawingml/2006/main" lIns="0" tIns="0" rIns="0" bIns="0" anchor="t"/>
+          <a:lstStyle xmlns:a="http://schemas.openxmlformats.org/drawingml/2006/main"/>
+          <a:p xmlns:a="http://schemas.openxmlformats.org/drawingml/2006/main">
+            <a:pPr algn="l">
+              <a:defRPr sz="1650" b="1">
+                <a:solidFill>
+                  <a:srgbClr val="08111F"/>
+                </a:solidFill>
+                <a:latin typeface="Aptos"/>
+                <a:ea typeface="Aptos"/>
+                <a:cs typeface="Aptos"/>
+              </a:defRPr>
+            </a:pPr>
+            <a:r>
+              <a:rPr sz="1650" b="1">
+                <a:solidFill>
+                  <a:srgbClr val="08111F"/>
+                </a:solidFill>
+                <a:latin typeface="Aptos"/>
+                <a:ea typeface="Aptos"/>
+                <a:cs typeface="Aptos"/>
+              </a:rPr>
+              <a:t>Remittance processing</a:t>
+            </a:r>
+          </a:p>
+        </p:txBody>
+      </p:sp>
+      <p:sp>
+        <p:nvSpPr>
+          <p:cNvPr id="20" name="">
+            <a:extLst xmlns:a="http://schemas.openxmlformats.org/drawingml/2006/main">
+              <a:ext uri="{FF2B5EF4-FFF2-40B4-BE49-F238E27FC236}">
+                <a16:creationId xmlns:a16="http://schemas.microsoft.com/office/drawing/2014/main" id="{311E402D-E2DA-4C0A-9001-C9A4D06D4F3A}"/>
+              </a:ext>
+            </a:extLst>
+          </p:cNvPr>
+          <p:cNvSpPr>
+            <a:spLocks xmlns:a="http://schemas.openxmlformats.org/drawingml/2006/main" noGrp="1"/>
+          </p:cNvSpPr>
+          <p:nvPr/>
+        </p:nvSpPr>
+        <p:spPr>
+          <a:xfrm xmlns:a="http://schemas.openxmlformats.org/drawingml/2006/main">
+            <a:off x="8229600" y="4114800"/>
+            <a:ext cx="2724150" cy="552450"/>
+          </a:xfrm>
+          <a:prstGeom xmlns:a="http://schemas.openxmlformats.org/drawingml/2006/main" prst="rect">
+            <a:avLst/>
+          </a:prstGeom>
+          <a:solidFill xmlns:a="http://schemas.openxmlformats.org/drawingml/2006/main">
+            <a:srgbClr val="000000">
+              <a:alpha val="0"/>
+            </a:srgbClr>
+          </a:solidFill>
+          <a:ln xmlns:a="http://schemas.openxmlformats.org/drawingml/2006/main" w="0">
+            <a:solidFill>
+              <a:srgbClr val="000000">
+                <a:alpha val="0"/>
+              </a:srgbClr>
+            </a:solidFill>
+            <a:prstDash val="solid"/>
+          </a:ln>
+        </p:spPr>
+        <p:txBody>
+          <a:bodyPr xmlns:a="http://schemas.openxmlformats.org/drawingml/2006/main" lIns="0" tIns="0" rIns="0" bIns="0" anchor="t"/>
+          <a:lstStyle xmlns:a="http://schemas.openxmlformats.org/drawingml/2006/main"/>
+          <a:p xmlns:a="http://schemas.openxmlformats.org/drawingml/2006/main">
+            <a:pPr algn="l">
+              <a:defRPr sz="1013" b="0">
+                <a:solidFill>
+                  <a:srgbClr val="344054"/>
+                </a:solidFill>
+                <a:latin typeface="Aptos"/>
+                <a:ea typeface="Aptos"/>
+                <a:cs typeface="Aptos"/>
+              </a:defRPr>
+            </a:pPr>
+            <a:r>
+              <a:rPr sz="1013" b="0">
+                <a:solidFill>
+                  <a:srgbClr val="344054"/>
+                </a:solidFill>
+                <a:latin typeface="Aptos"/>
+                <a:ea typeface="Aptos"/>
+                <a:cs typeface="Aptos"/>
+              </a:rPr>
+              <a:t>Instruction receipt and validation, beneficiary and account verification, routing and payment processing, returns, reversals, and recall management.</a:t>
+            </a:r>
+          </a:p>
+        </p:txBody>
+      </p:sp>
+      <p:sp>
+        <p:nvSpPr>
+          <p:cNvPr id="21" name="">
+            <a:extLst xmlns:a="http://schemas.openxmlformats.org/drawingml/2006/main">
+              <a:ext uri="{FF2B5EF4-FFF2-40B4-BE49-F238E27FC236}">
+                <a16:creationId xmlns:a16="http://schemas.microsoft.com/office/drawing/2014/main" id="{0BABFB37-2523-46B6-A564-38216962A7BE}"/>
+              </a:ext>
+            </a:extLst>
+          </p:cNvPr>
+          <p:cNvSpPr>
+            <a:spLocks xmlns:a="http://schemas.openxmlformats.org/drawingml/2006/main" noGrp="1"/>
+          </p:cNvSpPr>
+          <p:nvPr/>
+        </p:nvSpPr>
+        <p:spPr>
+          <a:xfrm xmlns:a="http://schemas.openxmlformats.org/drawingml/2006/main">
+            <a:off x="8229600" y="4838700"/>
+            <a:ext cx="1352550" cy="285750"/>
+          </a:xfrm>
+          <a:prstGeom xmlns:a="http://schemas.openxmlformats.org/drawingml/2006/main" prst="rect">
+            <a:avLst/>
+          </a:prstGeom>
+          <a:solidFill xmlns:a="http://schemas.openxmlformats.org/drawingml/2006/main">
+            <a:srgbClr val="EAF2FF"/>
+          </a:solidFill>
+          <a:ln xmlns:a="http://schemas.openxmlformats.org/drawingml/2006/main" w="9525">
+            <a:solidFill>
+              <a:srgbClr val="0756D9">
+                <a:alpha val="20000"/>
+              </a:srgbClr>
+            </a:solidFill>
+            <a:prstDash val="solid"/>
+          </a:ln>
+        </p:spPr>
+      </p:sp>
+      <p:sp>
+        <p:nvSpPr>
+          <p:cNvPr id="22" name="">
+            <a:extLst xmlns:a="http://schemas.openxmlformats.org/drawingml/2006/main">
+              <a:ext uri="{FF2B5EF4-FFF2-40B4-BE49-F238E27FC236}">
+                <a16:creationId xmlns:a16="http://schemas.microsoft.com/office/drawing/2014/main" id="{8D45D896-0603-44E1-9B05-0CB64D9DBB54}"/>
+              </a:ext>
+            </a:extLst>
+          </p:cNvPr>
+          <p:cNvSpPr>
+            <a:spLocks xmlns:a="http://schemas.openxmlformats.org/drawingml/2006/main" noGrp="1"/>
+          </p:cNvSpPr>
+          <p:nvPr/>
+        </p:nvSpPr>
+        <p:spPr>
+          <a:xfrm xmlns:a="http://schemas.openxmlformats.org/drawingml/2006/main">
+            <a:off x="8343900" y="4953000"/>
+            <a:ext cx="57150" cy="57150"/>
+          </a:xfrm>
+          <a:prstGeom xmlns:a="http://schemas.openxmlformats.org/drawingml/2006/main" prst="ellipse">
+            <a:avLst/>
+          </a:prstGeom>
+          <a:solidFill xmlns:a="http://schemas.openxmlformats.org/drawingml/2006/main">
+            <a:srgbClr val="0756D9"/>
+          </a:solidFill>
+          <a:ln xmlns:a="http://schemas.openxmlformats.org/drawingml/2006/main" w="0">
+            <a:solidFill>
+              <a:srgbClr val="000000">
+                <a:alpha val="0"/>
+              </a:srgbClr>
+            </a:solidFill>
+            <a:prstDash val="solid"/>
+          </a:ln>
+        </p:spPr>
+      </p:sp>
+      <p:sp>
+        <p:nvSpPr>
+          <p:cNvPr id="23" name="">
+            <a:extLst xmlns:a="http://schemas.openxmlformats.org/drawingml/2006/main">
+              <a:ext uri="{FF2B5EF4-FFF2-40B4-BE49-F238E27FC236}">
+                <a16:creationId xmlns:a16="http://schemas.microsoft.com/office/drawing/2014/main" id="{029F89BA-F2A8-43F6-B149-04F0D411B7BA}"/>
+              </a:ext>
+            </a:extLst>
+          </p:cNvPr>
+          <p:cNvSpPr>
+            <a:spLocks xmlns:a="http://schemas.openxmlformats.org/drawingml/2006/main" noGrp="1"/>
+          </p:cNvSpPr>
+          <p:nvPr/>
+        </p:nvSpPr>
+        <p:spPr>
+          <a:xfrm xmlns:a="http://schemas.openxmlformats.org/drawingml/2006/main">
+            <a:off x="8477250" y="4905375"/>
+            <a:ext cx="1009650" cy="152400"/>
+          </a:xfrm>
+          <a:prstGeom xmlns:a="http://schemas.openxmlformats.org/drawingml/2006/main" prst="rect">
+            <a:avLst/>
+          </a:prstGeom>
+          <a:solidFill xmlns:a="http://schemas.openxmlformats.org/drawingml/2006/main">
+            <a:srgbClr val="000000">
+              <a:alpha val="0"/>
+            </a:srgbClr>
+          </a:solidFill>
+          <a:ln xmlns:a="http://schemas.openxmlformats.org/drawingml/2006/main" w="0">
+            <a:solidFill>
+              <a:srgbClr val="000000">
+                <a:alpha val="0"/>
+              </a:srgbClr>
+            </a:solidFill>
+            <a:prstDash val="solid"/>
+          </a:ln>
+        </p:spPr>
+        <p:txBody>
+          <a:bodyPr xmlns:a="http://schemas.openxmlformats.org/drawingml/2006/main" lIns="0" tIns="0" rIns="0" bIns="0" anchor="t"/>
+          <a:lstStyle xmlns:a="http://schemas.openxmlformats.org/drawingml/2006/main"/>
+          <a:p xmlns:a="http://schemas.openxmlformats.org/drawingml/2006/main">
+            <a:pPr algn="l">
+              <a:defRPr sz="750" b="1">
+                <a:solidFill>
+                  <a:srgbClr val="0756D9"/>
+                </a:solidFill>
+                <a:latin typeface="Aptos"/>
+                <a:ea typeface="Aptos"/>
+                <a:cs typeface="Aptos"/>
+              </a:defRPr>
+            </a:pPr>
+            <a:r>
+              <a:rPr sz="750" b="1">
+                <a:solidFill>
+                  <a:srgbClr val="0756D9"/>
+                </a:solidFill>
+                <a:latin typeface="Aptos"/>
+                <a:ea typeface="Aptos"/>
+                <a:cs typeface="Aptos"/>
+              </a:rPr>
+              <a:t>RFP scope 3.3</a:t>
+            </a:r>
+          </a:p>
+        </p:txBody>
+      </p:sp>
+      <p:sp>
+        <p:nvSpPr>
+          <p:cNvPr id="24" name="">
+            <a:extLst xmlns:a="http://schemas.openxmlformats.org/drawingml/2006/main">
+              <a:ext uri="{FF2B5EF4-FFF2-40B4-BE49-F238E27FC236}">
+                <a16:creationId xmlns:a16="http://schemas.microsoft.com/office/drawing/2014/main" id="{9EAB0D1B-1BEF-4683-B9BD-1D08D79B24B8}"/>
+              </a:ext>
+            </a:extLst>
+          </p:cNvPr>
+          <p:cNvSpPr>
+            <a:spLocks xmlns:a="http://schemas.openxmlformats.org/drawingml/2006/main" noGrp="1"/>
+          </p:cNvSpPr>
+          <p:nvPr/>
+        </p:nvSpPr>
+        <p:spPr>
+          <a:xfrm xmlns:a="http://schemas.openxmlformats.org/drawingml/2006/main">
+            <a:off x="609600" y="6400800"/>
+            <a:ext cx="9829800" cy="9525"/>
+          </a:xfrm>
+          <a:prstGeom xmlns:a="http://schemas.openxmlformats.org/drawingml/2006/main" prst="rect">
+            <a:avLst/>
+          </a:prstGeom>
+          <a:solidFill xmlns:a="http://schemas.openxmlformats.org/drawingml/2006/main">
+            <a:srgbClr val="EAECF0"/>
+          </a:solidFill>
+          <a:ln xmlns:a="http://schemas.openxmlformats.org/drawingml/2006/main" w="0">
+            <a:solidFill>
+              <a:srgbClr val="000000">
+                <a:alpha val="0"/>
+              </a:srgbClr>
+            </a:solidFill>
+            <a:prstDash val="solid"/>
+          </a:ln>
+        </p:spPr>
+      </p:sp>
+      <p:sp>
+        <p:nvSpPr>
+          <p:cNvPr id="25" name="">
+            <a:extLst xmlns:a="http://schemas.openxmlformats.org/drawingml/2006/main">
+              <a:ext uri="{FF2B5EF4-FFF2-40B4-BE49-F238E27FC236}">
+                <a16:creationId xmlns:a16="http://schemas.microsoft.com/office/drawing/2014/main" id="{34CD5E0A-A7B3-4AA7-BB22-FADD630807F9}"/>
+              </a:ext>
+            </a:extLst>
+          </p:cNvPr>
+          <p:cNvSpPr>
+            <a:spLocks xmlns:a="http://schemas.openxmlformats.org/drawingml/2006/main" noGrp="1"/>
+          </p:cNvSpPr>
+          <p:nvPr/>
+        </p:nvSpPr>
+        <p:spPr>
+          <a:xfrm xmlns:a="http://schemas.openxmlformats.org/drawingml/2006/main">
+            <a:off x="609600" y="6515100"/>
+            <a:ext cx="6858000" cy="171450"/>
+          </a:xfrm>
+          <a:prstGeom xmlns:a="http://schemas.openxmlformats.org/drawingml/2006/main" prst="rect">
+            <a:avLst/>
+          </a:prstGeom>
+          <a:solidFill xmlns:a="http://schemas.openxmlformats.org/drawingml/2006/main">
+            <a:srgbClr val="000000">
+              <a:alpha val="0"/>
+            </a:srgbClr>
+          </a:solidFill>
+          <a:ln xmlns:a="http://schemas.openxmlformats.org/drawingml/2006/main" w="0">
+            <a:solidFill>
+              <a:srgbClr val="000000">
+                <a:alpha val="0"/>
+              </a:srgbClr>
+            </a:solidFill>
+            <a:prstDash val="solid"/>
+          </a:ln>
+        </p:spPr>
+        <p:txBody>
+          <a:bodyPr xmlns:a="http://schemas.openxmlformats.org/drawingml/2006/main" lIns="0" tIns="0" rIns="0" bIns="0" anchor="t"/>
+          <a:lstStyle xmlns:a="http://schemas.openxmlformats.org/drawingml/2006/main"/>
+          <a:p xmlns:a="http://schemas.openxmlformats.org/drawingml/2006/main">
+            <a:pPr algn="l">
+              <a:defRPr sz="750" b="0">
+                <a:solidFill>
+                  <a:srgbClr val="667085"/>
+                </a:solidFill>
+                <a:latin typeface="Aptos"/>
+                <a:ea typeface="Aptos"/>
+                <a:cs typeface="Aptos"/>
+              </a:defRPr>
+            </a:pPr>
+            <a:r>
+              <a:rPr sz="750" b="0">
+                <a:solidFill>
+                  <a:srgbClr val="667085"/>
+                </a:solidFill>
+                <a:latin typeface="Aptos"/>
+                <a:ea typeface="Aptos"/>
+                <a:cs typeface="Aptos"/>
+              </a:rPr>
+              <a:t>CloudSpace Technologies / INSWITCH CIO-ED briefing</a:t>
+            </a:r>
+          </a:p>
+        </p:txBody>
+      </p:sp>
+      <p:sp>
+        <p:nvSpPr>
+          <p:cNvPr id="26" name="">
+            <a:extLst xmlns:a="http://schemas.openxmlformats.org/drawingml/2006/main">
+              <a:ext uri="{FF2B5EF4-FFF2-40B4-BE49-F238E27FC236}">
+                <a16:creationId xmlns:a16="http://schemas.microsoft.com/office/drawing/2014/main" id="{38F1E90B-9962-47D7-AFE1-552DB1958871}"/>
+              </a:ext>
+            </a:extLst>
+          </p:cNvPr>
+          <p:cNvSpPr>
+            <a:spLocks xmlns:a="http://schemas.openxmlformats.org/drawingml/2006/main" noGrp="1"/>
+          </p:cNvSpPr>
+          <p:nvPr/>
+        </p:nvSpPr>
+        <p:spPr>
+          <a:xfrm xmlns:a="http://schemas.openxmlformats.org/drawingml/2006/main">
+            <a:off x="10839450" y="6515100"/>
+            <a:ext cx="666750" cy="171450"/>
+          </a:xfrm>
+          <a:prstGeom xmlns:a="http://schemas.openxmlformats.org/drawingml/2006/main" prst="rect">
+            <a:avLst/>
+          </a:prstGeom>
+          <a:solidFill xmlns:a="http://schemas.openxmlformats.org/drawingml/2006/main">
+            <a:srgbClr val="000000">
+              <a:alpha val="0"/>
+            </a:srgbClr>
+          </a:solidFill>
+          <a:ln xmlns:a="http://schemas.openxmlformats.org/drawingml/2006/main" w="0">
+            <a:solidFill>
+              <a:srgbClr val="000000">
+                <a:alpha val="0"/>
+              </a:srgbClr>
+            </a:solidFill>
+            <a:prstDash val="solid"/>
+          </a:ln>
+        </p:spPr>
+        <p:txBody>
+          <a:bodyPr xmlns:a="http://schemas.openxmlformats.org/drawingml/2006/main" lIns="0" tIns="0" rIns="0" bIns="0" anchor="t"/>
+          <a:lstStyle xmlns:a="http://schemas.openxmlformats.org/drawingml/2006/main"/>
+          <a:p xmlns:a="http://schemas.openxmlformats.org/drawingml/2006/main">
+            <a:pPr algn="r">
+              <a:defRPr sz="900" b="0">
+                <a:solidFill>
+                  <a:srgbClr val="667085"/>
+                </a:solidFill>
+                <a:latin typeface="Aptos"/>
+                <a:ea typeface="Aptos"/>
+                <a:cs typeface="Aptos"/>
+              </a:defRPr>
+            </a:pPr>
+            <a:r>
+              <a:rPr sz="900" b="0">
+                <a:solidFill>
+                  <a:srgbClr val="667085"/>
+                </a:solidFill>
+                <a:latin typeface="Aptos"/>
+                <a:ea typeface="Aptos"/>
+                <a:cs typeface="Aptos"/>
+              </a:rPr>
+              <a:t>05</a:t>
+            </a:r>
+          </a:p>
+        </p:txBody>
+      </p:sp>
+    </p:spTree>
+    <p:extLst>
+      <p:ext uri="{BB962C8B-B14F-4D97-AF65-F5344CB8AC3E}">
+        <p14:creationId xmlns:p14="http://schemas.microsoft.com/office/powerpoint/2010/main" val="1628249239"/>
+      </p:ext>
+    </p:extLst>
+  </p:cSld>
+</p:sld>
+</file>
+
+<file path=ppt/slides/slide21.xml><?xml version="1.0" encoding="utf-8"?>
+<p:sld xmlns:p="http://schemas.openxmlformats.org/presentationml/2006/main">
+  <p:cSld>
+    <p:spTree>
+      <p:nvGrpSpPr>
+        <p:cNvPr id="1" name=""/>
+        <p:cNvGrpSpPr/>
+        <p:nvPr/>
+      </p:nvGrpSpPr>
+      <p:grpSpPr>
+        <a:xfrm xmlns:a="http://schemas.openxmlformats.org/drawingml/2006/main"/>
+      </p:grpSpPr>
+      <p:sp>
+        <p:nvSpPr>
+          <p:cNvPr id="1" name="">
+            <a:extLst xmlns:a="http://schemas.openxmlformats.org/drawingml/2006/main">
+              <a:ext uri="{FF2B5EF4-FFF2-40B4-BE49-F238E27FC236}">
+                <a16:creationId xmlns:a16="http://schemas.microsoft.com/office/drawing/2014/main" id="{2B9A7A4D-F628-410C-8AAC-C4B6D3BE3442}"/>
+              </a:ext>
+            </a:extLst>
+          </p:cNvPr>
+          <p:cNvSpPr>
+            <a:spLocks xmlns:a="http://schemas.openxmlformats.org/drawingml/2006/main" noGrp="1"/>
+          </p:cNvSpPr>
+          <p:nvPr/>
+        </p:nvSpPr>
+        <p:spPr>
+          <a:xfrm xmlns:a="http://schemas.openxmlformats.org/drawingml/2006/main">
+            <a:off x="0" y="0"/>
+            <a:ext cx="12192000" cy="6858000"/>
+          </a:xfrm>
+          <a:prstGeom xmlns:a="http://schemas.openxmlformats.org/drawingml/2006/main" prst="rect">
+            <a:avLst/>
+          </a:prstGeom>
+          <a:solidFill xmlns:a="http://schemas.openxmlformats.org/drawingml/2006/main">
+            <a:srgbClr val="F5F7FA"/>
+          </a:solidFill>
+          <a:ln xmlns:a="http://schemas.openxmlformats.org/drawingml/2006/main" w="0">
+            <a:solidFill>
+              <a:srgbClr val="000000">
+                <a:alpha val="0"/>
+              </a:srgbClr>
+            </a:solidFill>
+            <a:prstDash val="solid"/>
+          </a:ln>
+        </p:spPr>
+      </p:sp>
+      <p:sp>
+        <p:nvSpPr>
+          <p:cNvPr id="2" name="">
+            <a:extLst xmlns:a="http://schemas.openxmlformats.org/drawingml/2006/main">
+              <a:ext uri="{FF2B5EF4-FFF2-40B4-BE49-F238E27FC236}">
+                <a16:creationId xmlns:a16="http://schemas.microsoft.com/office/drawing/2014/main" id="{1BC6749E-BFEA-44E4-A640-143089CF0F35}"/>
+              </a:ext>
+            </a:extLst>
+          </p:cNvPr>
+          <p:cNvSpPr>
+            <a:spLocks xmlns:a="http://schemas.openxmlformats.org/drawingml/2006/main" noGrp="1"/>
+          </p:cNvSpPr>
+          <p:nvPr/>
+        </p:nvSpPr>
+        <p:spPr>
+          <a:xfrm xmlns:a="http://schemas.openxmlformats.org/drawingml/2006/main">
+            <a:off x="609600" y="552450"/>
+            <a:ext cx="66675" cy="66675"/>
+          </a:xfrm>
+          <a:prstGeom xmlns:a="http://schemas.openxmlformats.org/drawingml/2006/main" prst="ellipse">
+            <a:avLst/>
+          </a:prstGeom>
+          <a:solidFill xmlns:a="http://schemas.openxmlformats.org/drawingml/2006/main">
+            <a:srgbClr val="0756D9"/>
+          </a:solidFill>
+          <a:ln xmlns:a="http://schemas.openxmlformats.org/drawingml/2006/main" w="0">
+            <a:solidFill>
+              <a:srgbClr val="000000">
+                <a:alpha val="0"/>
+              </a:srgbClr>
+            </a:solidFill>
+            <a:prstDash val="solid"/>
+          </a:ln>
+        </p:spPr>
+      </p:sp>
+      <p:sp>
+        <p:nvSpPr>
+          <p:cNvPr id="3" name="">
+            <a:extLst xmlns:a="http://schemas.openxmlformats.org/drawingml/2006/main">
+              <a:ext uri="{FF2B5EF4-FFF2-40B4-BE49-F238E27FC236}">
+                <a16:creationId xmlns:a16="http://schemas.microsoft.com/office/drawing/2014/main" id="{04B10A5F-1B6B-460C-A0AD-3A3195D85861}"/>
+              </a:ext>
+            </a:extLst>
+          </p:cNvPr>
+          <p:cNvSpPr>
+            <a:spLocks xmlns:a="http://schemas.openxmlformats.org/drawingml/2006/main" noGrp="1"/>
+          </p:cNvSpPr>
+          <p:nvPr/>
+        </p:nvSpPr>
+        <p:spPr>
+          <a:xfrm xmlns:a="http://schemas.openxmlformats.org/drawingml/2006/main">
+            <a:off x="771525" y="495300"/>
+            <a:ext cx="4953000" cy="190500"/>
+          </a:xfrm>
+          <a:prstGeom xmlns:a="http://schemas.openxmlformats.org/drawingml/2006/main" prst="rect">
+            <a:avLst/>
+          </a:prstGeom>
+          <a:solidFill xmlns:a="http://schemas.openxmlformats.org/drawingml/2006/main">
+            <a:srgbClr val="000000">
+              <a:alpha val="0"/>
+            </a:srgbClr>
+          </a:solidFill>
+          <a:ln xmlns:a="http://schemas.openxmlformats.org/drawingml/2006/main" w="0">
+            <a:solidFill>
+              <a:srgbClr val="000000">
+                <a:alpha val="0"/>
+              </a:srgbClr>
+            </a:solidFill>
+            <a:prstDash val="solid"/>
+          </a:ln>
+        </p:spPr>
+        <p:txBody>
+          <a:bodyPr xmlns:a="http://schemas.openxmlformats.org/drawingml/2006/main" lIns="0" tIns="0" rIns="0" bIns="0" anchor="t"/>
+          <a:lstStyle xmlns:a="http://schemas.openxmlformats.org/drawingml/2006/main"/>
+          <a:p xmlns:a="http://schemas.openxmlformats.org/drawingml/2006/main">
+            <a:pPr algn="l">
+              <a:defRPr sz="825" b="1">
+                <a:solidFill>
+                  <a:srgbClr val="0756D9"/>
+                </a:solidFill>
+                <a:latin typeface="Aptos"/>
+                <a:ea typeface="Aptos"/>
+                <a:cs typeface="Aptos"/>
+              </a:defRPr>
+            </a:pPr>
+            <a:r>
+              <a:rPr sz="825" b="1">
+                <a:solidFill>
+                  <a:srgbClr val="0756D9"/>
+                </a:solidFill>
+                <a:latin typeface="Aptos"/>
+                <a:ea typeface="Aptos"/>
+                <a:cs typeface="Aptos"/>
+              </a:rPr>
+              <a:t>PARTNER ONBOARDING</a:t>
+            </a:r>
+          </a:p>
+        </p:txBody>
+      </p:sp>
+      <p:sp>
+        <p:nvSpPr>
+          <p:cNvPr id="4" name="">
+            <a:extLst xmlns:a="http://schemas.openxmlformats.org/drawingml/2006/main">
+              <a:ext uri="{FF2B5EF4-FFF2-40B4-BE49-F238E27FC236}">
+                <a16:creationId xmlns:a16="http://schemas.microsoft.com/office/drawing/2014/main" id="{4B13785A-073E-4B4E-AEB8-7021620A0BC5}"/>
+              </a:ext>
+            </a:extLst>
+          </p:cNvPr>
+          <p:cNvSpPr>
+            <a:spLocks xmlns:a="http://schemas.openxmlformats.org/drawingml/2006/main" noGrp="1"/>
+          </p:cNvSpPr>
+          <p:nvPr/>
+        </p:nvSpPr>
+        <p:spPr>
+          <a:xfrm xmlns:a="http://schemas.openxmlformats.org/drawingml/2006/main">
+            <a:off x="609600" y="800100"/>
+            <a:ext cx="8191500" cy="1104900"/>
+          </a:xfrm>
+          <a:prstGeom xmlns:a="http://schemas.openxmlformats.org/drawingml/2006/main" prst="rect">
+            <a:avLst/>
+          </a:prstGeom>
+          <a:solidFill xmlns:a="http://schemas.openxmlformats.org/drawingml/2006/main">
+            <a:srgbClr val="000000">
+              <a:alpha val="0"/>
+            </a:srgbClr>
+          </a:solidFill>
+          <a:ln xmlns:a="http://schemas.openxmlformats.org/drawingml/2006/main" w="0">
+            <a:solidFill>
+              <a:srgbClr val="000000">
+                <a:alpha val="0"/>
+              </a:srgbClr>
+            </a:solidFill>
+            <a:prstDash val="solid"/>
+          </a:ln>
+        </p:spPr>
+        <p:txBody>
+          <a:bodyPr xmlns:a="http://schemas.openxmlformats.org/drawingml/2006/main" lIns="0" tIns="0" rIns="0" bIns="0" anchor="t"/>
+          <a:lstStyle xmlns:a="http://schemas.openxmlformats.org/drawingml/2006/main"/>
+          <a:p xmlns:a="http://schemas.openxmlformats.org/drawingml/2006/main">
+            <a:pPr algn="l">
+              <a:defRPr sz="2850" b="1">
+                <a:solidFill>
+                  <a:srgbClr val="08111F"/>
+                </a:solidFill>
+                <a:latin typeface="Aptos Display"/>
+                <a:ea typeface="Aptos Display"/>
+                <a:cs typeface="Aptos Display"/>
+              </a:defRPr>
+            </a:pPr>
+            <a:r>
+              <a:rPr sz="2850" b="1">
+                <a:solidFill>
+                  <a:srgbClr val="08111F"/>
+                </a:solidFill>
+                <a:latin typeface="Aptos Display"/>
+                <a:ea typeface="Aptos Display"/>
+                <a:cs typeface="Aptos Display"/>
+              </a:rPr>
+              <a:t>New IMTOs onboard through configuration, not development.</a:t>
+            </a:r>
+          </a:p>
+        </p:txBody>
+      </p:sp>
+      <p:sp>
+        <p:nvSpPr>
+          <p:cNvPr id="5" name="">
+            <a:extLst xmlns:a="http://schemas.openxmlformats.org/drawingml/2006/main">
+              <a:ext uri="{FF2B5EF4-FFF2-40B4-BE49-F238E27FC236}">
+                <a16:creationId xmlns:a16="http://schemas.microsoft.com/office/drawing/2014/main" id="{F4708B59-4BBD-4153-9727-2254D1F4174C}"/>
+              </a:ext>
+            </a:extLst>
+          </p:cNvPr>
+          <p:cNvSpPr>
+            <a:spLocks xmlns:a="http://schemas.openxmlformats.org/drawingml/2006/main" noGrp="1"/>
+          </p:cNvSpPr>
+          <p:nvPr/>
+        </p:nvSpPr>
+        <p:spPr>
+          <a:xfrm xmlns:a="http://schemas.openxmlformats.org/drawingml/2006/main">
+            <a:off x="609600" y="2019300"/>
+            <a:ext cx="8191500" cy="647700"/>
+          </a:xfrm>
+          <a:prstGeom xmlns:a="http://schemas.openxmlformats.org/drawingml/2006/main" prst="rect">
+            <a:avLst/>
+          </a:prstGeom>
+          <a:solidFill xmlns:a="http://schemas.openxmlformats.org/drawingml/2006/main">
+            <a:srgbClr val="000000">
+              <a:alpha val="0"/>
+            </a:srgbClr>
+          </a:solidFill>
+          <a:ln xmlns:a="http://schemas.openxmlformats.org/drawingml/2006/main" w="0">
+            <a:solidFill>
+              <a:srgbClr val="000000">
+                <a:alpha val="0"/>
+              </a:srgbClr>
+            </a:solidFill>
+            <a:prstDash val="solid"/>
+          </a:ln>
+        </p:spPr>
+        <p:txBody>
+          <a:bodyPr xmlns:a="http://schemas.openxmlformats.org/drawingml/2006/main" lIns="0" tIns="0" rIns="0" bIns="0" anchor="t"/>
+          <a:lstStyle xmlns:a="http://schemas.openxmlformats.org/drawingml/2006/main"/>
+          <a:p xmlns:a="http://schemas.openxmlformats.org/drawingml/2006/main">
+            <a:pPr algn="l">
+              <a:defRPr sz="1275" b="0">
+                <a:solidFill>
+                  <a:srgbClr val="344054"/>
+                </a:solidFill>
+                <a:latin typeface="Aptos"/>
+                <a:ea typeface="Aptos"/>
+                <a:cs typeface="Aptos"/>
+              </a:defRPr>
+            </a:pPr>
+            <a:r>
+              <a:rPr sz="1275" b="0">
+                <a:solidFill>
+                  <a:srgbClr val="344054"/>
+                </a:solidFill>
+                <a:latin typeface="Aptos"/>
+                <a:ea typeface="Aptos"/>
+                <a:cs typeface="Aptos"/>
+              </a:rPr>
+              <a:t>A guided wizard captures profile, contract, integration, and compliance data, then routes the record through maker-checker approval before integration testing starts.</a:t>
+            </a:r>
+          </a:p>
+        </p:txBody>
+      </p:sp>
+      <p:sp>
+        <p:nvSpPr>
+          <p:cNvPr id="6" name="">
+            <a:extLst xmlns:a="http://schemas.openxmlformats.org/drawingml/2006/main">
+              <a:ext uri="{FF2B5EF4-FFF2-40B4-BE49-F238E27FC236}">
+                <a16:creationId xmlns:a16="http://schemas.microsoft.com/office/drawing/2014/main" id="{46386F78-1E5F-4C8D-B5FE-3B5E3A34EC1B}"/>
+              </a:ext>
+            </a:extLst>
+          </p:cNvPr>
+          <p:cNvSpPr>
+            <a:spLocks xmlns:a="http://schemas.openxmlformats.org/drawingml/2006/main" noGrp="1"/>
+          </p:cNvSpPr>
+          <p:nvPr/>
+        </p:nvSpPr>
+        <p:spPr>
+          <a:xfrm xmlns:a="http://schemas.openxmlformats.org/drawingml/2006/main">
+            <a:off x="552450" y="3352800"/>
+            <a:ext cx="1885950" cy="1314450"/>
+          </a:xfrm>
+          <a:prstGeom xmlns:a="http://schemas.openxmlformats.org/drawingml/2006/main" prst="rect">
+            <a:avLst/>
+          </a:prstGeom>
+          <a:solidFill xmlns:a="http://schemas.openxmlformats.org/drawingml/2006/main">
+            <a:srgbClr val="EAF2FF"/>
+          </a:solidFill>
+          <a:ln xmlns:a="http://schemas.openxmlformats.org/drawingml/2006/main" w="9525">
+            <a:solidFill>
+              <a:srgbClr val="0756D9">
+                <a:alpha val="26667"/>
+              </a:srgbClr>
+            </a:solidFill>
+            <a:prstDash val="solid"/>
+          </a:ln>
+        </p:spPr>
+      </p:sp>
+      <p:sp>
+        <p:nvSpPr>
+          <p:cNvPr id="7" name="">
+            <a:extLst xmlns:a="http://schemas.openxmlformats.org/drawingml/2006/main">
+              <a:ext uri="{FF2B5EF4-FFF2-40B4-BE49-F238E27FC236}">
+                <a16:creationId xmlns:a16="http://schemas.microsoft.com/office/drawing/2014/main" id="{1B5AD487-5177-47C7-80D8-FEC11BB28B27}"/>
+              </a:ext>
+            </a:extLst>
+          </p:cNvPr>
+          <p:cNvSpPr>
+            <a:spLocks xmlns:a="http://schemas.openxmlformats.org/drawingml/2006/main" noGrp="1"/>
+          </p:cNvSpPr>
+          <p:nvPr/>
+        </p:nvSpPr>
+        <p:spPr>
+          <a:xfrm xmlns:a="http://schemas.openxmlformats.org/drawingml/2006/main">
+            <a:off x="704850" y="3505200"/>
+            <a:ext cx="1581150" cy="228600"/>
+          </a:xfrm>
+          <a:prstGeom xmlns:a="http://schemas.openxmlformats.org/drawingml/2006/main" prst="rect">
+            <a:avLst/>
+          </a:prstGeom>
+          <a:solidFill xmlns:a="http://schemas.openxmlformats.org/drawingml/2006/main">
+            <a:srgbClr val="000000">
+              <a:alpha val="0"/>
+            </a:srgbClr>
+          </a:solidFill>
+          <a:ln xmlns:a="http://schemas.openxmlformats.org/drawingml/2006/main" w="0">
+            <a:solidFill>
+              <a:srgbClr val="000000">
+                <a:alpha val="0"/>
+              </a:srgbClr>
+            </a:solidFill>
+            <a:prstDash val="solid"/>
+          </a:ln>
+        </p:spPr>
+        <p:txBody>
+          <a:bodyPr xmlns:a="http://schemas.openxmlformats.org/drawingml/2006/main" lIns="0" tIns="0" rIns="0" bIns="0" anchor="t"/>
+          <a:lstStyle xmlns:a="http://schemas.openxmlformats.org/drawingml/2006/main"/>
+          <a:p xmlns:a="http://schemas.openxmlformats.org/drawingml/2006/main">
+            <a:pPr algn="l">
+              <a:defRPr sz="1275" b="1">
+                <a:solidFill>
+                  <a:srgbClr val="08111F"/>
+                </a:solidFill>
+                <a:latin typeface="Aptos"/>
+                <a:ea typeface="Aptos"/>
+                <a:cs typeface="Aptos"/>
+              </a:defRPr>
+            </a:pPr>
+            <a:r>
+              <a:rPr sz="1275" b="1">
+                <a:solidFill>
+                  <a:srgbClr val="08111F"/>
+                </a:solidFill>
+                <a:latin typeface="Aptos"/>
+                <a:ea typeface="Aptos"/>
+                <a:cs typeface="Aptos"/>
+              </a:rPr>
+              <a:t>Partner profile</a:t>
+            </a:r>
+          </a:p>
+        </p:txBody>
+      </p:sp>
+      <p:sp>
+        <p:nvSpPr>
+          <p:cNvPr id="8" name="">
+            <a:extLst xmlns:a="http://schemas.openxmlformats.org/drawingml/2006/main">
+              <a:ext uri="{FF2B5EF4-FFF2-40B4-BE49-F238E27FC236}">
+                <a16:creationId xmlns:a16="http://schemas.microsoft.com/office/drawing/2014/main" id="{715F9A39-6424-4476-B85D-933640852A8E}"/>
+              </a:ext>
+            </a:extLst>
+          </p:cNvPr>
+          <p:cNvSpPr>
+            <a:spLocks xmlns:a="http://schemas.openxmlformats.org/drawingml/2006/main" noGrp="1"/>
+          </p:cNvSpPr>
+          <p:nvPr/>
+        </p:nvSpPr>
+        <p:spPr>
+          <a:xfrm xmlns:a="http://schemas.openxmlformats.org/drawingml/2006/main">
+            <a:off x="704850" y="3790950"/>
+            <a:ext cx="1581150" cy="781050"/>
+          </a:xfrm>
+          <a:prstGeom xmlns:a="http://schemas.openxmlformats.org/drawingml/2006/main" prst="rect">
+            <a:avLst/>
+          </a:prstGeom>
+          <a:solidFill xmlns:a="http://schemas.openxmlformats.org/drawingml/2006/main">
+            <a:srgbClr val="000000">
+              <a:alpha val="0"/>
+            </a:srgbClr>
+          </a:solidFill>
+          <a:ln xmlns:a="http://schemas.openxmlformats.org/drawingml/2006/main" w="0">
+            <a:solidFill>
+              <a:srgbClr val="000000">
+                <a:alpha val="0"/>
+              </a:srgbClr>
+            </a:solidFill>
+            <a:prstDash val="solid"/>
+          </a:ln>
+        </p:spPr>
+        <p:txBody>
+          <a:bodyPr xmlns:a="http://schemas.openxmlformats.org/drawingml/2006/main" lIns="0" tIns="0" rIns="0" bIns="0" anchor="t"/>
+          <a:lstStyle xmlns:a="http://schemas.openxmlformats.org/drawingml/2006/main"/>
+          <a:p xmlns:a="http://schemas.openxmlformats.org/drawingml/2006/main">
+            <a:pPr algn="l">
+              <a:defRPr sz="863" b="0">
+                <a:solidFill>
+                  <a:srgbClr val="344054"/>
+                </a:solidFill>
+                <a:latin typeface="Aptos"/>
+                <a:ea typeface="Aptos"/>
+                <a:cs typeface="Aptos"/>
+              </a:defRPr>
+            </a:pPr>
+            <a:r>
+              <a:rPr sz="863" b="0">
+                <a:solidFill>
+                  <a:srgbClr val="344054"/>
+                </a:solidFill>
+                <a:latin typeface="Aptos"/>
+                <a:ea typeface="Aptos"/>
+                <a:cs typeface="Aptos"/>
+              </a:rPr>
+              <a:t>Name, country, corridor, and risk classification recorded by the maker.</a:t>
+            </a:r>
+          </a:p>
+        </p:txBody>
+      </p:sp>
+      <p:sp>
+        <p:nvSpPr>
+          <p:cNvPr id="9" name="">
+            <a:extLst xmlns:a="http://schemas.openxmlformats.org/drawingml/2006/main">
+              <a:ext uri="{FF2B5EF4-FFF2-40B4-BE49-F238E27FC236}">
+                <a16:creationId xmlns:a16="http://schemas.microsoft.com/office/drawing/2014/main" id="{042A3D1B-B338-43C7-8FBC-03BFB614DF03}"/>
+              </a:ext>
+            </a:extLst>
+          </p:cNvPr>
+          <p:cNvSpPr>
+            <a:spLocks xmlns:a="http://schemas.openxmlformats.org/drawingml/2006/main" noGrp="1"/>
+          </p:cNvSpPr>
+          <p:nvPr/>
+        </p:nvSpPr>
+        <p:spPr>
+          <a:xfrm xmlns:a="http://schemas.openxmlformats.org/drawingml/2006/main">
+            <a:off x="2533650" y="4000500"/>
+            <a:ext cx="361950" cy="19050"/>
+          </a:xfrm>
+          <a:prstGeom xmlns:a="http://schemas.openxmlformats.org/drawingml/2006/main" prst="rect">
+            <a:avLst/>
+          </a:prstGeom>
+          <a:solidFill xmlns:a="http://schemas.openxmlformats.org/drawingml/2006/main">
+            <a:srgbClr val="98A2B3"/>
+          </a:solidFill>
+          <a:ln xmlns:a="http://schemas.openxmlformats.org/drawingml/2006/main" w="0">
+            <a:solidFill>
+              <a:srgbClr val="000000">
+                <a:alpha val="0"/>
+              </a:srgbClr>
+            </a:solidFill>
+            <a:prstDash val="solid"/>
+          </a:ln>
+        </p:spPr>
+      </p:sp>
+      <p:sp>
+        <p:nvSpPr>
+          <p:cNvPr id="10" name="">
+            <a:extLst xmlns:a="http://schemas.openxmlformats.org/drawingml/2006/main">
+              <a:ext uri="{FF2B5EF4-FFF2-40B4-BE49-F238E27FC236}">
+                <a16:creationId xmlns:a16="http://schemas.microsoft.com/office/drawing/2014/main" id="{011BA565-728A-4EC7-8090-C4CFD1BBBA1F}"/>
+              </a:ext>
+            </a:extLst>
+          </p:cNvPr>
+          <p:cNvSpPr>
+            <a:spLocks xmlns:a="http://schemas.openxmlformats.org/drawingml/2006/main" noGrp="1"/>
+          </p:cNvSpPr>
+          <p:nvPr/>
+        </p:nvSpPr>
+        <p:spPr>
+          <a:xfrm xmlns:a="http://schemas.openxmlformats.org/drawingml/2006/main">
+            <a:off x="2828925" y="3952875"/>
+            <a:ext cx="104775" cy="104775"/>
+          </a:xfrm>
+          <a:prstGeom xmlns:a="http://schemas.openxmlformats.org/drawingml/2006/main" prst="rtTriangle">
+            <a:avLst/>
+          </a:prstGeom>
+          <a:solidFill xmlns:a="http://schemas.openxmlformats.org/drawingml/2006/main">
+            <a:srgbClr val="98A2B3"/>
+          </a:solidFill>
+          <a:ln xmlns:a="http://schemas.openxmlformats.org/drawingml/2006/main" w="0">
+            <a:solidFill>
+              <a:srgbClr val="000000">
+                <a:alpha val="0"/>
+              </a:srgbClr>
+            </a:solidFill>
+            <a:prstDash val="solid"/>
+          </a:ln>
+        </p:spPr>
+      </p:sp>
+      <p:sp>
+        <p:nvSpPr>
+          <p:cNvPr id="11" name="">
+            <a:extLst xmlns:a="http://schemas.openxmlformats.org/drawingml/2006/main">
+              <a:ext uri="{FF2B5EF4-FFF2-40B4-BE49-F238E27FC236}">
+                <a16:creationId xmlns:a16="http://schemas.microsoft.com/office/drawing/2014/main" id="{F9E869C0-26C1-4F02-802C-A89933E06512}"/>
+              </a:ext>
+            </a:extLst>
+          </p:cNvPr>
+          <p:cNvSpPr>
+            <a:spLocks xmlns:a="http://schemas.openxmlformats.org/drawingml/2006/main" noGrp="1"/>
+          </p:cNvSpPr>
+          <p:nvPr/>
+        </p:nvSpPr>
+        <p:spPr>
+          <a:xfrm xmlns:a="http://schemas.openxmlformats.org/drawingml/2006/main">
+            <a:off x="2819400" y="3352800"/>
+            <a:ext cx="1885950" cy="1314450"/>
+          </a:xfrm>
+          <a:prstGeom xmlns:a="http://schemas.openxmlformats.org/drawingml/2006/main" prst="rect">
+            <a:avLst/>
+          </a:prstGeom>
+          <a:solidFill xmlns:a="http://schemas.openxmlformats.org/drawingml/2006/main">
+            <a:srgbClr val="FFFAEB"/>
+          </a:solidFill>
+          <a:ln xmlns:a="http://schemas.openxmlformats.org/drawingml/2006/main" w="9525">
+            <a:solidFill>
+              <a:srgbClr val="B54708">
+                <a:alpha val="26667"/>
+              </a:srgbClr>
+            </a:solidFill>
+            <a:prstDash val="solid"/>
+          </a:ln>
+        </p:spPr>
+      </p:sp>
+      <p:sp>
+        <p:nvSpPr>
+          <p:cNvPr id="12" name="">
+            <a:extLst xmlns:a="http://schemas.openxmlformats.org/drawingml/2006/main">
+              <a:ext uri="{FF2B5EF4-FFF2-40B4-BE49-F238E27FC236}">
+                <a16:creationId xmlns:a16="http://schemas.microsoft.com/office/drawing/2014/main" id="{7D3FC893-932B-427A-B94D-B0A86BF43413}"/>
+              </a:ext>
+            </a:extLst>
+          </p:cNvPr>
+          <p:cNvSpPr>
+            <a:spLocks xmlns:a="http://schemas.openxmlformats.org/drawingml/2006/main" noGrp="1"/>
+          </p:cNvSpPr>
+          <p:nvPr/>
+        </p:nvSpPr>
+        <p:spPr>
+          <a:xfrm xmlns:a="http://schemas.openxmlformats.org/drawingml/2006/main">
+            <a:off x="2971800" y="3505200"/>
+            <a:ext cx="1581150" cy="228600"/>
+          </a:xfrm>
+          <a:prstGeom xmlns:a="http://schemas.openxmlformats.org/drawingml/2006/main" prst="rect">
+            <a:avLst/>
+          </a:prstGeom>
+          <a:solidFill xmlns:a="http://schemas.openxmlformats.org/drawingml/2006/main">
+            <a:srgbClr val="000000">
+              <a:alpha val="0"/>
+            </a:srgbClr>
+          </a:solidFill>
+          <a:ln xmlns:a="http://schemas.openxmlformats.org/drawingml/2006/main" w="0">
+            <a:solidFill>
+              <a:srgbClr val="000000">
+                <a:alpha val="0"/>
+              </a:srgbClr>
+            </a:solidFill>
+            <a:prstDash val="solid"/>
+          </a:ln>
+        </p:spPr>
+        <p:txBody>
+          <a:bodyPr xmlns:a="http://schemas.openxmlformats.org/drawingml/2006/main" lIns="0" tIns="0" rIns="0" bIns="0" anchor="t"/>
+          <a:lstStyle xmlns:a="http://schemas.openxmlformats.org/drawingml/2006/main"/>
+          <a:p xmlns:a="http://schemas.openxmlformats.org/drawingml/2006/main">
+            <a:pPr algn="l">
+              <a:defRPr sz="1275" b="1">
+                <a:solidFill>
+                  <a:srgbClr val="08111F"/>
+                </a:solidFill>
+                <a:latin typeface="Aptos"/>
+                <a:ea typeface="Aptos"/>
+                <a:cs typeface="Aptos"/>
+              </a:defRPr>
+            </a:pPr>
+            <a:r>
+              <a:rPr sz="1275" b="1">
+                <a:solidFill>
+                  <a:srgbClr val="08111F"/>
+                </a:solidFill>
+                <a:latin typeface="Aptos"/>
+                <a:ea typeface="Aptos"/>
+                <a:cs typeface="Aptos"/>
+              </a:rPr>
+              <a:t>Contract and SLA</a:t>
+            </a:r>
+          </a:p>
+        </p:txBody>
+      </p:sp>
+      <p:sp>
+        <p:nvSpPr>
+          <p:cNvPr id="13" name="">
+            <a:extLst xmlns:a="http://schemas.openxmlformats.org/drawingml/2006/main">
+              <a:ext uri="{FF2B5EF4-FFF2-40B4-BE49-F238E27FC236}">
+                <a16:creationId xmlns:a16="http://schemas.microsoft.com/office/drawing/2014/main" id="{9B18E3AB-87E9-4334-A621-0F1A55060EC2}"/>
+              </a:ext>
+            </a:extLst>
+          </p:cNvPr>
+          <p:cNvSpPr>
+            <a:spLocks xmlns:a="http://schemas.openxmlformats.org/drawingml/2006/main" noGrp="1"/>
+          </p:cNvSpPr>
+          <p:nvPr/>
+        </p:nvSpPr>
+        <p:spPr>
+          <a:xfrm xmlns:a="http://schemas.openxmlformats.org/drawingml/2006/main">
+            <a:off x="2971800" y="3790950"/>
+            <a:ext cx="1581150" cy="781050"/>
+          </a:xfrm>
+          <a:prstGeom xmlns:a="http://schemas.openxmlformats.org/drawingml/2006/main" prst="rect">
+            <a:avLst/>
+          </a:prstGeom>
+          <a:solidFill xmlns:a="http://schemas.openxmlformats.org/drawingml/2006/main">
+            <a:srgbClr val="000000">
+              <a:alpha val="0"/>
+            </a:srgbClr>
+          </a:solidFill>
+          <a:ln xmlns:a="http://schemas.openxmlformats.org/drawingml/2006/main" w="0">
+            <a:solidFill>
+              <a:srgbClr val="000000">
+                <a:alpha val="0"/>
+              </a:srgbClr>
+            </a:solidFill>
+            <a:prstDash val="solid"/>
+          </a:ln>
+        </p:spPr>
+        <p:txBody>
+          <a:bodyPr xmlns:a="http://schemas.openxmlformats.org/drawingml/2006/main" lIns="0" tIns="0" rIns="0" bIns="0" anchor="t"/>
+          <a:lstStyle xmlns:a="http://schemas.openxmlformats.org/drawingml/2006/main"/>
+          <a:p xmlns:a="http://schemas.openxmlformats.org/drawingml/2006/main">
+            <a:pPr algn="l">
+              <a:defRPr sz="863" b="0">
+                <a:solidFill>
+                  <a:srgbClr val="344054"/>
+                </a:solidFill>
+                <a:latin typeface="Aptos"/>
+                <a:ea typeface="Aptos"/>
+                <a:cs typeface="Aptos"/>
+              </a:defRPr>
+            </a:pPr>
+            <a:r>
+              <a:rPr sz="863" b="0">
+                <a:solidFill>
+                  <a:srgbClr val="344054"/>
+                </a:solidFill>
+                <a:latin typeface="Aptos"/>
+                <a:ea typeface="Aptos"/>
+                <a:cs typeface="Aptos"/>
+              </a:rPr>
+              <a:t>Credit SLA, settlement currency, prefunding model, and contract dates.</a:t>
+            </a:r>
+          </a:p>
+        </p:txBody>
+      </p:sp>
+      <p:sp>
+        <p:nvSpPr>
+          <p:cNvPr id="14" name="">
+            <a:extLst xmlns:a="http://schemas.openxmlformats.org/drawingml/2006/main">
+              <a:ext uri="{FF2B5EF4-FFF2-40B4-BE49-F238E27FC236}">
+                <a16:creationId xmlns:a16="http://schemas.microsoft.com/office/drawing/2014/main" id="{1C942FDE-4CBD-4373-BF2F-4A7ADAECD57E}"/>
+              </a:ext>
+            </a:extLst>
+          </p:cNvPr>
+          <p:cNvSpPr>
+            <a:spLocks xmlns:a="http://schemas.openxmlformats.org/drawingml/2006/main" noGrp="1"/>
+          </p:cNvSpPr>
+          <p:nvPr/>
+        </p:nvSpPr>
+        <p:spPr>
+          <a:xfrm xmlns:a="http://schemas.openxmlformats.org/drawingml/2006/main">
+            <a:off x="4800600" y="4000500"/>
+            <a:ext cx="361950" cy="19050"/>
+          </a:xfrm>
+          <a:prstGeom xmlns:a="http://schemas.openxmlformats.org/drawingml/2006/main" prst="rect">
+            <a:avLst/>
+          </a:prstGeom>
+          <a:solidFill xmlns:a="http://schemas.openxmlformats.org/drawingml/2006/main">
+            <a:srgbClr val="98A2B3"/>
+          </a:solidFill>
+          <a:ln xmlns:a="http://schemas.openxmlformats.org/drawingml/2006/main" w="0">
+            <a:solidFill>
+              <a:srgbClr val="000000">
+                <a:alpha val="0"/>
+              </a:srgbClr>
+            </a:solidFill>
+            <a:prstDash val="solid"/>
+          </a:ln>
+        </p:spPr>
+      </p:sp>
+      <p:sp>
+        <p:nvSpPr>
+          <p:cNvPr id="15" name="">
+            <a:extLst xmlns:a="http://schemas.openxmlformats.org/drawingml/2006/main">
+              <a:ext uri="{FF2B5EF4-FFF2-40B4-BE49-F238E27FC236}">
+                <a16:creationId xmlns:a16="http://schemas.microsoft.com/office/drawing/2014/main" id="{151549C4-3F1E-42CC-A957-0F67D4246BAA}"/>
+              </a:ext>
+            </a:extLst>
+          </p:cNvPr>
+          <p:cNvSpPr>
+            <a:spLocks xmlns:a="http://schemas.openxmlformats.org/drawingml/2006/main" noGrp="1"/>
+          </p:cNvSpPr>
+          <p:nvPr/>
+        </p:nvSpPr>
+        <p:spPr>
+          <a:xfrm xmlns:a="http://schemas.openxmlformats.org/drawingml/2006/main">
+            <a:off x="5095875" y="3952875"/>
+            <a:ext cx="104775" cy="104775"/>
+          </a:xfrm>
+          <a:prstGeom xmlns:a="http://schemas.openxmlformats.org/drawingml/2006/main" prst="rtTriangle">
+            <a:avLst/>
+          </a:prstGeom>
+          <a:solidFill xmlns:a="http://schemas.openxmlformats.org/drawingml/2006/main">
+            <a:srgbClr val="98A2B3"/>
+          </a:solidFill>
+          <a:ln xmlns:a="http://schemas.openxmlformats.org/drawingml/2006/main" w="0">
+            <a:solidFill>
+              <a:srgbClr val="000000">
+                <a:alpha val="0"/>
+              </a:srgbClr>
+            </a:solidFill>
+            <a:prstDash val="solid"/>
+          </a:ln>
+        </p:spPr>
+      </p:sp>
+      <p:sp>
+        <p:nvSpPr>
+          <p:cNvPr id="16" name="">
+            <a:extLst xmlns:a="http://schemas.openxmlformats.org/drawingml/2006/main">
+              <a:ext uri="{FF2B5EF4-FFF2-40B4-BE49-F238E27FC236}">
+                <a16:creationId xmlns:a16="http://schemas.microsoft.com/office/drawing/2014/main" id="{C9A911FD-9D99-4A91-8FF8-42E6F457D785}"/>
+              </a:ext>
+            </a:extLst>
+          </p:cNvPr>
+          <p:cNvSpPr>
+            <a:spLocks xmlns:a="http://schemas.openxmlformats.org/drawingml/2006/main" noGrp="1"/>
+          </p:cNvSpPr>
+          <p:nvPr/>
+        </p:nvSpPr>
+        <p:spPr>
+          <a:xfrm xmlns:a="http://schemas.openxmlformats.org/drawingml/2006/main">
+            <a:off x="5086350" y="3352800"/>
+            <a:ext cx="1885950" cy="1314450"/>
+          </a:xfrm>
+          <a:prstGeom xmlns:a="http://schemas.openxmlformats.org/drawingml/2006/main" prst="rect">
+            <a:avLst/>
+          </a:prstGeom>
+          <a:solidFill xmlns:a="http://schemas.openxmlformats.org/drawingml/2006/main">
+            <a:srgbClr val="FFFAEB"/>
+          </a:solidFill>
+          <a:ln xmlns:a="http://schemas.openxmlformats.org/drawingml/2006/main" w="9525">
+            <a:solidFill>
+              <a:srgbClr val="B54708">
+                <a:alpha val="26667"/>
+              </a:srgbClr>
+            </a:solidFill>
+            <a:prstDash val="solid"/>
+          </a:ln>
+        </p:spPr>
+      </p:sp>
+      <p:sp>
+        <p:nvSpPr>
+          <p:cNvPr id="17" name="">
+            <a:extLst xmlns:a="http://schemas.openxmlformats.org/drawingml/2006/main">
+              <a:ext uri="{FF2B5EF4-FFF2-40B4-BE49-F238E27FC236}">
+                <a16:creationId xmlns:a16="http://schemas.microsoft.com/office/drawing/2014/main" id="{A258E28B-9D2D-4403-A25E-7D6CE93AF19E}"/>
+              </a:ext>
+            </a:extLst>
+          </p:cNvPr>
+          <p:cNvSpPr>
+            <a:spLocks xmlns:a="http://schemas.openxmlformats.org/drawingml/2006/main" noGrp="1"/>
+          </p:cNvSpPr>
+          <p:nvPr/>
+        </p:nvSpPr>
+        <p:spPr>
+          <a:xfrm xmlns:a="http://schemas.openxmlformats.org/drawingml/2006/main">
+            <a:off x="5238750" y="3505200"/>
+            <a:ext cx="1581150" cy="228600"/>
+          </a:xfrm>
+          <a:prstGeom xmlns:a="http://schemas.openxmlformats.org/drawingml/2006/main" prst="rect">
+            <a:avLst/>
+          </a:prstGeom>
+          <a:solidFill xmlns:a="http://schemas.openxmlformats.org/drawingml/2006/main">
+            <a:srgbClr val="000000">
+              <a:alpha val="0"/>
+            </a:srgbClr>
+          </a:solidFill>
+          <a:ln xmlns:a="http://schemas.openxmlformats.org/drawingml/2006/main" w="0">
+            <a:solidFill>
+              <a:srgbClr val="000000">
+                <a:alpha val="0"/>
+              </a:srgbClr>
+            </a:solidFill>
+            <a:prstDash val="solid"/>
+          </a:ln>
+        </p:spPr>
+        <p:txBody>
+          <a:bodyPr xmlns:a="http://schemas.openxmlformats.org/drawingml/2006/main" lIns="0" tIns="0" rIns="0" bIns="0" anchor="t"/>
+          <a:lstStyle xmlns:a="http://schemas.openxmlformats.org/drawingml/2006/main"/>
+          <a:p xmlns:a="http://schemas.openxmlformats.org/drawingml/2006/main">
+            <a:pPr algn="l">
+              <a:defRPr sz="1275" b="1">
+                <a:solidFill>
+                  <a:srgbClr val="08111F"/>
+                </a:solidFill>
+                <a:latin typeface="Aptos"/>
+                <a:ea typeface="Aptos"/>
+                <a:cs typeface="Aptos"/>
+              </a:defRPr>
+            </a:pPr>
+            <a:r>
+              <a:rPr sz="1275" b="1">
+                <a:solidFill>
+                  <a:srgbClr val="08111F"/>
+                </a:solidFill>
+                <a:latin typeface="Aptos"/>
+                <a:ea typeface="Aptos"/>
+                <a:cs typeface="Aptos"/>
+              </a:rPr>
+              <a:t>Integration setup</a:t>
+            </a:r>
+          </a:p>
+        </p:txBody>
+      </p:sp>
+      <p:sp>
+        <p:nvSpPr>
+          <p:cNvPr id="18" name="">
+            <a:extLst xmlns:a="http://schemas.openxmlformats.org/drawingml/2006/main">
+              <a:ext uri="{FF2B5EF4-FFF2-40B4-BE49-F238E27FC236}">
+                <a16:creationId xmlns:a16="http://schemas.microsoft.com/office/drawing/2014/main" id="{40534FDB-D564-4ABF-BD03-A7D8290C746D}"/>
+              </a:ext>
+            </a:extLst>
+          </p:cNvPr>
+          <p:cNvSpPr>
+            <a:spLocks xmlns:a="http://schemas.openxmlformats.org/drawingml/2006/main" noGrp="1"/>
+          </p:cNvSpPr>
+          <p:nvPr/>
+        </p:nvSpPr>
+        <p:spPr>
+          <a:xfrm xmlns:a="http://schemas.openxmlformats.org/drawingml/2006/main">
+            <a:off x="5238750" y="3790950"/>
+            <a:ext cx="1581150" cy="781050"/>
+          </a:xfrm>
+          <a:prstGeom xmlns:a="http://schemas.openxmlformats.org/drawingml/2006/main" prst="rect">
+            <a:avLst/>
+          </a:prstGeom>
+          <a:solidFill xmlns:a="http://schemas.openxmlformats.org/drawingml/2006/main">
+            <a:srgbClr val="000000">
+              <a:alpha val="0"/>
+            </a:srgbClr>
+          </a:solidFill>
+          <a:ln xmlns:a="http://schemas.openxmlformats.org/drawingml/2006/main" w="0">
+            <a:solidFill>
+              <a:srgbClr val="000000">
+                <a:alpha val="0"/>
+              </a:srgbClr>
+            </a:solidFill>
+            <a:prstDash val="solid"/>
+          </a:ln>
+        </p:spPr>
+        <p:txBody>
+          <a:bodyPr xmlns:a="http://schemas.openxmlformats.org/drawingml/2006/main" lIns="0" tIns="0" rIns="0" bIns="0" anchor="t"/>
+          <a:lstStyle xmlns:a="http://schemas.openxmlformats.org/drawingml/2006/main"/>
+          <a:p xmlns:a="http://schemas.openxmlformats.org/drawingml/2006/main">
+            <a:pPr algn="l">
+              <a:defRPr sz="863" b="0">
+                <a:solidFill>
+                  <a:srgbClr val="344054"/>
+                </a:solidFill>
+                <a:latin typeface="Aptos"/>
+                <a:ea typeface="Aptos"/>
+                <a:cs typeface="Aptos"/>
+              </a:defRPr>
+            </a:pPr>
+            <a:r>
+              <a:rPr sz="863" b="0">
+                <a:solidFill>
+                  <a:srgbClr val="344054"/>
+                </a:solidFill>
+                <a:latin typeface="Aptos"/>
+                <a:ea typeface="Aptos"/>
+                <a:cs typeface="Aptos"/>
+              </a:rPr>
+              <a:t>REST, SOAP, or SFTP mode with credential and certificate references; ISO 20022 flag.</a:t>
+            </a:r>
+          </a:p>
+        </p:txBody>
+      </p:sp>
+      <p:sp>
+        <p:nvSpPr>
+          <p:cNvPr id="19" name="">
+            <a:extLst xmlns:a="http://schemas.openxmlformats.org/drawingml/2006/main">
+              <a:ext uri="{FF2B5EF4-FFF2-40B4-BE49-F238E27FC236}">
+                <a16:creationId xmlns:a16="http://schemas.microsoft.com/office/drawing/2014/main" id="{888111D4-E16D-462D-B703-AA2ACE814FE9}"/>
+              </a:ext>
+            </a:extLst>
+          </p:cNvPr>
+          <p:cNvSpPr>
+            <a:spLocks xmlns:a="http://schemas.openxmlformats.org/drawingml/2006/main" noGrp="1"/>
+          </p:cNvSpPr>
+          <p:nvPr/>
+        </p:nvSpPr>
+        <p:spPr>
+          <a:xfrm xmlns:a="http://schemas.openxmlformats.org/drawingml/2006/main">
+            <a:off x="7067550" y="4000500"/>
+            <a:ext cx="361950" cy="19050"/>
+          </a:xfrm>
+          <a:prstGeom xmlns:a="http://schemas.openxmlformats.org/drawingml/2006/main" prst="rect">
+            <a:avLst/>
+          </a:prstGeom>
+          <a:solidFill xmlns:a="http://schemas.openxmlformats.org/drawingml/2006/main">
+            <a:srgbClr val="98A2B3"/>
+          </a:solidFill>
+          <a:ln xmlns:a="http://schemas.openxmlformats.org/drawingml/2006/main" w="0">
+            <a:solidFill>
+              <a:srgbClr val="000000">
+                <a:alpha val="0"/>
+              </a:srgbClr>
+            </a:solidFill>
+            <a:prstDash val="solid"/>
+          </a:ln>
+        </p:spPr>
+      </p:sp>
+      <p:sp>
+        <p:nvSpPr>
+          <p:cNvPr id="20" name="">
+            <a:extLst xmlns:a="http://schemas.openxmlformats.org/drawingml/2006/main">
+              <a:ext uri="{FF2B5EF4-FFF2-40B4-BE49-F238E27FC236}">
+                <a16:creationId xmlns:a16="http://schemas.microsoft.com/office/drawing/2014/main" id="{283671BF-A5D8-4398-BA49-0EE861E72CEA}"/>
+              </a:ext>
+            </a:extLst>
+          </p:cNvPr>
+          <p:cNvSpPr>
+            <a:spLocks xmlns:a="http://schemas.openxmlformats.org/drawingml/2006/main" noGrp="1"/>
+          </p:cNvSpPr>
+          <p:nvPr/>
+        </p:nvSpPr>
+        <p:spPr>
+          <a:xfrm xmlns:a="http://schemas.openxmlformats.org/drawingml/2006/main">
+            <a:off x="7362825" y="3952875"/>
+            <a:ext cx="104775" cy="104775"/>
+          </a:xfrm>
+          <a:prstGeom xmlns:a="http://schemas.openxmlformats.org/drawingml/2006/main" prst="rtTriangle">
+            <a:avLst/>
+          </a:prstGeom>
+          <a:solidFill xmlns:a="http://schemas.openxmlformats.org/drawingml/2006/main">
+            <a:srgbClr val="98A2B3"/>
+          </a:solidFill>
+          <a:ln xmlns:a="http://schemas.openxmlformats.org/drawingml/2006/main" w="0">
+            <a:solidFill>
+              <a:srgbClr val="000000">
+                <a:alpha val="0"/>
+              </a:srgbClr>
+            </a:solidFill>
+            <a:prstDash val="solid"/>
+          </a:ln>
+        </p:spPr>
+      </p:sp>
+      <p:sp>
+        <p:nvSpPr>
+          <p:cNvPr id="21" name="">
+            <a:extLst xmlns:a="http://schemas.openxmlformats.org/drawingml/2006/main">
+              <a:ext uri="{FF2B5EF4-FFF2-40B4-BE49-F238E27FC236}">
+                <a16:creationId xmlns:a16="http://schemas.microsoft.com/office/drawing/2014/main" id="{C724FA67-84CE-49ED-9CDD-9AC84D77E5BC}"/>
+              </a:ext>
+            </a:extLst>
+          </p:cNvPr>
+          <p:cNvSpPr>
+            <a:spLocks xmlns:a="http://schemas.openxmlformats.org/drawingml/2006/main" noGrp="1"/>
+          </p:cNvSpPr>
+          <p:nvPr/>
+        </p:nvSpPr>
+        <p:spPr>
+          <a:xfrm xmlns:a="http://schemas.openxmlformats.org/drawingml/2006/main">
+            <a:off x="7353300" y="3352800"/>
+            <a:ext cx="1885950" cy="1314450"/>
+          </a:xfrm>
+          <a:prstGeom xmlns:a="http://schemas.openxmlformats.org/drawingml/2006/main" prst="rect">
+            <a:avLst/>
+          </a:prstGeom>
+          <a:solidFill xmlns:a="http://schemas.openxmlformats.org/drawingml/2006/main">
+            <a:srgbClr val="EAF2FF"/>
+          </a:solidFill>
+          <a:ln xmlns:a="http://schemas.openxmlformats.org/drawingml/2006/main" w="9525">
+            <a:solidFill>
+              <a:srgbClr val="0756D9">
+                <a:alpha val="26667"/>
+              </a:srgbClr>
+            </a:solidFill>
+            <a:prstDash val="solid"/>
+          </a:ln>
+        </p:spPr>
+      </p:sp>
+      <p:sp>
+        <p:nvSpPr>
+          <p:cNvPr id="22" name="">
+            <a:extLst xmlns:a="http://schemas.openxmlformats.org/drawingml/2006/main">
+              <a:ext uri="{FF2B5EF4-FFF2-40B4-BE49-F238E27FC236}">
+                <a16:creationId xmlns:a16="http://schemas.microsoft.com/office/drawing/2014/main" id="{DF11DF8F-CB90-481A-A88D-18813E5A38A7}"/>
+              </a:ext>
+            </a:extLst>
+          </p:cNvPr>
+          <p:cNvSpPr>
+            <a:spLocks xmlns:a="http://schemas.openxmlformats.org/drawingml/2006/main" noGrp="1"/>
+          </p:cNvSpPr>
+          <p:nvPr/>
+        </p:nvSpPr>
+        <p:spPr>
+          <a:xfrm xmlns:a="http://schemas.openxmlformats.org/drawingml/2006/main">
+            <a:off x="7505700" y="3505200"/>
+            <a:ext cx="1581150" cy="228600"/>
+          </a:xfrm>
+          <a:prstGeom xmlns:a="http://schemas.openxmlformats.org/drawingml/2006/main" prst="rect">
+            <a:avLst/>
+          </a:prstGeom>
+          <a:solidFill xmlns:a="http://schemas.openxmlformats.org/drawingml/2006/main">
+            <a:srgbClr val="000000">
+              <a:alpha val="0"/>
+            </a:srgbClr>
+          </a:solidFill>
+          <a:ln xmlns:a="http://schemas.openxmlformats.org/drawingml/2006/main" w="0">
+            <a:solidFill>
+              <a:srgbClr val="000000">
+                <a:alpha val="0"/>
+              </a:srgbClr>
+            </a:solidFill>
+            <a:prstDash val="solid"/>
+          </a:ln>
+        </p:spPr>
+        <p:txBody>
+          <a:bodyPr xmlns:a="http://schemas.openxmlformats.org/drawingml/2006/main" lIns="0" tIns="0" rIns="0" bIns="0" anchor="t"/>
+          <a:lstStyle xmlns:a="http://schemas.openxmlformats.org/drawingml/2006/main"/>
+          <a:p xmlns:a="http://schemas.openxmlformats.org/drawingml/2006/main">
+            <a:pPr algn="l">
+              <a:defRPr sz="1275" b="1">
+                <a:solidFill>
+                  <a:srgbClr val="08111F"/>
+                </a:solidFill>
+                <a:latin typeface="Aptos"/>
+                <a:ea typeface="Aptos"/>
+                <a:cs typeface="Aptos"/>
+              </a:defRPr>
+            </a:pPr>
+            <a:r>
+              <a:rPr sz="1275" b="1">
+                <a:solidFill>
+                  <a:srgbClr val="08111F"/>
+                </a:solidFill>
+                <a:latin typeface="Aptos"/>
+                <a:ea typeface="Aptos"/>
+                <a:cs typeface="Aptos"/>
+              </a:rPr>
+              <a:t>Compliance</a:t>
+            </a:r>
+          </a:p>
+        </p:txBody>
+      </p:sp>
+      <p:sp>
+        <p:nvSpPr>
+          <p:cNvPr id="23" name="">
+            <a:extLst xmlns:a="http://schemas.openxmlformats.org/drawingml/2006/main">
+              <a:ext uri="{FF2B5EF4-FFF2-40B4-BE49-F238E27FC236}">
+                <a16:creationId xmlns:a16="http://schemas.microsoft.com/office/drawing/2014/main" id="{C6EC7A74-2D37-41F4-A2E3-73D34C35BCCF}"/>
+              </a:ext>
+            </a:extLst>
+          </p:cNvPr>
+          <p:cNvSpPr>
+            <a:spLocks xmlns:a="http://schemas.openxmlformats.org/drawingml/2006/main" noGrp="1"/>
+          </p:cNvSpPr>
+          <p:nvPr/>
+        </p:nvSpPr>
+        <p:spPr>
+          <a:xfrm xmlns:a="http://schemas.openxmlformats.org/drawingml/2006/main">
+            <a:off x="7505700" y="3790950"/>
+            <a:ext cx="1581150" cy="781050"/>
+          </a:xfrm>
+          <a:prstGeom xmlns:a="http://schemas.openxmlformats.org/drawingml/2006/main" prst="rect">
+            <a:avLst/>
+          </a:prstGeom>
+          <a:solidFill xmlns:a="http://schemas.openxmlformats.org/drawingml/2006/main">
+            <a:srgbClr val="000000">
+              <a:alpha val="0"/>
+            </a:srgbClr>
+          </a:solidFill>
+          <a:ln xmlns:a="http://schemas.openxmlformats.org/drawingml/2006/main" w="0">
+            <a:solidFill>
+              <a:srgbClr val="000000">
+                <a:alpha val="0"/>
+              </a:srgbClr>
+            </a:solidFill>
+            <a:prstDash val="solid"/>
+          </a:ln>
+        </p:spPr>
+        <p:txBody>
+          <a:bodyPr xmlns:a="http://schemas.openxmlformats.org/drawingml/2006/main" lIns="0" tIns="0" rIns="0" bIns="0" anchor="t"/>
+          <a:lstStyle xmlns:a="http://schemas.openxmlformats.org/drawingml/2006/main"/>
+          <a:p xmlns:a="http://schemas.openxmlformats.org/drawingml/2006/main">
+            <a:pPr algn="l">
+              <a:defRPr sz="863" b="0">
+                <a:solidFill>
+                  <a:srgbClr val="344054"/>
+                </a:solidFill>
+                <a:latin typeface="Aptos"/>
+                <a:ea typeface="Aptos"/>
+                <a:cs typeface="Aptos"/>
+              </a:defRPr>
+            </a:pPr>
+            <a:r>
+              <a:rPr sz="863" b="0">
+                <a:solidFill>
+                  <a:srgbClr val="344054"/>
+                </a:solidFill>
+                <a:latin typeface="Aptos"/>
+                <a:ea typeface="Aptos"/>
+                <a:cs typeface="Aptos"/>
+              </a:rPr>
+              <a:t>Licence verification, AML review, and sanctions calibration tracked as due-diligence items.</a:t>
+            </a:r>
+          </a:p>
+        </p:txBody>
+      </p:sp>
+      <p:sp>
+        <p:nvSpPr>
+          <p:cNvPr id="24" name="">
+            <a:extLst xmlns:a="http://schemas.openxmlformats.org/drawingml/2006/main">
+              <a:ext uri="{FF2B5EF4-FFF2-40B4-BE49-F238E27FC236}">
+                <a16:creationId xmlns:a16="http://schemas.microsoft.com/office/drawing/2014/main" id="{56411960-8EF4-42A5-A73D-FCCFA97C4541}"/>
+              </a:ext>
+            </a:extLst>
+          </p:cNvPr>
+          <p:cNvSpPr>
+            <a:spLocks xmlns:a="http://schemas.openxmlformats.org/drawingml/2006/main" noGrp="1"/>
+          </p:cNvSpPr>
+          <p:nvPr/>
+        </p:nvSpPr>
+        <p:spPr>
+          <a:xfrm xmlns:a="http://schemas.openxmlformats.org/drawingml/2006/main">
+            <a:off x="9334500" y="4000500"/>
+            <a:ext cx="361950" cy="19050"/>
+          </a:xfrm>
+          <a:prstGeom xmlns:a="http://schemas.openxmlformats.org/drawingml/2006/main" prst="rect">
+            <a:avLst/>
+          </a:prstGeom>
+          <a:solidFill xmlns:a="http://schemas.openxmlformats.org/drawingml/2006/main">
+            <a:srgbClr val="98A2B3"/>
+          </a:solidFill>
+          <a:ln xmlns:a="http://schemas.openxmlformats.org/drawingml/2006/main" w="0">
+            <a:solidFill>
+              <a:srgbClr val="000000">
+                <a:alpha val="0"/>
+              </a:srgbClr>
+            </a:solidFill>
+            <a:prstDash val="solid"/>
+          </a:ln>
+        </p:spPr>
+      </p:sp>
+      <p:sp>
+        <p:nvSpPr>
+          <p:cNvPr id="25" name="">
+            <a:extLst xmlns:a="http://schemas.openxmlformats.org/drawingml/2006/main">
+              <a:ext uri="{FF2B5EF4-FFF2-40B4-BE49-F238E27FC236}">
+                <a16:creationId xmlns:a16="http://schemas.microsoft.com/office/drawing/2014/main" id="{9E4E1C61-0CDA-41AA-85AF-BE7D834A5FFB}"/>
+              </a:ext>
+            </a:extLst>
+          </p:cNvPr>
+          <p:cNvSpPr>
+            <a:spLocks xmlns:a="http://schemas.openxmlformats.org/drawingml/2006/main" noGrp="1"/>
+          </p:cNvSpPr>
+          <p:nvPr/>
+        </p:nvSpPr>
+        <p:spPr>
+          <a:xfrm xmlns:a="http://schemas.openxmlformats.org/drawingml/2006/main">
+            <a:off x="9629775" y="3952875"/>
+            <a:ext cx="104775" cy="104775"/>
+          </a:xfrm>
+          <a:prstGeom xmlns:a="http://schemas.openxmlformats.org/drawingml/2006/main" prst="rtTriangle">
+            <a:avLst/>
+          </a:prstGeom>
+          <a:solidFill xmlns:a="http://schemas.openxmlformats.org/drawingml/2006/main">
+            <a:srgbClr val="98A2B3"/>
+          </a:solidFill>
+          <a:ln xmlns:a="http://schemas.openxmlformats.org/drawingml/2006/main" w="0">
+            <a:solidFill>
+              <a:srgbClr val="000000">
+                <a:alpha val="0"/>
+              </a:srgbClr>
+            </a:solidFill>
+            <a:prstDash val="solid"/>
+          </a:ln>
+        </p:spPr>
+      </p:sp>
+      <p:sp>
+        <p:nvSpPr>
+          <p:cNvPr id="26" name="">
+            <a:extLst xmlns:a="http://schemas.openxmlformats.org/drawingml/2006/main">
+              <a:ext uri="{FF2B5EF4-FFF2-40B4-BE49-F238E27FC236}">
+                <a16:creationId xmlns:a16="http://schemas.microsoft.com/office/drawing/2014/main" id="{BB94A889-5731-408F-B012-E407E2408241}"/>
+              </a:ext>
+            </a:extLst>
+          </p:cNvPr>
+          <p:cNvSpPr>
+            <a:spLocks xmlns:a="http://schemas.openxmlformats.org/drawingml/2006/main" noGrp="1"/>
+          </p:cNvSpPr>
+          <p:nvPr/>
+        </p:nvSpPr>
+        <p:spPr>
+          <a:xfrm xmlns:a="http://schemas.openxmlformats.org/drawingml/2006/main">
+            <a:off x="9620250" y="3352800"/>
+            <a:ext cx="1885950" cy="1314450"/>
+          </a:xfrm>
+          <a:prstGeom xmlns:a="http://schemas.openxmlformats.org/drawingml/2006/main" prst="rect">
+            <a:avLst/>
+          </a:prstGeom>
+          <a:solidFill xmlns:a="http://schemas.openxmlformats.org/drawingml/2006/main">
+            <a:srgbClr val="ECFDF3"/>
+          </a:solidFill>
+          <a:ln xmlns:a="http://schemas.openxmlformats.org/drawingml/2006/main" w="9525">
+            <a:solidFill>
+              <a:srgbClr val="067647">
+                <a:alpha val="26667"/>
+              </a:srgbClr>
+            </a:solidFill>
+            <a:prstDash val="solid"/>
+          </a:ln>
+        </p:spPr>
+      </p:sp>
+      <p:sp>
+        <p:nvSpPr>
+          <p:cNvPr id="27" name="">
+            <a:extLst xmlns:a="http://schemas.openxmlformats.org/drawingml/2006/main">
+              <a:ext uri="{FF2B5EF4-FFF2-40B4-BE49-F238E27FC236}">
+                <a16:creationId xmlns:a16="http://schemas.microsoft.com/office/drawing/2014/main" id="{149177C3-89F7-45F0-9903-818891B3AC33}"/>
+              </a:ext>
+            </a:extLst>
+          </p:cNvPr>
+          <p:cNvSpPr>
+            <a:spLocks xmlns:a="http://schemas.openxmlformats.org/drawingml/2006/main" noGrp="1"/>
+          </p:cNvSpPr>
+          <p:nvPr/>
+        </p:nvSpPr>
+        <p:spPr>
+          <a:xfrm xmlns:a="http://schemas.openxmlformats.org/drawingml/2006/main">
+            <a:off x="9772650" y="3505200"/>
+            <a:ext cx="1581150" cy="228600"/>
+          </a:xfrm>
+          <a:prstGeom xmlns:a="http://schemas.openxmlformats.org/drawingml/2006/main" prst="rect">
+            <a:avLst/>
+          </a:prstGeom>
+          <a:solidFill xmlns:a="http://schemas.openxmlformats.org/drawingml/2006/main">
+            <a:srgbClr val="000000">
+              <a:alpha val="0"/>
+            </a:srgbClr>
+          </a:solidFill>
+          <a:ln xmlns:a="http://schemas.openxmlformats.org/drawingml/2006/main" w="0">
+            <a:solidFill>
+              <a:srgbClr val="000000">
+                <a:alpha val="0"/>
+              </a:srgbClr>
+            </a:solidFill>
+            <a:prstDash val="solid"/>
+          </a:ln>
+        </p:spPr>
+        <p:txBody>
+          <a:bodyPr xmlns:a="http://schemas.openxmlformats.org/drawingml/2006/main" lIns="0" tIns="0" rIns="0" bIns="0" anchor="t"/>
+          <a:lstStyle xmlns:a="http://schemas.openxmlformats.org/drawingml/2006/main"/>
+          <a:p xmlns:a="http://schemas.openxmlformats.org/drawingml/2006/main">
+            <a:pPr algn="l">
+              <a:defRPr sz="1275" b="1">
+                <a:solidFill>
+                  <a:srgbClr val="08111F"/>
+                </a:solidFill>
+                <a:latin typeface="Aptos"/>
+                <a:ea typeface="Aptos"/>
+                <a:cs typeface="Aptos"/>
+              </a:defRPr>
+            </a:pPr>
+            <a:r>
+              <a:rPr sz="1275" b="1">
+                <a:solidFill>
+                  <a:srgbClr val="08111F"/>
+                </a:solidFill>
+                <a:latin typeface="Aptos"/>
+                <a:ea typeface="Aptos"/>
+                <a:cs typeface="Aptos"/>
+              </a:rPr>
+              <a:t>Checker approval</a:t>
+            </a:r>
+          </a:p>
+        </p:txBody>
+      </p:sp>
+      <p:sp>
+        <p:nvSpPr>
+          <p:cNvPr id="28" name="">
+            <a:extLst xmlns:a="http://schemas.openxmlformats.org/drawingml/2006/main">
+              <a:ext uri="{FF2B5EF4-FFF2-40B4-BE49-F238E27FC236}">
+                <a16:creationId xmlns:a16="http://schemas.microsoft.com/office/drawing/2014/main" id="{F17E3881-9EEF-46DA-B449-D2F76E88B66A}"/>
+              </a:ext>
+            </a:extLst>
+          </p:cNvPr>
+          <p:cNvSpPr>
+            <a:spLocks xmlns:a="http://schemas.openxmlformats.org/drawingml/2006/main" noGrp="1"/>
+          </p:cNvSpPr>
+          <p:nvPr/>
+        </p:nvSpPr>
+        <p:spPr>
+          <a:xfrm xmlns:a="http://schemas.openxmlformats.org/drawingml/2006/main">
+            <a:off x="9772650" y="3790950"/>
+            <a:ext cx="1581150" cy="781050"/>
+          </a:xfrm>
+          <a:prstGeom xmlns:a="http://schemas.openxmlformats.org/drawingml/2006/main" prst="rect">
+            <a:avLst/>
+          </a:prstGeom>
+          <a:solidFill xmlns:a="http://schemas.openxmlformats.org/drawingml/2006/main">
+            <a:srgbClr val="000000">
+              <a:alpha val="0"/>
+            </a:srgbClr>
+          </a:solidFill>
+          <a:ln xmlns:a="http://schemas.openxmlformats.org/drawingml/2006/main" w="0">
+            <a:solidFill>
+              <a:srgbClr val="000000">
+                <a:alpha val="0"/>
+              </a:srgbClr>
+            </a:solidFill>
+            <a:prstDash val="solid"/>
+          </a:ln>
+        </p:spPr>
+        <p:txBody>
+          <a:bodyPr xmlns:a="http://schemas.openxmlformats.org/drawingml/2006/main" lIns="0" tIns="0" rIns="0" bIns="0" anchor="t"/>
+          <a:lstStyle xmlns:a="http://schemas.openxmlformats.org/drawingml/2006/main"/>
+          <a:p xmlns:a="http://schemas.openxmlformats.org/drawingml/2006/main">
+            <a:pPr algn="l">
+              <a:defRPr sz="863" b="0">
+                <a:solidFill>
+                  <a:srgbClr val="344054"/>
+                </a:solidFill>
+                <a:latin typeface="Aptos"/>
+                <a:ea typeface="Aptos"/>
+                <a:cs typeface="Aptos"/>
+              </a:defRPr>
+            </a:pPr>
+            <a:r>
+              <a:rPr sz="863" b="0">
+                <a:solidFill>
+                  <a:srgbClr val="344054"/>
+                </a:solidFill>
+                <a:latin typeface="Aptos"/>
+                <a:ea typeface="Aptos"/>
+                <a:cs typeface="Aptos"/>
+              </a:rPr>
+              <a:t>Multi-level approval gates the partner before any live traffic.</a:t>
+            </a:r>
+          </a:p>
+        </p:txBody>
+      </p:sp>
+      <p:sp>
+        <p:nvSpPr>
+          <p:cNvPr id="29" name="">
+            <a:extLst xmlns:a="http://schemas.openxmlformats.org/drawingml/2006/main">
+              <a:ext uri="{FF2B5EF4-FFF2-40B4-BE49-F238E27FC236}">
+                <a16:creationId xmlns:a16="http://schemas.microsoft.com/office/drawing/2014/main" id="{F3768156-0B6A-444B-86A9-943BF490049F}"/>
+              </a:ext>
+            </a:extLst>
+          </p:cNvPr>
+          <p:cNvSpPr>
+            <a:spLocks xmlns:a="http://schemas.openxmlformats.org/drawingml/2006/main" noGrp="1"/>
+          </p:cNvSpPr>
+          <p:nvPr/>
+        </p:nvSpPr>
+        <p:spPr>
+          <a:xfrm xmlns:a="http://schemas.openxmlformats.org/drawingml/2006/main">
+            <a:off x="1066800" y="5353050"/>
+            <a:ext cx="9144000" cy="438150"/>
+          </a:xfrm>
+          <a:prstGeom xmlns:a="http://schemas.openxmlformats.org/drawingml/2006/main" prst="rect">
+            <a:avLst/>
+          </a:prstGeom>
+          <a:solidFill xmlns:a="http://schemas.openxmlformats.org/drawingml/2006/main">
+            <a:srgbClr val="000000">
+              <a:alpha val="0"/>
+            </a:srgbClr>
+          </a:solidFill>
+          <a:ln xmlns:a="http://schemas.openxmlformats.org/drawingml/2006/main" w="0">
+            <a:solidFill>
+              <a:srgbClr val="000000">
+                <a:alpha val="0"/>
+              </a:srgbClr>
+            </a:solidFill>
+            <a:prstDash val="solid"/>
+          </a:ln>
+        </p:spPr>
+        <p:txBody>
+          <a:bodyPr xmlns:a="http://schemas.openxmlformats.org/drawingml/2006/main" lIns="0" tIns="0" rIns="0" bIns="0" anchor="t"/>
+          <a:lstStyle xmlns:a="http://schemas.openxmlformats.org/drawingml/2006/main"/>
+          <a:p xmlns:a="http://schemas.openxmlformats.org/drawingml/2006/main">
+            <a:pPr algn="ctr">
+              <a:defRPr sz="1500" b="1">
+                <a:solidFill>
+                  <a:srgbClr val="08111F"/>
+                </a:solidFill>
+                <a:latin typeface="Aptos"/>
+                <a:ea typeface="Aptos"/>
+                <a:cs typeface="Aptos"/>
+              </a:defRPr>
+            </a:pPr>
+            <a:r>
+              <a:rPr sz="1500" b="1">
+                <a:solidFill>
+                  <a:srgbClr val="08111F"/>
+                </a:solidFill>
+                <a:latin typeface="Aptos"/>
+                <a:ea typeface="Aptos"/>
+                <a:cs typeface="Aptos"/>
+              </a:rPr>
+              <a:t>Each new IMTO is configuration plus approval workflow. No code change is required per partner.</a:t>
+            </a:r>
+          </a:p>
+        </p:txBody>
+      </p:sp>
+      <p:sp>
+        <p:nvSpPr>
+          <p:cNvPr id="30" name="">
+            <a:extLst xmlns:a="http://schemas.openxmlformats.org/drawingml/2006/main">
+              <a:ext uri="{FF2B5EF4-FFF2-40B4-BE49-F238E27FC236}">
+                <a16:creationId xmlns:a16="http://schemas.microsoft.com/office/drawing/2014/main" id="{EB119C7C-77C0-4569-92D6-A94A08CDE92A}"/>
+              </a:ext>
+            </a:extLst>
+          </p:cNvPr>
+          <p:cNvSpPr>
+            <a:spLocks xmlns:a="http://schemas.openxmlformats.org/drawingml/2006/main" noGrp="1"/>
+          </p:cNvSpPr>
+          <p:nvPr/>
+        </p:nvSpPr>
+        <p:spPr>
+          <a:xfrm xmlns:a="http://schemas.openxmlformats.org/drawingml/2006/main">
+            <a:off x="609600" y="6400800"/>
+            <a:ext cx="9829800" cy="9525"/>
+          </a:xfrm>
+          <a:prstGeom xmlns:a="http://schemas.openxmlformats.org/drawingml/2006/main" prst="rect">
+            <a:avLst/>
+          </a:prstGeom>
+          <a:solidFill xmlns:a="http://schemas.openxmlformats.org/drawingml/2006/main">
+            <a:srgbClr val="EAECF0"/>
+          </a:solidFill>
+          <a:ln xmlns:a="http://schemas.openxmlformats.org/drawingml/2006/main" w="0">
+            <a:solidFill>
+              <a:srgbClr val="000000">
+                <a:alpha val="0"/>
+              </a:srgbClr>
+            </a:solidFill>
+            <a:prstDash val="solid"/>
+          </a:ln>
+        </p:spPr>
+      </p:sp>
+      <p:sp>
+        <p:nvSpPr>
+          <p:cNvPr id="31" name="">
+            <a:extLst xmlns:a="http://schemas.openxmlformats.org/drawingml/2006/main">
+              <a:ext uri="{FF2B5EF4-FFF2-40B4-BE49-F238E27FC236}">
+                <a16:creationId xmlns:a16="http://schemas.microsoft.com/office/drawing/2014/main" id="{9696203D-F599-445F-B3E5-EE8F93C3B8D6}"/>
+              </a:ext>
+            </a:extLst>
+          </p:cNvPr>
+          <p:cNvSpPr>
+            <a:spLocks xmlns:a="http://schemas.openxmlformats.org/drawingml/2006/main" noGrp="1"/>
+          </p:cNvSpPr>
+          <p:nvPr/>
+        </p:nvSpPr>
+        <p:spPr>
+          <a:xfrm xmlns:a="http://schemas.openxmlformats.org/drawingml/2006/main">
+            <a:off x="609600" y="6515100"/>
+            <a:ext cx="6858000" cy="171450"/>
+          </a:xfrm>
+          <a:prstGeom xmlns:a="http://schemas.openxmlformats.org/drawingml/2006/main" prst="rect">
+            <a:avLst/>
+          </a:prstGeom>
+          <a:solidFill xmlns:a="http://schemas.openxmlformats.org/drawingml/2006/main">
+            <a:srgbClr val="000000">
+              <a:alpha val="0"/>
+            </a:srgbClr>
+          </a:solidFill>
+          <a:ln xmlns:a="http://schemas.openxmlformats.org/drawingml/2006/main" w="0">
+            <a:solidFill>
+              <a:srgbClr val="000000">
+                <a:alpha val="0"/>
+              </a:srgbClr>
+            </a:solidFill>
+            <a:prstDash val="solid"/>
+          </a:ln>
+        </p:spPr>
+        <p:txBody>
+          <a:bodyPr xmlns:a="http://schemas.openxmlformats.org/drawingml/2006/main" lIns="0" tIns="0" rIns="0" bIns="0" anchor="t"/>
+          <a:lstStyle xmlns:a="http://schemas.openxmlformats.org/drawingml/2006/main"/>
+          <a:p xmlns:a="http://schemas.openxmlformats.org/drawingml/2006/main">
+            <a:pPr algn="l">
+              <a:defRPr sz="750" b="0">
+                <a:solidFill>
+                  <a:srgbClr val="667085"/>
+                </a:solidFill>
+                <a:latin typeface="Aptos"/>
+                <a:ea typeface="Aptos"/>
+                <a:cs typeface="Aptos"/>
+              </a:defRPr>
+            </a:pPr>
+            <a:r>
+              <a:rPr sz="750" b="0">
+                <a:solidFill>
+                  <a:srgbClr val="667085"/>
+                </a:solidFill>
+                <a:latin typeface="Aptos"/>
+                <a:ea typeface="Aptos"/>
+                <a:cs typeface="Aptos"/>
+              </a:rPr>
+              <a:t>CloudSpace Technologies / INSWITCH CIO-ED briefing</a:t>
+            </a:r>
+          </a:p>
+        </p:txBody>
+      </p:sp>
+      <p:sp>
+        <p:nvSpPr>
+          <p:cNvPr id="32" name="">
+            <a:extLst xmlns:a="http://schemas.openxmlformats.org/drawingml/2006/main">
+              <a:ext uri="{FF2B5EF4-FFF2-40B4-BE49-F238E27FC236}">
+                <a16:creationId xmlns:a16="http://schemas.microsoft.com/office/drawing/2014/main" id="{D0D6D67C-983B-453D-BF00-DCBB7A10B9D9}"/>
+              </a:ext>
+            </a:extLst>
+          </p:cNvPr>
+          <p:cNvSpPr>
+            <a:spLocks xmlns:a="http://schemas.openxmlformats.org/drawingml/2006/main" noGrp="1"/>
+          </p:cNvSpPr>
+          <p:nvPr/>
+        </p:nvSpPr>
+        <p:spPr>
+          <a:xfrm xmlns:a="http://schemas.openxmlformats.org/drawingml/2006/main">
+            <a:off x="10839450" y="6515100"/>
+            <a:ext cx="666750" cy="171450"/>
+          </a:xfrm>
+          <a:prstGeom xmlns:a="http://schemas.openxmlformats.org/drawingml/2006/main" prst="rect">
+            <a:avLst/>
+          </a:prstGeom>
+          <a:solidFill xmlns:a="http://schemas.openxmlformats.org/drawingml/2006/main">
+            <a:srgbClr val="000000">
+              <a:alpha val="0"/>
+            </a:srgbClr>
+          </a:solidFill>
+          <a:ln xmlns:a="http://schemas.openxmlformats.org/drawingml/2006/main" w="0">
+            <a:solidFill>
+              <a:srgbClr val="000000">
+                <a:alpha val="0"/>
+              </a:srgbClr>
+            </a:solidFill>
+            <a:prstDash val="solid"/>
+          </a:ln>
+        </p:spPr>
+        <p:txBody>
+          <a:bodyPr xmlns:a="http://schemas.openxmlformats.org/drawingml/2006/main" lIns="0" tIns="0" rIns="0" bIns="0" anchor="t"/>
+          <a:lstStyle xmlns:a="http://schemas.openxmlformats.org/drawingml/2006/main"/>
+          <a:p xmlns:a="http://schemas.openxmlformats.org/drawingml/2006/main">
+            <a:pPr algn="r">
+              <a:defRPr sz="900" b="0">
+                <a:solidFill>
+                  <a:srgbClr val="667085"/>
+                </a:solidFill>
+                <a:latin typeface="Aptos"/>
+                <a:ea typeface="Aptos"/>
+                <a:cs typeface="Aptos"/>
+              </a:defRPr>
+            </a:pPr>
+            <a:r>
+              <a:rPr sz="900" b="0">
+                <a:solidFill>
+                  <a:srgbClr val="667085"/>
+                </a:solidFill>
+                <a:latin typeface="Aptos"/>
+                <a:ea typeface="Aptos"/>
+                <a:cs typeface="Aptos"/>
+              </a:rPr>
+              <a:t>09</a:t>
+            </a:r>
+          </a:p>
+        </p:txBody>
+      </p:sp>
+    </p:spTree>
+    <p:extLst>
+      <p:ext uri="{BB962C8B-B14F-4D97-AF65-F5344CB8AC3E}">
+        <p14:creationId xmlns:p14="http://schemas.microsoft.com/office/powerpoint/2010/main" val="1710567399"/>
+      </p:ext>
+    </p:extLst>
+  </p:cSld>
+</p:sld>
+</file>
+
+<file path=ppt/slides/slide22.xml><?xml version="1.0" encoding="utf-8"?>
+<p:sld xmlns:p="http://schemas.openxmlformats.org/presentationml/2006/main">
+  <p:cSld>
+    <p:spTree>
+      <p:nvGrpSpPr>
+        <p:cNvPr id="1" name=""/>
+        <p:cNvGrpSpPr/>
+        <p:nvPr/>
+      </p:nvGrpSpPr>
+      <p:grpSpPr>
+        <a:xfrm xmlns:a="http://schemas.openxmlformats.org/drawingml/2006/main"/>
+      </p:grpSpPr>
+      <p:sp>
+        <p:nvSpPr>
+          <p:cNvPr id="1" name="">
+            <a:extLst xmlns:a="http://schemas.openxmlformats.org/drawingml/2006/main">
+              <a:ext uri="{FF2B5EF4-FFF2-40B4-BE49-F238E27FC236}">
+                <a16:creationId xmlns:a16="http://schemas.microsoft.com/office/drawing/2014/main" id="{01C52D6E-1792-4804-8CA9-CD4E87940862}"/>
+              </a:ext>
+            </a:extLst>
+          </p:cNvPr>
+          <p:cNvSpPr>
+            <a:spLocks xmlns:a="http://schemas.openxmlformats.org/drawingml/2006/main" noGrp="1"/>
+          </p:cNvSpPr>
+          <p:nvPr/>
+        </p:nvSpPr>
+        <p:spPr>
+          <a:xfrm xmlns:a="http://schemas.openxmlformats.org/drawingml/2006/main">
+            <a:off x="0" y="0"/>
+            <a:ext cx="12192000" cy="6858000"/>
+          </a:xfrm>
+          <a:prstGeom xmlns:a="http://schemas.openxmlformats.org/drawingml/2006/main" prst="rect">
+            <a:avLst/>
+          </a:prstGeom>
+          <a:solidFill xmlns:a="http://schemas.openxmlformats.org/drawingml/2006/main">
+            <a:srgbClr val="FFFFFF"/>
+          </a:solidFill>
+          <a:ln xmlns:a="http://schemas.openxmlformats.org/drawingml/2006/main" w="0">
+            <a:solidFill>
+              <a:srgbClr val="000000">
+                <a:alpha val="0"/>
+              </a:srgbClr>
+            </a:solidFill>
+            <a:prstDash val="solid"/>
+          </a:ln>
+        </p:spPr>
+      </p:sp>
+      <p:sp>
+        <p:nvSpPr>
+          <p:cNvPr id="2" name="">
+            <a:extLst xmlns:a="http://schemas.openxmlformats.org/drawingml/2006/main">
+              <a:ext uri="{FF2B5EF4-FFF2-40B4-BE49-F238E27FC236}">
+                <a16:creationId xmlns:a16="http://schemas.microsoft.com/office/drawing/2014/main" id="{9FD75B79-9381-45D5-9C51-C2000D6A66AC}"/>
+              </a:ext>
+            </a:extLst>
+          </p:cNvPr>
+          <p:cNvSpPr>
+            <a:spLocks xmlns:a="http://schemas.openxmlformats.org/drawingml/2006/main" noGrp="1"/>
+          </p:cNvSpPr>
+          <p:nvPr/>
+        </p:nvSpPr>
+        <p:spPr>
+          <a:xfrm xmlns:a="http://schemas.openxmlformats.org/drawingml/2006/main">
+            <a:off x="609600" y="552450"/>
+            <a:ext cx="66675" cy="66675"/>
+          </a:xfrm>
+          <a:prstGeom xmlns:a="http://schemas.openxmlformats.org/drawingml/2006/main" prst="ellipse">
+            <a:avLst/>
+          </a:prstGeom>
+          <a:solidFill xmlns:a="http://schemas.openxmlformats.org/drawingml/2006/main">
+            <a:srgbClr val="0756D9"/>
+          </a:solidFill>
+          <a:ln xmlns:a="http://schemas.openxmlformats.org/drawingml/2006/main" w="0">
+            <a:solidFill>
+              <a:srgbClr val="000000">
+                <a:alpha val="0"/>
+              </a:srgbClr>
+            </a:solidFill>
+            <a:prstDash val="solid"/>
+          </a:ln>
+        </p:spPr>
+      </p:sp>
+      <p:sp>
+        <p:nvSpPr>
+          <p:cNvPr id="3" name="">
+            <a:extLst xmlns:a="http://schemas.openxmlformats.org/drawingml/2006/main">
+              <a:ext uri="{FF2B5EF4-FFF2-40B4-BE49-F238E27FC236}">
+                <a16:creationId xmlns:a16="http://schemas.microsoft.com/office/drawing/2014/main" id="{897E6E5D-52C5-4ADC-BF60-1EDBEA8DCC29}"/>
+              </a:ext>
+            </a:extLst>
+          </p:cNvPr>
+          <p:cNvSpPr>
+            <a:spLocks xmlns:a="http://schemas.openxmlformats.org/drawingml/2006/main" noGrp="1"/>
+          </p:cNvSpPr>
+          <p:nvPr/>
+        </p:nvSpPr>
+        <p:spPr>
+          <a:xfrm xmlns:a="http://schemas.openxmlformats.org/drawingml/2006/main">
+            <a:off x="771525" y="495300"/>
+            <a:ext cx="4953000" cy="190500"/>
+          </a:xfrm>
+          <a:prstGeom xmlns:a="http://schemas.openxmlformats.org/drawingml/2006/main" prst="rect">
+            <a:avLst/>
+          </a:prstGeom>
+          <a:solidFill xmlns:a="http://schemas.openxmlformats.org/drawingml/2006/main">
+            <a:srgbClr val="000000">
+              <a:alpha val="0"/>
+            </a:srgbClr>
+          </a:solidFill>
+          <a:ln xmlns:a="http://schemas.openxmlformats.org/drawingml/2006/main" w="0">
+            <a:solidFill>
+              <a:srgbClr val="000000">
+                <a:alpha val="0"/>
+              </a:srgbClr>
+            </a:solidFill>
+            <a:prstDash val="solid"/>
+          </a:ln>
+        </p:spPr>
+        <p:txBody>
+          <a:bodyPr xmlns:a="http://schemas.openxmlformats.org/drawingml/2006/main" lIns="0" tIns="0" rIns="0" bIns="0" anchor="t"/>
+          <a:lstStyle xmlns:a="http://schemas.openxmlformats.org/drawingml/2006/main"/>
+          <a:p xmlns:a="http://schemas.openxmlformats.org/drawingml/2006/main">
+            <a:pPr algn="l">
+              <a:defRPr sz="825" b="1">
+                <a:solidFill>
+                  <a:srgbClr val="0756D9"/>
+                </a:solidFill>
+                <a:latin typeface="Aptos"/>
+                <a:ea typeface="Aptos"/>
+                <a:cs typeface="Aptos"/>
+              </a:defRPr>
+            </a:pPr>
+            <a:r>
+              <a:rPr sz="825" b="1">
+                <a:solidFill>
+                  <a:srgbClr val="0756D9"/>
+                </a:solidFill>
+                <a:latin typeface="Aptos"/>
+                <a:ea typeface="Aptos"/>
+                <a:cs typeface="Aptos"/>
+              </a:rPr>
+              <a:t>REPORTING</a:t>
+            </a:r>
+          </a:p>
+        </p:txBody>
+      </p:sp>
+      <p:sp>
+        <p:nvSpPr>
+          <p:cNvPr id="4" name="">
+            <a:extLst xmlns:a="http://schemas.openxmlformats.org/drawingml/2006/main">
+              <a:ext uri="{FF2B5EF4-FFF2-40B4-BE49-F238E27FC236}">
+                <a16:creationId xmlns:a16="http://schemas.microsoft.com/office/drawing/2014/main" id="{3B87E92F-0B4F-4D0B-B412-DD8AC8942278}"/>
+              </a:ext>
+            </a:extLst>
+          </p:cNvPr>
+          <p:cNvSpPr>
+            <a:spLocks xmlns:a="http://schemas.openxmlformats.org/drawingml/2006/main" noGrp="1"/>
+          </p:cNvSpPr>
+          <p:nvPr/>
+        </p:nvSpPr>
+        <p:spPr>
+          <a:xfrm xmlns:a="http://schemas.openxmlformats.org/drawingml/2006/main">
+            <a:off x="609600" y="781050"/>
+            <a:ext cx="8858250" cy="1104900"/>
+          </a:xfrm>
+          <a:prstGeom xmlns:a="http://schemas.openxmlformats.org/drawingml/2006/main" prst="rect">
+            <a:avLst/>
+          </a:prstGeom>
+          <a:solidFill xmlns:a="http://schemas.openxmlformats.org/drawingml/2006/main">
+            <a:srgbClr val="000000">
+              <a:alpha val="0"/>
+            </a:srgbClr>
+          </a:solidFill>
+          <a:ln xmlns:a="http://schemas.openxmlformats.org/drawingml/2006/main" w="0">
+            <a:solidFill>
+              <a:srgbClr val="000000">
+                <a:alpha val="0"/>
+              </a:srgbClr>
+            </a:solidFill>
+            <a:prstDash val="solid"/>
+          </a:ln>
+        </p:spPr>
+        <p:txBody>
+          <a:bodyPr xmlns:a="http://schemas.openxmlformats.org/drawingml/2006/main" lIns="0" tIns="0" rIns="0" bIns="0" anchor="t"/>
+          <a:lstStyle xmlns:a="http://schemas.openxmlformats.org/drawingml/2006/main"/>
+          <a:p xmlns:a="http://schemas.openxmlformats.org/drawingml/2006/main">
+            <a:pPr algn="l">
+              <a:defRPr sz="2850" b="1">
+                <a:solidFill>
+                  <a:srgbClr val="08111F"/>
+                </a:solidFill>
+                <a:latin typeface="Aptos Display"/>
+                <a:ea typeface="Aptos Display"/>
+                <a:cs typeface="Aptos Display"/>
+              </a:defRPr>
+            </a:pPr>
+            <a:r>
+              <a:rPr sz="2850" b="1">
+                <a:solidFill>
+                  <a:srgbClr val="08111F"/>
+                </a:solidFill>
+                <a:latin typeface="Aptos Display"/>
+                <a:ea typeface="Aptos Display"/>
+                <a:cs typeface="Aptos Display"/>
+              </a:rPr>
+              <a:t>Operational, regulatory, and executive reporting with self-service downloads.</a:t>
+            </a:r>
+          </a:p>
+        </p:txBody>
+      </p:sp>
+      <p:sp>
+        <p:nvSpPr>
+          <p:cNvPr id="5" name="">
+            <a:extLst xmlns:a="http://schemas.openxmlformats.org/drawingml/2006/main">
+              <a:ext uri="{FF2B5EF4-FFF2-40B4-BE49-F238E27FC236}">
+                <a16:creationId xmlns:a16="http://schemas.microsoft.com/office/drawing/2014/main" id="{E42A9E43-33CC-4E14-AE9B-B0813B856611}"/>
+              </a:ext>
+            </a:extLst>
+          </p:cNvPr>
+          <p:cNvSpPr>
+            <a:spLocks xmlns:a="http://schemas.openxmlformats.org/drawingml/2006/main" noGrp="1"/>
+          </p:cNvSpPr>
+          <p:nvPr/>
+        </p:nvSpPr>
+        <p:spPr>
+          <a:xfrm xmlns:a="http://schemas.openxmlformats.org/drawingml/2006/main">
+            <a:off x="609600" y="2000250"/>
+            <a:ext cx="8858250" cy="647700"/>
+          </a:xfrm>
+          <a:prstGeom xmlns:a="http://schemas.openxmlformats.org/drawingml/2006/main" prst="rect">
+            <a:avLst/>
+          </a:prstGeom>
+          <a:solidFill xmlns:a="http://schemas.openxmlformats.org/drawingml/2006/main">
+            <a:srgbClr val="000000">
+              <a:alpha val="0"/>
+            </a:srgbClr>
+          </a:solidFill>
+          <a:ln xmlns:a="http://schemas.openxmlformats.org/drawingml/2006/main" w="0">
+            <a:solidFill>
+              <a:srgbClr val="000000">
+                <a:alpha val="0"/>
+              </a:srgbClr>
+            </a:solidFill>
+            <a:prstDash val="solid"/>
+          </a:ln>
+        </p:spPr>
+        <p:txBody>
+          <a:bodyPr xmlns:a="http://schemas.openxmlformats.org/drawingml/2006/main" lIns="0" tIns="0" rIns="0" bIns="0" anchor="t"/>
+          <a:lstStyle xmlns:a="http://schemas.openxmlformats.org/drawingml/2006/main"/>
+          <a:p xmlns:a="http://schemas.openxmlformats.org/drawingml/2006/main">
+            <a:pPr algn="l">
+              <a:defRPr sz="1275" b="0">
+                <a:solidFill>
+                  <a:srgbClr val="344054"/>
+                </a:solidFill>
+                <a:latin typeface="Aptos"/>
+                <a:ea typeface="Aptos"/>
+                <a:cs typeface="Aptos"/>
+              </a:defRPr>
+            </a:pPr>
+            <a:r>
+              <a:rPr sz="1275" b="0">
+                <a:solidFill>
+                  <a:srgbClr val="344054"/>
+                </a:solidFill>
+                <a:latin typeface="Aptos"/>
+                <a:ea typeface="Aptos"/>
+                <a:cs typeface="Aptos"/>
+              </a:rPr>
+              <a:t>The Reports screen generates downloadable CSV or JSON extracts for a selected time range, aligned to RFP section 8, from the same records that drive the dashboard.</a:t>
+            </a:r>
+          </a:p>
+        </p:txBody>
+      </p:sp>
+      <p:sp>
+        <p:nvSpPr>
+          <p:cNvPr id="6" name="">
+            <a:extLst xmlns:a="http://schemas.openxmlformats.org/drawingml/2006/main">
+              <a:ext uri="{FF2B5EF4-FFF2-40B4-BE49-F238E27FC236}">
+                <a16:creationId xmlns:a16="http://schemas.microsoft.com/office/drawing/2014/main" id="{17DF8396-EEBF-4176-9163-17226319CA72}"/>
+              </a:ext>
+            </a:extLst>
+          </p:cNvPr>
+          <p:cNvSpPr>
+            <a:spLocks xmlns:a="http://schemas.openxmlformats.org/drawingml/2006/main" noGrp="1"/>
+          </p:cNvSpPr>
+          <p:nvPr/>
+        </p:nvSpPr>
+        <p:spPr>
+          <a:xfrm xmlns:a="http://schemas.openxmlformats.org/drawingml/2006/main">
+            <a:off x="723900" y="3181350"/>
+            <a:ext cx="2457450" cy="1657350"/>
+          </a:xfrm>
+          <a:prstGeom xmlns:a="http://schemas.openxmlformats.org/drawingml/2006/main" prst="rect">
+            <a:avLst/>
+          </a:prstGeom>
+          <a:solidFill xmlns:a="http://schemas.openxmlformats.org/drawingml/2006/main">
+            <a:srgbClr val="FFFFFF"/>
+          </a:solidFill>
+          <a:ln xmlns:a="http://schemas.openxmlformats.org/drawingml/2006/main" w="9525">
+            <a:solidFill>
+              <a:srgbClr val="EAECF0"/>
+            </a:solidFill>
+            <a:prstDash val="solid"/>
+          </a:ln>
+        </p:spPr>
+      </p:sp>
+      <p:sp>
+        <p:nvSpPr>
+          <p:cNvPr id="7" name="">
+            <a:extLst xmlns:a="http://schemas.openxmlformats.org/drawingml/2006/main">
+              <a:ext uri="{FF2B5EF4-FFF2-40B4-BE49-F238E27FC236}">
+                <a16:creationId xmlns:a16="http://schemas.microsoft.com/office/drawing/2014/main" id="{105AB5B4-9601-4F2D-BEFC-A1855D6B6ECA}"/>
+              </a:ext>
+            </a:extLst>
+          </p:cNvPr>
+          <p:cNvSpPr>
+            <a:spLocks xmlns:a="http://schemas.openxmlformats.org/drawingml/2006/main" noGrp="1"/>
+          </p:cNvSpPr>
+          <p:nvPr/>
+        </p:nvSpPr>
+        <p:spPr>
+          <a:xfrm xmlns:a="http://schemas.openxmlformats.org/drawingml/2006/main">
+            <a:off x="914400" y="3429000"/>
+            <a:ext cx="2038350" cy="247650"/>
+          </a:xfrm>
+          <a:prstGeom xmlns:a="http://schemas.openxmlformats.org/drawingml/2006/main" prst="rect">
+            <a:avLst/>
+          </a:prstGeom>
+          <a:solidFill xmlns:a="http://schemas.openxmlformats.org/drawingml/2006/main">
+            <a:srgbClr val="000000">
+              <a:alpha val="0"/>
+            </a:srgbClr>
+          </a:solidFill>
+          <a:ln xmlns:a="http://schemas.openxmlformats.org/drawingml/2006/main" w="0">
+            <a:solidFill>
+              <a:srgbClr val="000000">
+                <a:alpha val="0"/>
+              </a:srgbClr>
+            </a:solidFill>
+            <a:prstDash val="solid"/>
+          </a:ln>
+        </p:spPr>
+        <p:txBody>
+          <a:bodyPr xmlns:a="http://schemas.openxmlformats.org/drawingml/2006/main" lIns="0" tIns="0" rIns="0" bIns="0" anchor="t"/>
+          <a:lstStyle xmlns:a="http://schemas.openxmlformats.org/drawingml/2006/main"/>
+          <a:p xmlns:a="http://schemas.openxmlformats.org/drawingml/2006/main">
+            <a:pPr algn="l">
+              <a:defRPr sz="1425" b="1">
+                <a:solidFill>
+                  <a:srgbClr val="08111F"/>
+                </a:solidFill>
+                <a:latin typeface="Aptos"/>
+                <a:ea typeface="Aptos"/>
+                <a:cs typeface="Aptos"/>
+              </a:defRPr>
+            </a:pPr>
+            <a:r>
+              <a:rPr sz="1425" b="1">
+                <a:solidFill>
+                  <a:srgbClr val="08111F"/>
+                </a:solidFill>
+                <a:latin typeface="Aptos"/>
+                <a:ea typeface="Aptos"/>
+                <a:cs typeface="Aptos"/>
+              </a:rPr>
+              <a:t>Operational</a:t>
+            </a:r>
+          </a:p>
+        </p:txBody>
+      </p:sp>
+      <p:sp>
+        <p:nvSpPr>
+          <p:cNvPr id="8" name="">
+            <a:extLst xmlns:a="http://schemas.openxmlformats.org/drawingml/2006/main">
+              <a:ext uri="{FF2B5EF4-FFF2-40B4-BE49-F238E27FC236}">
+                <a16:creationId xmlns:a16="http://schemas.microsoft.com/office/drawing/2014/main" id="{3372B8E7-8E50-41F3-88BF-FE059E24BFCD}"/>
+              </a:ext>
+            </a:extLst>
+          </p:cNvPr>
+          <p:cNvSpPr>
+            <a:spLocks xmlns:a="http://schemas.openxmlformats.org/drawingml/2006/main" noGrp="1"/>
+          </p:cNvSpPr>
+          <p:nvPr/>
+        </p:nvSpPr>
+        <p:spPr>
+          <a:xfrm xmlns:a="http://schemas.openxmlformats.org/drawingml/2006/main">
+            <a:off x="914400" y="3829050"/>
+            <a:ext cx="2038350" cy="590550"/>
+          </a:xfrm>
+          <a:prstGeom xmlns:a="http://schemas.openxmlformats.org/drawingml/2006/main" prst="rect">
+            <a:avLst/>
+          </a:prstGeom>
+          <a:solidFill xmlns:a="http://schemas.openxmlformats.org/drawingml/2006/main">
+            <a:srgbClr val="000000">
+              <a:alpha val="0"/>
+            </a:srgbClr>
+          </a:solidFill>
+          <a:ln xmlns:a="http://schemas.openxmlformats.org/drawingml/2006/main" w="0">
+            <a:solidFill>
+              <a:srgbClr val="000000">
+                <a:alpha val="0"/>
+              </a:srgbClr>
+            </a:solidFill>
+            <a:prstDash val="solid"/>
+          </a:ln>
+        </p:spPr>
+        <p:txBody>
+          <a:bodyPr xmlns:a="http://schemas.openxmlformats.org/drawingml/2006/main" lIns="0" tIns="0" rIns="0" bIns="0" anchor="t"/>
+          <a:lstStyle xmlns:a="http://schemas.openxmlformats.org/drawingml/2006/main"/>
+          <a:p xmlns:a="http://schemas.openxmlformats.org/drawingml/2006/main">
+            <a:pPr algn="l">
+              <a:defRPr sz="938" b="0">
+                <a:solidFill>
+                  <a:srgbClr val="344054"/>
+                </a:solidFill>
+                <a:latin typeface="Aptos"/>
+                <a:ea typeface="Aptos"/>
+                <a:cs typeface="Aptos"/>
+              </a:defRPr>
+            </a:pPr>
+            <a:r>
+              <a:rPr sz="938" b="0">
+                <a:solidFill>
+                  <a:srgbClr val="344054"/>
+                </a:solidFill>
+                <a:latin typeface="Aptos"/>
+                <a:ea typeface="Aptos"/>
+                <a:cs typeface="Aptos"/>
+              </a:rPr>
+              <a:t>Transaction, failed transaction, settlement, and reconciliation reports.</a:t>
+            </a:r>
+          </a:p>
+        </p:txBody>
+      </p:sp>
+      <p:sp>
+        <p:nvSpPr>
+          <p:cNvPr id="9" name="">
+            <a:extLst xmlns:a="http://schemas.openxmlformats.org/drawingml/2006/main">
+              <a:ext uri="{FF2B5EF4-FFF2-40B4-BE49-F238E27FC236}">
+                <a16:creationId xmlns:a16="http://schemas.microsoft.com/office/drawing/2014/main" id="{19762CE5-2C74-48C4-A984-4A850ACE726C}"/>
+              </a:ext>
+            </a:extLst>
+          </p:cNvPr>
+          <p:cNvSpPr>
+            <a:spLocks xmlns:a="http://schemas.openxmlformats.org/drawingml/2006/main" noGrp="1"/>
+          </p:cNvSpPr>
+          <p:nvPr/>
+        </p:nvSpPr>
+        <p:spPr>
+          <a:xfrm xmlns:a="http://schemas.openxmlformats.org/drawingml/2006/main">
+            <a:off x="3409950" y="3181350"/>
+            <a:ext cx="2457450" cy="1657350"/>
+          </a:xfrm>
+          <a:prstGeom xmlns:a="http://schemas.openxmlformats.org/drawingml/2006/main" prst="rect">
+            <a:avLst/>
+          </a:prstGeom>
+          <a:solidFill xmlns:a="http://schemas.openxmlformats.org/drawingml/2006/main">
+            <a:srgbClr val="FFFFFF"/>
+          </a:solidFill>
+          <a:ln xmlns:a="http://schemas.openxmlformats.org/drawingml/2006/main" w="9525">
+            <a:solidFill>
+              <a:srgbClr val="EAECF0"/>
+            </a:solidFill>
+            <a:prstDash val="solid"/>
+          </a:ln>
+        </p:spPr>
+      </p:sp>
+      <p:sp>
+        <p:nvSpPr>
+          <p:cNvPr id="10" name="">
+            <a:extLst xmlns:a="http://schemas.openxmlformats.org/drawingml/2006/main">
+              <a:ext uri="{FF2B5EF4-FFF2-40B4-BE49-F238E27FC236}">
+                <a16:creationId xmlns:a16="http://schemas.microsoft.com/office/drawing/2014/main" id="{1C71DD23-ED64-4682-A732-ABF89C833C1D}"/>
+              </a:ext>
+            </a:extLst>
+          </p:cNvPr>
+          <p:cNvSpPr>
+            <a:spLocks xmlns:a="http://schemas.openxmlformats.org/drawingml/2006/main" noGrp="1"/>
+          </p:cNvSpPr>
+          <p:nvPr/>
+        </p:nvSpPr>
+        <p:spPr>
+          <a:xfrm xmlns:a="http://schemas.openxmlformats.org/drawingml/2006/main">
+            <a:off x="3600450" y="3429000"/>
+            <a:ext cx="2038350" cy="247650"/>
+          </a:xfrm>
+          <a:prstGeom xmlns:a="http://schemas.openxmlformats.org/drawingml/2006/main" prst="rect">
+            <a:avLst/>
+          </a:prstGeom>
+          <a:solidFill xmlns:a="http://schemas.openxmlformats.org/drawingml/2006/main">
+            <a:srgbClr val="000000">
+              <a:alpha val="0"/>
+            </a:srgbClr>
+          </a:solidFill>
+          <a:ln xmlns:a="http://schemas.openxmlformats.org/drawingml/2006/main" w="0">
+            <a:solidFill>
+              <a:srgbClr val="000000">
+                <a:alpha val="0"/>
+              </a:srgbClr>
+            </a:solidFill>
+            <a:prstDash val="solid"/>
+          </a:ln>
+        </p:spPr>
+        <p:txBody>
+          <a:bodyPr xmlns:a="http://schemas.openxmlformats.org/drawingml/2006/main" lIns="0" tIns="0" rIns="0" bIns="0" anchor="t"/>
+          <a:lstStyle xmlns:a="http://schemas.openxmlformats.org/drawingml/2006/main"/>
+          <a:p xmlns:a="http://schemas.openxmlformats.org/drawingml/2006/main">
+            <a:pPr algn="l">
+              <a:defRPr sz="1425" b="1">
+                <a:solidFill>
+                  <a:srgbClr val="08111F"/>
+                </a:solidFill>
+                <a:latin typeface="Aptos"/>
+                <a:ea typeface="Aptos"/>
+                <a:cs typeface="Aptos"/>
+              </a:defRPr>
+            </a:pPr>
+            <a:r>
+              <a:rPr sz="1425" b="1">
+                <a:solidFill>
+                  <a:srgbClr val="08111F"/>
+                </a:solidFill>
+                <a:latin typeface="Aptos"/>
+                <a:ea typeface="Aptos"/>
+                <a:cs typeface="Aptos"/>
+              </a:rPr>
+              <a:t>Regulatory</a:t>
+            </a:r>
+          </a:p>
+        </p:txBody>
+      </p:sp>
+      <p:sp>
+        <p:nvSpPr>
+          <p:cNvPr id="11" name="">
+            <a:extLst xmlns:a="http://schemas.openxmlformats.org/drawingml/2006/main">
+              <a:ext uri="{FF2B5EF4-FFF2-40B4-BE49-F238E27FC236}">
+                <a16:creationId xmlns:a16="http://schemas.microsoft.com/office/drawing/2014/main" id="{B2C9C6B6-51D6-409C-A737-0A73999562B6}"/>
+              </a:ext>
+            </a:extLst>
+          </p:cNvPr>
+          <p:cNvSpPr>
+            <a:spLocks xmlns:a="http://schemas.openxmlformats.org/drawingml/2006/main" noGrp="1"/>
+          </p:cNvSpPr>
+          <p:nvPr/>
+        </p:nvSpPr>
+        <p:spPr>
+          <a:xfrm xmlns:a="http://schemas.openxmlformats.org/drawingml/2006/main">
+            <a:off x="3600450" y="3829050"/>
+            <a:ext cx="2038350" cy="590550"/>
+          </a:xfrm>
+          <a:prstGeom xmlns:a="http://schemas.openxmlformats.org/drawingml/2006/main" prst="rect">
+            <a:avLst/>
+          </a:prstGeom>
+          <a:solidFill xmlns:a="http://schemas.openxmlformats.org/drawingml/2006/main">
+            <a:srgbClr val="000000">
+              <a:alpha val="0"/>
+            </a:srgbClr>
+          </a:solidFill>
+          <a:ln xmlns:a="http://schemas.openxmlformats.org/drawingml/2006/main" w="0">
+            <a:solidFill>
+              <a:srgbClr val="000000">
+                <a:alpha val="0"/>
+              </a:srgbClr>
+            </a:solidFill>
+            <a:prstDash val="solid"/>
+          </a:ln>
+        </p:spPr>
+        <p:txBody>
+          <a:bodyPr xmlns:a="http://schemas.openxmlformats.org/drawingml/2006/main" lIns="0" tIns="0" rIns="0" bIns="0" anchor="t"/>
+          <a:lstStyle xmlns:a="http://schemas.openxmlformats.org/drawingml/2006/main"/>
+          <a:p xmlns:a="http://schemas.openxmlformats.org/drawingml/2006/main">
+            <a:pPr algn="l">
+              <a:defRPr sz="938" b="0">
+                <a:solidFill>
+                  <a:srgbClr val="344054"/>
+                </a:solidFill>
+                <a:latin typeface="Aptos"/>
+                <a:ea typeface="Aptos"/>
+                <a:cs typeface="Aptos"/>
+              </a:defRPr>
+            </a:pPr>
+            <a:r>
+              <a:rPr sz="938" b="0">
+                <a:solidFill>
+                  <a:srgbClr val="344054"/>
+                </a:solidFill>
+                <a:latin typeface="Aptos"/>
+                <a:ea typeface="Aptos"/>
+                <a:cs typeface="Aptos"/>
+              </a:rPr>
+              <a:t>Compliance and audit reports for regulators and business stakeholders.</a:t>
+            </a:r>
+          </a:p>
+        </p:txBody>
+      </p:sp>
+      <p:sp>
+        <p:nvSpPr>
+          <p:cNvPr id="12" name="">
+            <a:extLst xmlns:a="http://schemas.openxmlformats.org/drawingml/2006/main">
+              <a:ext uri="{FF2B5EF4-FFF2-40B4-BE49-F238E27FC236}">
+                <a16:creationId xmlns:a16="http://schemas.microsoft.com/office/drawing/2014/main" id="{B7FEB269-2D30-4E03-8DFB-644865D99164}"/>
+              </a:ext>
+            </a:extLst>
+          </p:cNvPr>
+          <p:cNvSpPr>
+            <a:spLocks xmlns:a="http://schemas.openxmlformats.org/drawingml/2006/main" noGrp="1"/>
+          </p:cNvSpPr>
+          <p:nvPr/>
+        </p:nvSpPr>
+        <p:spPr>
+          <a:xfrm xmlns:a="http://schemas.openxmlformats.org/drawingml/2006/main">
+            <a:off x="6096000" y="3181350"/>
+            <a:ext cx="2457450" cy="1657350"/>
+          </a:xfrm>
+          <a:prstGeom xmlns:a="http://schemas.openxmlformats.org/drawingml/2006/main" prst="rect">
+            <a:avLst/>
+          </a:prstGeom>
+          <a:solidFill xmlns:a="http://schemas.openxmlformats.org/drawingml/2006/main">
+            <a:srgbClr val="FFFFFF"/>
+          </a:solidFill>
+          <a:ln xmlns:a="http://schemas.openxmlformats.org/drawingml/2006/main" w="9525">
+            <a:solidFill>
+              <a:srgbClr val="EAECF0"/>
+            </a:solidFill>
+            <a:prstDash val="solid"/>
+          </a:ln>
+        </p:spPr>
+      </p:sp>
+      <p:sp>
+        <p:nvSpPr>
+          <p:cNvPr id="13" name="">
+            <a:extLst xmlns:a="http://schemas.openxmlformats.org/drawingml/2006/main">
+              <a:ext uri="{FF2B5EF4-FFF2-40B4-BE49-F238E27FC236}">
+                <a16:creationId xmlns:a16="http://schemas.microsoft.com/office/drawing/2014/main" id="{F8BF6509-2985-4091-A1C7-905ACA4F52FE}"/>
+              </a:ext>
+            </a:extLst>
+          </p:cNvPr>
+          <p:cNvSpPr>
+            <a:spLocks xmlns:a="http://schemas.openxmlformats.org/drawingml/2006/main" noGrp="1"/>
+          </p:cNvSpPr>
+          <p:nvPr/>
+        </p:nvSpPr>
+        <p:spPr>
+          <a:xfrm xmlns:a="http://schemas.openxmlformats.org/drawingml/2006/main">
+            <a:off x="6286500" y="3429000"/>
+            <a:ext cx="2038350" cy="247650"/>
+          </a:xfrm>
+          <a:prstGeom xmlns:a="http://schemas.openxmlformats.org/drawingml/2006/main" prst="rect">
+            <a:avLst/>
+          </a:prstGeom>
+          <a:solidFill xmlns:a="http://schemas.openxmlformats.org/drawingml/2006/main">
+            <a:srgbClr val="000000">
+              <a:alpha val="0"/>
+            </a:srgbClr>
+          </a:solidFill>
+          <a:ln xmlns:a="http://schemas.openxmlformats.org/drawingml/2006/main" w="0">
+            <a:solidFill>
+              <a:srgbClr val="000000">
+                <a:alpha val="0"/>
+              </a:srgbClr>
+            </a:solidFill>
+            <a:prstDash val="solid"/>
+          </a:ln>
+        </p:spPr>
+        <p:txBody>
+          <a:bodyPr xmlns:a="http://schemas.openxmlformats.org/drawingml/2006/main" lIns="0" tIns="0" rIns="0" bIns="0" anchor="t"/>
+          <a:lstStyle xmlns:a="http://schemas.openxmlformats.org/drawingml/2006/main"/>
+          <a:p xmlns:a="http://schemas.openxmlformats.org/drawingml/2006/main">
+            <a:pPr algn="l">
+              <a:defRPr sz="1425" b="1">
+                <a:solidFill>
+                  <a:srgbClr val="08111F"/>
+                </a:solidFill>
+                <a:latin typeface="Aptos"/>
+                <a:ea typeface="Aptos"/>
+                <a:cs typeface="Aptos"/>
+              </a:defRPr>
+            </a:pPr>
+            <a:r>
+              <a:rPr sz="1425" b="1">
+                <a:solidFill>
+                  <a:srgbClr val="08111F"/>
+                </a:solidFill>
+                <a:latin typeface="Aptos"/>
+                <a:ea typeface="Aptos"/>
+                <a:cs typeface="Aptos"/>
+              </a:rPr>
+              <a:t>Executive</a:t>
+            </a:r>
+          </a:p>
+        </p:txBody>
+      </p:sp>
+      <p:sp>
+        <p:nvSpPr>
+          <p:cNvPr id="14" name="">
+            <a:extLst xmlns:a="http://schemas.openxmlformats.org/drawingml/2006/main">
+              <a:ext uri="{FF2B5EF4-FFF2-40B4-BE49-F238E27FC236}">
+                <a16:creationId xmlns:a16="http://schemas.microsoft.com/office/drawing/2014/main" id="{0C49941C-1487-4A99-8791-67805C59B484}"/>
+              </a:ext>
+            </a:extLst>
+          </p:cNvPr>
+          <p:cNvSpPr>
+            <a:spLocks xmlns:a="http://schemas.openxmlformats.org/drawingml/2006/main" noGrp="1"/>
+          </p:cNvSpPr>
+          <p:nvPr/>
+        </p:nvSpPr>
+        <p:spPr>
+          <a:xfrm xmlns:a="http://schemas.openxmlformats.org/drawingml/2006/main">
+            <a:off x="6286500" y="3829050"/>
+            <a:ext cx="2038350" cy="590550"/>
+          </a:xfrm>
+          <a:prstGeom xmlns:a="http://schemas.openxmlformats.org/drawingml/2006/main" prst="rect">
+            <a:avLst/>
+          </a:prstGeom>
+          <a:solidFill xmlns:a="http://schemas.openxmlformats.org/drawingml/2006/main">
+            <a:srgbClr val="000000">
+              <a:alpha val="0"/>
+            </a:srgbClr>
+          </a:solidFill>
+          <a:ln xmlns:a="http://schemas.openxmlformats.org/drawingml/2006/main" w="0">
+            <a:solidFill>
+              <a:srgbClr val="000000">
+                <a:alpha val="0"/>
+              </a:srgbClr>
+            </a:solidFill>
+            <a:prstDash val="solid"/>
+          </a:ln>
+        </p:spPr>
+        <p:txBody>
+          <a:bodyPr xmlns:a="http://schemas.openxmlformats.org/drawingml/2006/main" lIns="0" tIns="0" rIns="0" bIns="0" anchor="t"/>
+          <a:lstStyle xmlns:a="http://schemas.openxmlformats.org/drawingml/2006/main"/>
+          <a:p xmlns:a="http://schemas.openxmlformats.org/drawingml/2006/main">
+            <a:pPr algn="l">
+              <a:defRPr sz="938" b="0">
+                <a:solidFill>
+                  <a:srgbClr val="344054"/>
+                </a:solidFill>
+                <a:latin typeface="Aptos"/>
+                <a:ea typeface="Aptos"/>
+                <a:cs typeface="Aptos"/>
+              </a:defRPr>
+            </a:pPr>
+            <a:r>
+              <a:rPr sz="938" b="0">
+                <a:solidFill>
+                  <a:srgbClr val="344054"/>
+                </a:solidFill>
+                <a:latin typeface="Aptos"/>
+                <a:ea typeface="Aptos"/>
+                <a:cs typeface="Aptos"/>
+              </a:rPr>
+              <a:t>Revenue analysis, partner performance, and business trend reports.</a:t>
+            </a:r>
+          </a:p>
+        </p:txBody>
+      </p:sp>
+      <p:sp>
+        <p:nvSpPr>
+          <p:cNvPr id="15" name="">
+            <a:extLst xmlns:a="http://schemas.openxmlformats.org/drawingml/2006/main">
+              <a:ext uri="{FF2B5EF4-FFF2-40B4-BE49-F238E27FC236}">
+                <a16:creationId xmlns:a16="http://schemas.microsoft.com/office/drawing/2014/main" id="{EC4F2791-B4CD-4C3E-A283-E64159154D54}"/>
+              </a:ext>
+            </a:extLst>
+          </p:cNvPr>
+          <p:cNvSpPr>
+            <a:spLocks xmlns:a="http://schemas.openxmlformats.org/drawingml/2006/main" noGrp="1"/>
+          </p:cNvSpPr>
+          <p:nvPr/>
+        </p:nvSpPr>
+        <p:spPr>
+          <a:xfrm xmlns:a="http://schemas.openxmlformats.org/drawingml/2006/main">
+            <a:off x="8782050" y="3181350"/>
+            <a:ext cx="2457450" cy="1657350"/>
+          </a:xfrm>
+          <a:prstGeom xmlns:a="http://schemas.openxmlformats.org/drawingml/2006/main" prst="rect">
+            <a:avLst/>
+          </a:prstGeom>
+          <a:solidFill xmlns:a="http://schemas.openxmlformats.org/drawingml/2006/main">
+            <a:srgbClr val="FFFFFF"/>
+          </a:solidFill>
+          <a:ln xmlns:a="http://schemas.openxmlformats.org/drawingml/2006/main" w="9525">
+            <a:solidFill>
+              <a:srgbClr val="EAECF0"/>
+            </a:solidFill>
+            <a:prstDash val="solid"/>
+          </a:ln>
+        </p:spPr>
+      </p:sp>
+      <p:sp>
+        <p:nvSpPr>
+          <p:cNvPr id="16" name="">
+            <a:extLst xmlns:a="http://schemas.openxmlformats.org/drawingml/2006/main">
+              <a:ext uri="{FF2B5EF4-FFF2-40B4-BE49-F238E27FC236}">
+                <a16:creationId xmlns:a16="http://schemas.microsoft.com/office/drawing/2014/main" id="{C322199A-3D5A-4668-8482-1B7DCF6D735E}"/>
+              </a:ext>
+            </a:extLst>
+          </p:cNvPr>
+          <p:cNvSpPr>
+            <a:spLocks xmlns:a="http://schemas.openxmlformats.org/drawingml/2006/main" noGrp="1"/>
+          </p:cNvSpPr>
+          <p:nvPr/>
+        </p:nvSpPr>
+        <p:spPr>
+          <a:xfrm xmlns:a="http://schemas.openxmlformats.org/drawingml/2006/main">
+            <a:off x="8972550" y="3429000"/>
+            <a:ext cx="2038350" cy="247650"/>
+          </a:xfrm>
+          <a:prstGeom xmlns:a="http://schemas.openxmlformats.org/drawingml/2006/main" prst="rect">
+            <a:avLst/>
+          </a:prstGeom>
+          <a:solidFill xmlns:a="http://schemas.openxmlformats.org/drawingml/2006/main">
+            <a:srgbClr val="000000">
+              <a:alpha val="0"/>
+            </a:srgbClr>
+          </a:solidFill>
+          <a:ln xmlns:a="http://schemas.openxmlformats.org/drawingml/2006/main" w="0">
+            <a:solidFill>
+              <a:srgbClr val="000000">
+                <a:alpha val="0"/>
+              </a:srgbClr>
+            </a:solidFill>
+            <a:prstDash val="solid"/>
+          </a:ln>
+        </p:spPr>
+        <p:txBody>
+          <a:bodyPr xmlns:a="http://schemas.openxmlformats.org/drawingml/2006/main" lIns="0" tIns="0" rIns="0" bIns="0" anchor="t"/>
+          <a:lstStyle xmlns:a="http://schemas.openxmlformats.org/drawingml/2006/main"/>
+          <a:p xmlns:a="http://schemas.openxmlformats.org/drawingml/2006/main">
+            <a:pPr algn="l">
+              <a:defRPr sz="1425" b="1">
+                <a:solidFill>
+                  <a:srgbClr val="08111F"/>
+                </a:solidFill>
+                <a:latin typeface="Aptos"/>
+                <a:ea typeface="Aptos"/>
+                <a:cs typeface="Aptos"/>
+              </a:defRPr>
+            </a:pPr>
+            <a:r>
+              <a:rPr sz="1425" b="1">
+                <a:solidFill>
+                  <a:srgbClr val="08111F"/>
+                </a:solidFill>
+                <a:latin typeface="Aptos"/>
+                <a:ea typeface="Aptos"/>
+                <a:cs typeface="Aptos"/>
+              </a:rPr>
+              <a:t>Delivery</a:t>
+            </a:r>
+          </a:p>
+        </p:txBody>
+      </p:sp>
+      <p:sp>
+        <p:nvSpPr>
+          <p:cNvPr id="17" name="">
+            <a:extLst xmlns:a="http://schemas.openxmlformats.org/drawingml/2006/main">
+              <a:ext uri="{FF2B5EF4-FFF2-40B4-BE49-F238E27FC236}">
+                <a16:creationId xmlns:a16="http://schemas.microsoft.com/office/drawing/2014/main" id="{7B1631E7-B671-4EB5-A680-8C7D687F8EDB}"/>
+              </a:ext>
+            </a:extLst>
+          </p:cNvPr>
+          <p:cNvSpPr>
+            <a:spLocks xmlns:a="http://schemas.openxmlformats.org/drawingml/2006/main" noGrp="1"/>
+          </p:cNvSpPr>
+          <p:nvPr/>
+        </p:nvSpPr>
+        <p:spPr>
+          <a:xfrm xmlns:a="http://schemas.openxmlformats.org/drawingml/2006/main">
+            <a:off x="8972550" y="3829050"/>
+            <a:ext cx="2038350" cy="590550"/>
+          </a:xfrm>
+          <a:prstGeom xmlns:a="http://schemas.openxmlformats.org/drawingml/2006/main" prst="rect">
+            <a:avLst/>
+          </a:prstGeom>
+          <a:solidFill xmlns:a="http://schemas.openxmlformats.org/drawingml/2006/main">
+            <a:srgbClr val="000000">
+              <a:alpha val="0"/>
+            </a:srgbClr>
+          </a:solidFill>
+          <a:ln xmlns:a="http://schemas.openxmlformats.org/drawingml/2006/main" w="0">
+            <a:solidFill>
+              <a:srgbClr val="000000">
+                <a:alpha val="0"/>
+              </a:srgbClr>
+            </a:solidFill>
+            <a:prstDash val="solid"/>
+          </a:ln>
+        </p:spPr>
+        <p:txBody>
+          <a:bodyPr xmlns:a="http://schemas.openxmlformats.org/drawingml/2006/main" lIns="0" tIns="0" rIns="0" bIns="0" anchor="t"/>
+          <a:lstStyle xmlns:a="http://schemas.openxmlformats.org/drawingml/2006/main"/>
+          <a:p xmlns:a="http://schemas.openxmlformats.org/drawingml/2006/main">
+            <a:pPr algn="l">
+              <a:defRPr sz="938" b="0">
+                <a:solidFill>
+                  <a:srgbClr val="344054"/>
+                </a:solidFill>
+                <a:latin typeface="Aptos"/>
+                <a:ea typeface="Aptos"/>
+                <a:cs typeface="Aptos"/>
+              </a:defRPr>
+            </a:pPr>
+            <a:r>
+              <a:rPr sz="938" b="0">
+                <a:solidFill>
+                  <a:srgbClr val="344054"/>
+                </a:solidFill>
+                <a:latin typeface="Aptos"/>
+                <a:ea typeface="Aptos"/>
+                <a:cs typeface="Aptos"/>
+              </a:rPr>
+              <a:t>On-demand generation, time-range filters, and CSV or JSON download.</a:t>
+            </a:r>
+          </a:p>
+        </p:txBody>
+      </p:sp>
+      <p:sp>
+        <p:nvSpPr>
+          <p:cNvPr id="18" name="">
+            <a:extLst xmlns:a="http://schemas.openxmlformats.org/drawingml/2006/main">
+              <a:ext uri="{FF2B5EF4-FFF2-40B4-BE49-F238E27FC236}">
+                <a16:creationId xmlns:a16="http://schemas.microsoft.com/office/drawing/2014/main" id="{5B755C6F-5649-43E9-80AB-6E3ECE76323D}"/>
+              </a:ext>
+            </a:extLst>
+          </p:cNvPr>
+          <p:cNvSpPr>
+            <a:spLocks xmlns:a="http://schemas.openxmlformats.org/drawingml/2006/main" noGrp="1"/>
+          </p:cNvSpPr>
+          <p:nvPr/>
+        </p:nvSpPr>
+        <p:spPr>
+          <a:xfrm xmlns:a="http://schemas.openxmlformats.org/drawingml/2006/main">
+            <a:off x="1066800" y="5353050"/>
+            <a:ext cx="1257300" cy="285750"/>
+          </a:xfrm>
+          <a:prstGeom xmlns:a="http://schemas.openxmlformats.org/drawingml/2006/main" prst="rect">
+            <a:avLst/>
+          </a:prstGeom>
+          <a:solidFill xmlns:a="http://schemas.openxmlformats.org/drawingml/2006/main">
+            <a:srgbClr val="EAF2FF"/>
+          </a:solidFill>
+          <a:ln xmlns:a="http://schemas.openxmlformats.org/drawingml/2006/main" w="9525">
+            <a:solidFill>
+              <a:srgbClr val="0756D9">
+                <a:alpha val="20000"/>
+              </a:srgbClr>
+            </a:solidFill>
+            <a:prstDash val="solid"/>
+          </a:ln>
+        </p:spPr>
+      </p:sp>
+      <p:sp>
+        <p:nvSpPr>
+          <p:cNvPr id="19" name="">
+            <a:extLst xmlns:a="http://schemas.openxmlformats.org/drawingml/2006/main">
+              <a:ext uri="{FF2B5EF4-FFF2-40B4-BE49-F238E27FC236}">
+                <a16:creationId xmlns:a16="http://schemas.microsoft.com/office/drawing/2014/main" id="{6A0A8ADE-A68B-4657-92EE-CE4A7CB7A296}"/>
+              </a:ext>
+            </a:extLst>
+          </p:cNvPr>
+          <p:cNvSpPr>
+            <a:spLocks xmlns:a="http://schemas.openxmlformats.org/drawingml/2006/main" noGrp="1"/>
+          </p:cNvSpPr>
+          <p:nvPr/>
+        </p:nvSpPr>
+        <p:spPr>
+          <a:xfrm xmlns:a="http://schemas.openxmlformats.org/drawingml/2006/main">
+            <a:off x="1181100" y="5467350"/>
+            <a:ext cx="57150" cy="57150"/>
+          </a:xfrm>
+          <a:prstGeom xmlns:a="http://schemas.openxmlformats.org/drawingml/2006/main" prst="ellipse">
+            <a:avLst/>
+          </a:prstGeom>
+          <a:solidFill xmlns:a="http://schemas.openxmlformats.org/drawingml/2006/main">
+            <a:srgbClr val="0756D9"/>
+          </a:solidFill>
+          <a:ln xmlns:a="http://schemas.openxmlformats.org/drawingml/2006/main" w="0">
+            <a:solidFill>
+              <a:srgbClr val="000000">
+                <a:alpha val="0"/>
+              </a:srgbClr>
+            </a:solidFill>
+            <a:prstDash val="solid"/>
+          </a:ln>
+        </p:spPr>
+      </p:sp>
+      <p:sp>
+        <p:nvSpPr>
+          <p:cNvPr id="20" name="">
+            <a:extLst xmlns:a="http://schemas.openxmlformats.org/drawingml/2006/main">
+              <a:ext uri="{FF2B5EF4-FFF2-40B4-BE49-F238E27FC236}">
+                <a16:creationId xmlns:a16="http://schemas.microsoft.com/office/drawing/2014/main" id="{B904A084-2166-4709-824A-F94C781671B9}"/>
+              </a:ext>
+            </a:extLst>
+          </p:cNvPr>
+          <p:cNvSpPr>
+            <a:spLocks xmlns:a="http://schemas.openxmlformats.org/drawingml/2006/main" noGrp="1"/>
+          </p:cNvSpPr>
+          <p:nvPr/>
+        </p:nvSpPr>
+        <p:spPr>
+          <a:xfrm xmlns:a="http://schemas.openxmlformats.org/drawingml/2006/main">
+            <a:off x="1314450" y="5419725"/>
+            <a:ext cx="914400" cy="152400"/>
+          </a:xfrm>
+          <a:prstGeom xmlns:a="http://schemas.openxmlformats.org/drawingml/2006/main" prst="rect">
+            <a:avLst/>
+          </a:prstGeom>
+          <a:solidFill xmlns:a="http://schemas.openxmlformats.org/drawingml/2006/main">
+            <a:srgbClr val="000000">
+              <a:alpha val="0"/>
+            </a:srgbClr>
+          </a:solidFill>
+          <a:ln xmlns:a="http://schemas.openxmlformats.org/drawingml/2006/main" w="0">
+            <a:solidFill>
+              <a:srgbClr val="000000">
+                <a:alpha val="0"/>
+              </a:srgbClr>
+            </a:solidFill>
+            <a:prstDash val="solid"/>
+          </a:ln>
+        </p:spPr>
+        <p:txBody>
+          <a:bodyPr xmlns:a="http://schemas.openxmlformats.org/drawingml/2006/main" lIns="0" tIns="0" rIns="0" bIns="0" anchor="t"/>
+          <a:lstStyle xmlns:a="http://schemas.openxmlformats.org/drawingml/2006/main"/>
+          <a:p xmlns:a="http://schemas.openxmlformats.org/drawingml/2006/main">
+            <a:pPr algn="l">
+              <a:defRPr sz="750" b="1">
+                <a:solidFill>
+                  <a:srgbClr val="0756D9"/>
+                </a:solidFill>
+                <a:latin typeface="Aptos"/>
+                <a:ea typeface="Aptos"/>
+                <a:cs typeface="Aptos"/>
+              </a:defRPr>
+            </a:pPr>
+            <a:r>
+              <a:rPr sz="750" b="1">
+                <a:solidFill>
+                  <a:srgbClr val="0756D9"/>
+                </a:solidFill>
+                <a:latin typeface="Aptos"/>
+                <a:ea typeface="Aptos"/>
+                <a:cs typeface="Aptos"/>
+              </a:rPr>
+              <a:t>Self-service</a:t>
+            </a:r>
+          </a:p>
+        </p:txBody>
+      </p:sp>
+      <p:sp>
+        <p:nvSpPr>
+          <p:cNvPr id="21" name="">
+            <a:extLst xmlns:a="http://schemas.openxmlformats.org/drawingml/2006/main">
+              <a:ext uri="{FF2B5EF4-FFF2-40B4-BE49-F238E27FC236}">
+                <a16:creationId xmlns:a16="http://schemas.microsoft.com/office/drawing/2014/main" id="{F10914BD-83F7-4254-A759-82C14685840C}"/>
+              </a:ext>
+            </a:extLst>
+          </p:cNvPr>
+          <p:cNvSpPr>
+            <a:spLocks xmlns:a="http://schemas.openxmlformats.org/drawingml/2006/main" noGrp="1"/>
+          </p:cNvSpPr>
+          <p:nvPr/>
+        </p:nvSpPr>
+        <p:spPr>
+          <a:xfrm xmlns:a="http://schemas.openxmlformats.org/drawingml/2006/main">
+            <a:off x="2495550" y="5353050"/>
+            <a:ext cx="1504950" cy="285750"/>
+          </a:xfrm>
+          <a:prstGeom xmlns:a="http://schemas.openxmlformats.org/drawingml/2006/main" prst="rect">
+            <a:avLst/>
+          </a:prstGeom>
+          <a:solidFill xmlns:a="http://schemas.openxmlformats.org/drawingml/2006/main">
+            <a:srgbClr val="ECFDF3"/>
+          </a:solidFill>
+          <a:ln xmlns:a="http://schemas.openxmlformats.org/drawingml/2006/main" w="9525">
+            <a:solidFill>
+              <a:srgbClr val="067647">
+                <a:alpha val="20000"/>
+              </a:srgbClr>
+            </a:solidFill>
+            <a:prstDash val="solid"/>
+          </a:ln>
+        </p:spPr>
+      </p:sp>
+      <p:sp>
+        <p:nvSpPr>
+          <p:cNvPr id="22" name="">
+            <a:extLst xmlns:a="http://schemas.openxmlformats.org/drawingml/2006/main">
+              <a:ext uri="{FF2B5EF4-FFF2-40B4-BE49-F238E27FC236}">
+                <a16:creationId xmlns:a16="http://schemas.microsoft.com/office/drawing/2014/main" id="{DC2E744C-C44D-4005-BE3B-91C6DDC4D3DA}"/>
+              </a:ext>
+            </a:extLst>
+          </p:cNvPr>
+          <p:cNvSpPr>
+            <a:spLocks xmlns:a="http://schemas.openxmlformats.org/drawingml/2006/main" noGrp="1"/>
+          </p:cNvSpPr>
+          <p:nvPr/>
+        </p:nvSpPr>
+        <p:spPr>
+          <a:xfrm xmlns:a="http://schemas.openxmlformats.org/drawingml/2006/main">
+            <a:off x="2609850" y="5467350"/>
+            <a:ext cx="57150" cy="57150"/>
+          </a:xfrm>
+          <a:prstGeom xmlns:a="http://schemas.openxmlformats.org/drawingml/2006/main" prst="ellipse">
+            <a:avLst/>
+          </a:prstGeom>
+          <a:solidFill xmlns:a="http://schemas.openxmlformats.org/drawingml/2006/main">
+            <a:srgbClr val="067647"/>
+          </a:solidFill>
+          <a:ln xmlns:a="http://schemas.openxmlformats.org/drawingml/2006/main" w="0">
+            <a:solidFill>
+              <a:srgbClr val="000000">
+                <a:alpha val="0"/>
+              </a:srgbClr>
+            </a:solidFill>
+            <a:prstDash val="solid"/>
+          </a:ln>
+        </p:spPr>
+      </p:sp>
+      <p:sp>
+        <p:nvSpPr>
+          <p:cNvPr id="23" name="">
+            <a:extLst xmlns:a="http://schemas.openxmlformats.org/drawingml/2006/main">
+              <a:ext uri="{FF2B5EF4-FFF2-40B4-BE49-F238E27FC236}">
+                <a16:creationId xmlns:a16="http://schemas.microsoft.com/office/drawing/2014/main" id="{F3FCD090-BB69-47A2-9A51-0A1C48E7E01B}"/>
+              </a:ext>
+            </a:extLst>
+          </p:cNvPr>
+          <p:cNvSpPr>
+            <a:spLocks xmlns:a="http://schemas.openxmlformats.org/drawingml/2006/main" noGrp="1"/>
+          </p:cNvSpPr>
+          <p:nvPr/>
+        </p:nvSpPr>
+        <p:spPr>
+          <a:xfrm xmlns:a="http://schemas.openxmlformats.org/drawingml/2006/main">
+            <a:off x="2743200" y="5419725"/>
+            <a:ext cx="1162050" cy="152400"/>
+          </a:xfrm>
+          <a:prstGeom xmlns:a="http://schemas.openxmlformats.org/drawingml/2006/main" prst="rect">
+            <a:avLst/>
+          </a:prstGeom>
+          <a:solidFill xmlns:a="http://schemas.openxmlformats.org/drawingml/2006/main">
+            <a:srgbClr val="000000">
+              <a:alpha val="0"/>
+            </a:srgbClr>
+          </a:solidFill>
+          <a:ln xmlns:a="http://schemas.openxmlformats.org/drawingml/2006/main" w="0">
+            <a:solidFill>
+              <a:srgbClr val="000000">
+                <a:alpha val="0"/>
+              </a:srgbClr>
+            </a:solidFill>
+            <a:prstDash val="solid"/>
+          </a:ln>
+        </p:spPr>
+        <p:txBody>
+          <a:bodyPr xmlns:a="http://schemas.openxmlformats.org/drawingml/2006/main" lIns="0" tIns="0" rIns="0" bIns="0" anchor="t"/>
+          <a:lstStyle xmlns:a="http://schemas.openxmlformats.org/drawingml/2006/main"/>
+          <a:p xmlns:a="http://schemas.openxmlformats.org/drawingml/2006/main">
+            <a:pPr algn="l">
+              <a:defRPr sz="750" b="1">
+                <a:solidFill>
+                  <a:srgbClr val="067647"/>
+                </a:solidFill>
+                <a:latin typeface="Aptos"/>
+                <a:ea typeface="Aptos"/>
+                <a:cs typeface="Aptos"/>
+              </a:defRPr>
+            </a:pPr>
+            <a:r>
+              <a:rPr sz="750" b="1">
+                <a:solidFill>
+                  <a:srgbClr val="067647"/>
+                </a:solidFill>
+                <a:latin typeface="Aptos"/>
+                <a:ea typeface="Aptos"/>
+                <a:cs typeface="Aptos"/>
+              </a:rPr>
+              <a:t>Time-ranged</a:t>
+            </a:r>
+          </a:p>
+        </p:txBody>
+      </p:sp>
+      <p:sp>
+        <p:nvSpPr>
+          <p:cNvPr id="24" name="">
+            <a:extLst xmlns:a="http://schemas.openxmlformats.org/drawingml/2006/main">
+              <a:ext uri="{FF2B5EF4-FFF2-40B4-BE49-F238E27FC236}">
+                <a16:creationId xmlns:a16="http://schemas.microsoft.com/office/drawing/2014/main" id="{B55124FD-7B35-4DA1-AC7C-3BDEC0890D0E}"/>
+              </a:ext>
+            </a:extLst>
+          </p:cNvPr>
+          <p:cNvSpPr>
+            <a:spLocks xmlns:a="http://schemas.openxmlformats.org/drawingml/2006/main" noGrp="1"/>
+          </p:cNvSpPr>
+          <p:nvPr/>
+        </p:nvSpPr>
+        <p:spPr>
+          <a:xfrm xmlns:a="http://schemas.openxmlformats.org/drawingml/2006/main">
+            <a:off x="4171950" y="5353050"/>
+            <a:ext cx="1695450" cy="285750"/>
+          </a:xfrm>
+          <a:prstGeom xmlns:a="http://schemas.openxmlformats.org/drawingml/2006/main" prst="rect">
+            <a:avLst/>
+          </a:prstGeom>
+          <a:solidFill xmlns:a="http://schemas.openxmlformats.org/drawingml/2006/main">
+            <a:srgbClr val="FFFAEB"/>
+          </a:solidFill>
+          <a:ln xmlns:a="http://schemas.openxmlformats.org/drawingml/2006/main" w="9525">
+            <a:solidFill>
+              <a:srgbClr val="B54708">
+                <a:alpha val="20000"/>
+              </a:srgbClr>
+            </a:solidFill>
+            <a:prstDash val="solid"/>
+          </a:ln>
+        </p:spPr>
+      </p:sp>
+      <p:sp>
+        <p:nvSpPr>
+          <p:cNvPr id="25" name="">
+            <a:extLst xmlns:a="http://schemas.openxmlformats.org/drawingml/2006/main">
+              <a:ext uri="{FF2B5EF4-FFF2-40B4-BE49-F238E27FC236}">
+                <a16:creationId xmlns:a16="http://schemas.microsoft.com/office/drawing/2014/main" id="{56368FFE-AC1B-43CB-9377-CF7650FC1FD4}"/>
+              </a:ext>
+            </a:extLst>
+          </p:cNvPr>
+          <p:cNvSpPr>
+            <a:spLocks xmlns:a="http://schemas.openxmlformats.org/drawingml/2006/main" noGrp="1"/>
+          </p:cNvSpPr>
+          <p:nvPr/>
+        </p:nvSpPr>
+        <p:spPr>
+          <a:xfrm xmlns:a="http://schemas.openxmlformats.org/drawingml/2006/main">
+            <a:off x="4286250" y="5467350"/>
+            <a:ext cx="57150" cy="57150"/>
+          </a:xfrm>
+          <a:prstGeom xmlns:a="http://schemas.openxmlformats.org/drawingml/2006/main" prst="ellipse">
+            <a:avLst/>
+          </a:prstGeom>
+          <a:solidFill xmlns:a="http://schemas.openxmlformats.org/drawingml/2006/main">
+            <a:srgbClr val="B54708"/>
+          </a:solidFill>
+          <a:ln xmlns:a="http://schemas.openxmlformats.org/drawingml/2006/main" w="0">
+            <a:solidFill>
+              <a:srgbClr val="000000">
+                <a:alpha val="0"/>
+              </a:srgbClr>
+            </a:solidFill>
+            <a:prstDash val="solid"/>
+          </a:ln>
+        </p:spPr>
+      </p:sp>
+      <p:sp>
+        <p:nvSpPr>
+          <p:cNvPr id="26" name="">
+            <a:extLst xmlns:a="http://schemas.openxmlformats.org/drawingml/2006/main">
+              <a:ext uri="{FF2B5EF4-FFF2-40B4-BE49-F238E27FC236}">
+                <a16:creationId xmlns:a16="http://schemas.microsoft.com/office/drawing/2014/main" id="{1054678A-4D48-44D7-830E-F7157EBF306C}"/>
+              </a:ext>
+            </a:extLst>
+          </p:cNvPr>
+          <p:cNvSpPr>
+            <a:spLocks xmlns:a="http://schemas.openxmlformats.org/drawingml/2006/main" noGrp="1"/>
+          </p:cNvSpPr>
+          <p:nvPr/>
+        </p:nvSpPr>
+        <p:spPr>
+          <a:xfrm xmlns:a="http://schemas.openxmlformats.org/drawingml/2006/main">
+            <a:off x="4419600" y="5419725"/>
+            <a:ext cx="1352550" cy="152400"/>
+          </a:xfrm>
+          <a:prstGeom xmlns:a="http://schemas.openxmlformats.org/drawingml/2006/main" prst="rect">
+            <a:avLst/>
+          </a:prstGeom>
+          <a:solidFill xmlns:a="http://schemas.openxmlformats.org/drawingml/2006/main">
+            <a:srgbClr val="000000">
+              <a:alpha val="0"/>
+            </a:srgbClr>
+          </a:solidFill>
+          <a:ln xmlns:a="http://schemas.openxmlformats.org/drawingml/2006/main" w="0">
+            <a:solidFill>
+              <a:srgbClr val="000000">
+                <a:alpha val="0"/>
+              </a:srgbClr>
+            </a:solidFill>
+            <a:prstDash val="solid"/>
+          </a:ln>
+        </p:spPr>
+        <p:txBody>
+          <a:bodyPr xmlns:a="http://schemas.openxmlformats.org/drawingml/2006/main" lIns="0" tIns="0" rIns="0" bIns="0" anchor="t"/>
+          <a:lstStyle xmlns:a="http://schemas.openxmlformats.org/drawingml/2006/main"/>
+          <a:p xmlns:a="http://schemas.openxmlformats.org/drawingml/2006/main">
+            <a:pPr algn="l">
+              <a:defRPr sz="750" b="1">
+                <a:solidFill>
+                  <a:srgbClr val="B54708"/>
+                </a:solidFill>
+                <a:latin typeface="Aptos"/>
+                <a:ea typeface="Aptos"/>
+                <a:cs typeface="Aptos"/>
+              </a:defRPr>
+            </a:pPr>
+            <a:r>
+              <a:rPr sz="750" b="1">
+                <a:solidFill>
+                  <a:srgbClr val="B54708"/>
+                </a:solidFill>
+                <a:latin typeface="Aptos"/>
+                <a:ea typeface="Aptos"/>
+                <a:cs typeface="Aptos"/>
+              </a:rPr>
+              <a:t>Audit-linked</a:t>
+            </a:r>
+          </a:p>
+        </p:txBody>
+      </p:sp>
+      <p:sp>
+        <p:nvSpPr>
+          <p:cNvPr id="27" name="">
+            <a:extLst xmlns:a="http://schemas.openxmlformats.org/drawingml/2006/main">
+              <a:ext uri="{FF2B5EF4-FFF2-40B4-BE49-F238E27FC236}">
+                <a16:creationId xmlns:a16="http://schemas.microsoft.com/office/drawing/2014/main" id="{E6E8E2B7-EEC4-44AD-B9BB-030B2042C582}"/>
+              </a:ext>
+            </a:extLst>
+          </p:cNvPr>
+          <p:cNvSpPr>
+            <a:spLocks xmlns:a="http://schemas.openxmlformats.org/drawingml/2006/main" noGrp="1"/>
+          </p:cNvSpPr>
+          <p:nvPr/>
+        </p:nvSpPr>
+        <p:spPr>
+          <a:xfrm xmlns:a="http://schemas.openxmlformats.org/drawingml/2006/main">
+            <a:off x="1066800" y="5810250"/>
+            <a:ext cx="8858250" cy="323850"/>
+          </a:xfrm>
+          <a:prstGeom xmlns:a="http://schemas.openxmlformats.org/drawingml/2006/main" prst="rect">
+            <a:avLst/>
+          </a:prstGeom>
+          <a:solidFill xmlns:a="http://schemas.openxmlformats.org/drawingml/2006/main">
+            <a:srgbClr val="000000">
+              <a:alpha val="0"/>
+            </a:srgbClr>
+          </a:solidFill>
+          <a:ln xmlns:a="http://schemas.openxmlformats.org/drawingml/2006/main" w="0">
+            <a:solidFill>
+              <a:srgbClr val="000000">
+                <a:alpha val="0"/>
+              </a:srgbClr>
+            </a:solidFill>
+            <a:prstDash val="solid"/>
+          </a:ln>
+        </p:spPr>
+        <p:txBody>
+          <a:bodyPr xmlns:a="http://schemas.openxmlformats.org/drawingml/2006/main" lIns="0" tIns="0" rIns="0" bIns="0" anchor="t"/>
+          <a:lstStyle xmlns:a="http://schemas.openxmlformats.org/drawingml/2006/main"/>
+          <a:p xmlns:a="http://schemas.openxmlformats.org/drawingml/2006/main">
+            <a:pPr algn="ctr">
+              <a:defRPr sz="1500" b="1">
+                <a:solidFill>
+                  <a:srgbClr val="08111F"/>
+                </a:solidFill>
+                <a:latin typeface="Aptos"/>
+                <a:ea typeface="Aptos"/>
+                <a:cs typeface="Aptos"/>
+              </a:defRPr>
+            </a:pPr>
+            <a:r>
+              <a:rPr sz="1500" b="1">
+                <a:solidFill>
+                  <a:srgbClr val="08111F"/>
+                </a:solidFill>
+                <a:latin typeface="Aptos"/>
+                <a:ea typeface="Aptos"/>
+                <a:cs typeface="Aptos"/>
+              </a:rPr>
+              <a:t>Reports come straight from operational records. No separate data preparation or manual extracts.</a:t>
+            </a:r>
+          </a:p>
+        </p:txBody>
+      </p:sp>
+      <p:sp>
+        <p:nvSpPr>
+          <p:cNvPr id="28" name="">
+            <a:extLst xmlns:a="http://schemas.openxmlformats.org/drawingml/2006/main">
+              <a:ext uri="{FF2B5EF4-FFF2-40B4-BE49-F238E27FC236}">
+                <a16:creationId xmlns:a16="http://schemas.microsoft.com/office/drawing/2014/main" id="{91DA49B9-B816-4579-9CB8-B1BC6D82F6C0}"/>
+              </a:ext>
+            </a:extLst>
+          </p:cNvPr>
+          <p:cNvSpPr>
+            <a:spLocks xmlns:a="http://schemas.openxmlformats.org/drawingml/2006/main" noGrp="1"/>
+          </p:cNvSpPr>
+          <p:nvPr/>
+        </p:nvSpPr>
+        <p:spPr>
+          <a:xfrm xmlns:a="http://schemas.openxmlformats.org/drawingml/2006/main">
+            <a:off x="609600" y="6400800"/>
+            <a:ext cx="9829800" cy="9525"/>
+          </a:xfrm>
+          <a:prstGeom xmlns:a="http://schemas.openxmlformats.org/drawingml/2006/main" prst="rect">
+            <a:avLst/>
+          </a:prstGeom>
+          <a:solidFill xmlns:a="http://schemas.openxmlformats.org/drawingml/2006/main">
+            <a:srgbClr val="EAECF0"/>
+          </a:solidFill>
+          <a:ln xmlns:a="http://schemas.openxmlformats.org/drawingml/2006/main" w="0">
+            <a:solidFill>
+              <a:srgbClr val="000000">
+                <a:alpha val="0"/>
+              </a:srgbClr>
+            </a:solidFill>
+            <a:prstDash val="solid"/>
+          </a:ln>
+        </p:spPr>
+      </p:sp>
+      <p:sp>
+        <p:nvSpPr>
+          <p:cNvPr id="29" name="">
+            <a:extLst xmlns:a="http://schemas.openxmlformats.org/drawingml/2006/main">
+              <a:ext uri="{FF2B5EF4-FFF2-40B4-BE49-F238E27FC236}">
+                <a16:creationId xmlns:a16="http://schemas.microsoft.com/office/drawing/2014/main" id="{4D8E0AE9-E6A7-4E3E-8D9E-5F830B3A4985}"/>
+              </a:ext>
+            </a:extLst>
+          </p:cNvPr>
+          <p:cNvSpPr>
+            <a:spLocks xmlns:a="http://schemas.openxmlformats.org/drawingml/2006/main" noGrp="1"/>
+          </p:cNvSpPr>
+          <p:nvPr/>
+        </p:nvSpPr>
+        <p:spPr>
+          <a:xfrm xmlns:a="http://schemas.openxmlformats.org/drawingml/2006/main">
+            <a:off x="609600" y="6515100"/>
+            <a:ext cx="6858000" cy="171450"/>
+          </a:xfrm>
+          <a:prstGeom xmlns:a="http://schemas.openxmlformats.org/drawingml/2006/main" prst="rect">
+            <a:avLst/>
+          </a:prstGeom>
+          <a:solidFill xmlns:a="http://schemas.openxmlformats.org/drawingml/2006/main">
+            <a:srgbClr val="000000">
+              <a:alpha val="0"/>
+            </a:srgbClr>
+          </a:solidFill>
+          <a:ln xmlns:a="http://schemas.openxmlformats.org/drawingml/2006/main" w="0">
+            <a:solidFill>
+              <a:srgbClr val="000000">
+                <a:alpha val="0"/>
+              </a:srgbClr>
+            </a:solidFill>
+            <a:prstDash val="solid"/>
+          </a:ln>
+        </p:spPr>
+        <p:txBody>
+          <a:bodyPr xmlns:a="http://schemas.openxmlformats.org/drawingml/2006/main" lIns="0" tIns="0" rIns="0" bIns="0" anchor="t"/>
+          <a:lstStyle xmlns:a="http://schemas.openxmlformats.org/drawingml/2006/main"/>
+          <a:p xmlns:a="http://schemas.openxmlformats.org/drawingml/2006/main">
+            <a:pPr algn="l">
+              <a:defRPr sz="750" b="0">
+                <a:solidFill>
+                  <a:srgbClr val="667085"/>
+                </a:solidFill>
+                <a:latin typeface="Aptos"/>
+                <a:ea typeface="Aptos"/>
+                <a:cs typeface="Aptos"/>
+              </a:defRPr>
+            </a:pPr>
+            <a:r>
+              <a:rPr sz="750" b="0">
+                <a:solidFill>
+                  <a:srgbClr val="667085"/>
+                </a:solidFill>
+                <a:latin typeface="Aptos"/>
+                <a:ea typeface="Aptos"/>
+                <a:cs typeface="Aptos"/>
+              </a:rPr>
+              <a:t>CloudSpace Technologies / INSWITCH CIO-ED briefing</a:t>
+            </a:r>
+          </a:p>
+        </p:txBody>
+      </p:sp>
+      <p:sp>
+        <p:nvSpPr>
+          <p:cNvPr id="30" name="">
+            <a:extLst xmlns:a="http://schemas.openxmlformats.org/drawingml/2006/main">
+              <a:ext uri="{FF2B5EF4-FFF2-40B4-BE49-F238E27FC236}">
+                <a16:creationId xmlns:a16="http://schemas.microsoft.com/office/drawing/2014/main" id="{8F60D180-8FBB-4D20-96A4-D78DA9644F9D}"/>
+              </a:ext>
+            </a:extLst>
+          </p:cNvPr>
+          <p:cNvSpPr>
+            <a:spLocks xmlns:a="http://schemas.openxmlformats.org/drawingml/2006/main" noGrp="1"/>
+          </p:cNvSpPr>
+          <p:nvPr/>
+        </p:nvSpPr>
+        <p:spPr>
+          <a:xfrm xmlns:a="http://schemas.openxmlformats.org/drawingml/2006/main">
+            <a:off x="10839450" y="6515100"/>
+            <a:ext cx="666750" cy="171450"/>
+          </a:xfrm>
+          <a:prstGeom xmlns:a="http://schemas.openxmlformats.org/drawingml/2006/main" prst="rect">
+            <a:avLst/>
+          </a:prstGeom>
+          <a:solidFill xmlns:a="http://schemas.openxmlformats.org/drawingml/2006/main">
+            <a:srgbClr val="000000">
+              <a:alpha val="0"/>
+            </a:srgbClr>
+          </a:solidFill>
+          <a:ln xmlns:a="http://schemas.openxmlformats.org/drawingml/2006/main" w="0">
+            <a:solidFill>
+              <a:srgbClr val="000000">
+                <a:alpha val="0"/>
+              </a:srgbClr>
+            </a:solidFill>
+            <a:prstDash val="solid"/>
+          </a:ln>
+        </p:spPr>
+        <p:txBody>
+          <a:bodyPr xmlns:a="http://schemas.openxmlformats.org/drawingml/2006/main" lIns="0" tIns="0" rIns="0" bIns="0" anchor="t"/>
+          <a:lstStyle xmlns:a="http://schemas.openxmlformats.org/drawingml/2006/main"/>
+          <a:p xmlns:a="http://schemas.openxmlformats.org/drawingml/2006/main">
+            <a:pPr algn="r">
+              <a:defRPr sz="900" b="0">
+                <a:solidFill>
+                  <a:srgbClr val="667085"/>
+                </a:solidFill>
+                <a:latin typeface="Aptos"/>
+                <a:ea typeface="Aptos"/>
+                <a:cs typeface="Aptos"/>
+              </a:defRPr>
+            </a:pPr>
+            <a:r>
+              <a:rPr sz="900" b="0">
+                <a:solidFill>
+                  <a:srgbClr val="667085"/>
+                </a:solidFill>
+                <a:latin typeface="Aptos"/>
+                <a:ea typeface="Aptos"/>
+                <a:cs typeface="Aptos"/>
+              </a:rPr>
+              <a:t>14</a:t>
+            </a:r>
+          </a:p>
+        </p:txBody>
+      </p:sp>
+    </p:spTree>
+    <p:extLst>
+      <p:ext uri="{BB962C8B-B14F-4D97-AF65-F5344CB8AC3E}">
+        <p14:creationId xmlns:p14="http://schemas.microsoft.com/office/powerpoint/2010/main" val="736182244"/>
+      </p:ext>
+    </p:extLst>
+  </p:cSld>
+</p:sld>
+</file>
+
+<file path=ppt/slides/slide23.xml><?xml version="1.0" encoding="utf-8"?>
+<p:sld xmlns:p="http://schemas.openxmlformats.org/presentationml/2006/main">
+  <p:cSld>
+    <p:spTree>
+      <p:nvGrpSpPr>
+        <p:cNvPr id="1" name=""/>
+        <p:cNvGrpSpPr/>
+        <p:nvPr/>
+      </p:nvGrpSpPr>
+      <p:grpSpPr>
+        <a:xfrm xmlns:a="http://schemas.openxmlformats.org/drawingml/2006/main"/>
+      </p:grpSpPr>
+      <p:sp>
+        <p:nvSpPr>
+          <p:cNvPr id="1" name="">
+            <a:extLst xmlns:a="http://schemas.openxmlformats.org/drawingml/2006/main">
+              <a:ext uri="{FF2B5EF4-FFF2-40B4-BE49-F238E27FC236}">
+                <a16:creationId xmlns:a16="http://schemas.microsoft.com/office/drawing/2014/main" id="{207F38BF-3DCB-4D2B-9D00-FF5F314AD47E}"/>
+              </a:ext>
+            </a:extLst>
+          </p:cNvPr>
+          <p:cNvSpPr>
+            <a:spLocks xmlns:a="http://schemas.openxmlformats.org/drawingml/2006/main" noGrp="1"/>
+          </p:cNvSpPr>
+          <p:nvPr/>
+        </p:nvSpPr>
+        <p:spPr>
+          <a:xfrm xmlns:a="http://schemas.openxmlformats.org/drawingml/2006/main">
+            <a:off x="0" y="0"/>
+            <a:ext cx="12192000" cy="6858000"/>
+          </a:xfrm>
+          <a:prstGeom xmlns:a="http://schemas.openxmlformats.org/drawingml/2006/main" prst="rect">
+            <a:avLst/>
+          </a:prstGeom>
+          <a:solidFill xmlns:a="http://schemas.openxmlformats.org/drawingml/2006/main">
+            <a:srgbClr val="F5F7FA"/>
+          </a:solidFill>
+          <a:ln xmlns:a="http://schemas.openxmlformats.org/drawingml/2006/main" w="0">
+            <a:solidFill>
+              <a:srgbClr val="000000">
+                <a:alpha val="0"/>
+              </a:srgbClr>
+            </a:solidFill>
+            <a:prstDash val="solid"/>
+          </a:ln>
+        </p:spPr>
+      </p:sp>
+      <p:sp>
+        <p:nvSpPr>
+          <p:cNvPr id="2" name="">
+            <a:extLst xmlns:a="http://schemas.openxmlformats.org/drawingml/2006/main">
+              <a:ext uri="{FF2B5EF4-FFF2-40B4-BE49-F238E27FC236}">
+                <a16:creationId xmlns:a16="http://schemas.microsoft.com/office/drawing/2014/main" id="{38C4C554-0025-4453-9E98-DCA4F50E384D}"/>
+              </a:ext>
+            </a:extLst>
+          </p:cNvPr>
+          <p:cNvSpPr>
+            <a:spLocks xmlns:a="http://schemas.openxmlformats.org/drawingml/2006/main" noGrp="1"/>
+          </p:cNvSpPr>
+          <p:nvPr/>
+        </p:nvSpPr>
+        <p:spPr>
+          <a:xfrm xmlns:a="http://schemas.openxmlformats.org/drawingml/2006/main">
+            <a:off x="609600" y="552450"/>
+            <a:ext cx="66675" cy="66675"/>
+          </a:xfrm>
+          <a:prstGeom xmlns:a="http://schemas.openxmlformats.org/drawingml/2006/main" prst="ellipse">
+            <a:avLst/>
+          </a:prstGeom>
+          <a:solidFill xmlns:a="http://schemas.openxmlformats.org/drawingml/2006/main">
+            <a:srgbClr val="0756D9"/>
+          </a:solidFill>
+          <a:ln xmlns:a="http://schemas.openxmlformats.org/drawingml/2006/main" w="0">
+            <a:solidFill>
+              <a:srgbClr val="000000">
+                <a:alpha val="0"/>
+              </a:srgbClr>
+            </a:solidFill>
+            <a:prstDash val="solid"/>
+          </a:ln>
+        </p:spPr>
+      </p:sp>
+      <p:sp>
+        <p:nvSpPr>
+          <p:cNvPr id="3" name="">
+            <a:extLst xmlns:a="http://schemas.openxmlformats.org/drawingml/2006/main">
+              <a:ext uri="{FF2B5EF4-FFF2-40B4-BE49-F238E27FC236}">
+                <a16:creationId xmlns:a16="http://schemas.microsoft.com/office/drawing/2014/main" id="{7A7CAEE9-EE84-4342-BFD1-E14F1BC0A380}"/>
+              </a:ext>
+            </a:extLst>
+          </p:cNvPr>
+          <p:cNvSpPr>
+            <a:spLocks xmlns:a="http://schemas.openxmlformats.org/drawingml/2006/main" noGrp="1"/>
+          </p:cNvSpPr>
+          <p:nvPr/>
+        </p:nvSpPr>
+        <p:spPr>
+          <a:xfrm xmlns:a="http://schemas.openxmlformats.org/drawingml/2006/main">
+            <a:off x="771525" y="495300"/>
+            <a:ext cx="4953000" cy="190500"/>
+          </a:xfrm>
+          <a:prstGeom xmlns:a="http://schemas.openxmlformats.org/drawingml/2006/main" prst="rect">
+            <a:avLst/>
+          </a:prstGeom>
+          <a:solidFill xmlns:a="http://schemas.openxmlformats.org/drawingml/2006/main">
+            <a:srgbClr val="000000">
+              <a:alpha val="0"/>
+            </a:srgbClr>
+          </a:solidFill>
+          <a:ln xmlns:a="http://schemas.openxmlformats.org/drawingml/2006/main" w="0">
+            <a:solidFill>
+              <a:srgbClr val="000000">
+                <a:alpha val="0"/>
+              </a:srgbClr>
+            </a:solidFill>
+            <a:prstDash val="solid"/>
+          </a:ln>
+        </p:spPr>
+        <p:txBody>
+          <a:bodyPr xmlns:a="http://schemas.openxmlformats.org/drawingml/2006/main" lIns="0" tIns="0" rIns="0" bIns="0" anchor="t"/>
+          <a:lstStyle xmlns:a="http://schemas.openxmlformats.org/drawingml/2006/main"/>
+          <a:p xmlns:a="http://schemas.openxmlformats.org/drawingml/2006/main">
+            <a:pPr algn="l">
+              <a:defRPr sz="825" b="1">
+                <a:solidFill>
+                  <a:srgbClr val="0756D9"/>
+                </a:solidFill>
+                <a:latin typeface="Aptos"/>
+                <a:ea typeface="Aptos"/>
+                <a:cs typeface="Aptos"/>
+              </a:defRPr>
+            </a:pPr>
+            <a:r>
+              <a:rPr sz="825" b="1">
+                <a:solidFill>
+                  <a:srgbClr val="0756D9"/>
+                </a:solidFill>
+                <a:latin typeface="Aptos"/>
+                <a:ea typeface="Aptos"/>
+                <a:cs typeface="Aptos"/>
+              </a:rPr>
+              <a:t>SECURITY AND RESILIENCE</a:t>
+            </a:r>
+          </a:p>
+        </p:txBody>
+      </p:sp>
+      <p:sp>
+        <p:nvSpPr>
+          <p:cNvPr id="4" name="">
+            <a:extLst xmlns:a="http://schemas.openxmlformats.org/drawingml/2006/main">
+              <a:ext uri="{FF2B5EF4-FFF2-40B4-BE49-F238E27FC236}">
+                <a16:creationId xmlns:a16="http://schemas.microsoft.com/office/drawing/2014/main" id="{1162DE1A-048D-46BA-A33A-ADD03C69520C}"/>
+              </a:ext>
+            </a:extLst>
+          </p:cNvPr>
+          <p:cNvSpPr>
+            <a:spLocks xmlns:a="http://schemas.openxmlformats.org/drawingml/2006/main" noGrp="1"/>
+          </p:cNvSpPr>
+          <p:nvPr/>
+        </p:nvSpPr>
+        <p:spPr>
+          <a:xfrm xmlns:a="http://schemas.openxmlformats.org/drawingml/2006/main">
+            <a:off x="609600" y="800100"/>
+            <a:ext cx="8572500" cy="1104900"/>
+          </a:xfrm>
+          <a:prstGeom xmlns:a="http://schemas.openxmlformats.org/drawingml/2006/main" prst="rect">
+            <a:avLst/>
+          </a:prstGeom>
+          <a:solidFill xmlns:a="http://schemas.openxmlformats.org/drawingml/2006/main">
+            <a:srgbClr val="000000">
+              <a:alpha val="0"/>
+            </a:srgbClr>
+          </a:solidFill>
+          <a:ln xmlns:a="http://schemas.openxmlformats.org/drawingml/2006/main" w="0">
+            <a:solidFill>
+              <a:srgbClr val="000000">
+                <a:alpha val="0"/>
+              </a:srgbClr>
+            </a:solidFill>
+            <a:prstDash val="solid"/>
+          </a:ln>
+        </p:spPr>
+        <p:txBody>
+          <a:bodyPr xmlns:a="http://schemas.openxmlformats.org/drawingml/2006/main" lIns="0" tIns="0" rIns="0" bIns="0" anchor="t"/>
+          <a:lstStyle xmlns:a="http://schemas.openxmlformats.org/drawingml/2006/main"/>
+          <a:p xmlns:a="http://schemas.openxmlformats.org/drawingml/2006/main">
+            <a:pPr algn="l">
+              <a:defRPr sz="2850" b="1">
+                <a:solidFill>
+                  <a:srgbClr val="08111F"/>
+                </a:solidFill>
+                <a:latin typeface="Aptos Display"/>
+                <a:ea typeface="Aptos Display"/>
+                <a:cs typeface="Aptos Display"/>
+              </a:defRPr>
+            </a:pPr>
+            <a:r>
+              <a:rPr sz="2850" b="1">
+                <a:solidFill>
+                  <a:srgbClr val="08111F"/>
+                </a:solidFill>
+                <a:latin typeface="Aptos Display"/>
+                <a:ea typeface="Aptos Display"/>
+                <a:cs typeface="Aptos Display"/>
+              </a:rPr>
+              <a:t>The platform meets the RFP security and non-functional targets.</a:t>
+            </a:r>
+          </a:p>
+        </p:txBody>
+      </p:sp>
+      <p:sp>
+        <p:nvSpPr>
+          <p:cNvPr id="5" name="">
+            <a:extLst xmlns:a="http://schemas.openxmlformats.org/drawingml/2006/main">
+              <a:ext uri="{FF2B5EF4-FFF2-40B4-BE49-F238E27FC236}">
+                <a16:creationId xmlns:a16="http://schemas.microsoft.com/office/drawing/2014/main" id="{437EAFCE-56BB-4208-ABA8-BA45FB474C11}"/>
+              </a:ext>
+            </a:extLst>
+          </p:cNvPr>
+          <p:cNvSpPr>
+            <a:spLocks xmlns:a="http://schemas.openxmlformats.org/drawingml/2006/main" noGrp="1"/>
+          </p:cNvSpPr>
+          <p:nvPr/>
+        </p:nvSpPr>
+        <p:spPr>
+          <a:xfrm xmlns:a="http://schemas.openxmlformats.org/drawingml/2006/main">
+            <a:off x="609600" y="2019300"/>
+            <a:ext cx="8572500" cy="647700"/>
+          </a:xfrm>
+          <a:prstGeom xmlns:a="http://schemas.openxmlformats.org/drawingml/2006/main" prst="rect">
+            <a:avLst/>
+          </a:prstGeom>
+          <a:solidFill xmlns:a="http://schemas.openxmlformats.org/drawingml/2006/main">
+            <a:srgbClr val="000000">
+              <a:alpha val="0"/>
+            </a:srgbClr>
+          </a:solidFill>
+          <a:ln xmlns:a="http://schemas.openxmlformats.org/drawingml/2006/main" w="0">
+            <a:solidFill>
+              <a:srgbClr val="000000">
+                <a:alpha val="0"/>
+              </a:srgbClr>
+            </a:solidFill>
+            <a:prstDash val="solid"/>
+          </a:ln>
+        </p:spPr>
+        <p:txBody>
+          <a:bodyPr xmlns:a="http://schemas.openxmlformats.org/drawingml/2006/main" lIns="0" tIns="0" rIns="0" bIns="0" anchor="t"/>
+          <a:lstStyle xmlns:a="http://schemas.openxmlformats.org/drawingml/2006/main"/>
+          <a:p xmlns:a="http://schemas.openxmlformats.org/drawingml/2006/main">
+            <a:pPr algn="l">
+              <a:defRPr sz="1275" b="0">
+                <a:solidFill>
+                  <a:srgbClr val="344054"/>
+                </a:solidFill>
+                <a:latin typeface="Aptos"/>
+                <a:ea typeface="Aptos"/>
+                <a:cs typeface="Aptos"/>
+              </a:defRPr>
+            </a:pPr>
+            <a:r>
+              <a:rPr sz="1275" b="0">
+                <a:solidFill>
+                  <a:srgbClr val="344054"/>
+                </a:solidFill>
+                <a:latin typeface="Aptos"/>
+                <a:ea typeface="Aptos"/>
+                <a:cs typeface="Aptos"/>
+              </a:rPr>
+              <a:t>Authentication, authorization, data protection, audit, and resilience map directly to RFP sections 6 and 7.</a:t>
+            </a:r>
+          </a:p>
+        </p:txBody>
+      </p:sp>
+      <p:sp>
+        <p:nvSpPr>
+          <p:cNvPr id="6" name="">
+            <a:extLst xmlns:a="http://schemas.openxmlformats.org/drawingml/2006/main">
+              <a:ext uri="{FF2B5EF4-FFF2-40B4-BE49-F238E27FC236}">
+                <a16:creationId xmlns:a16="http://schemas.microsoft.com/office/drawing/2014/main" id="{D4FAE773-6884-49FB-9237-F224C8B760E2}"/>
+              </a:ext>
+            </a:extLst>
+          </p:cNvPr>
+          <p:cNvSpPr>
+            <a:spLocks xmlns:a="http://schemas.openxmlformats.org/drawingml/2006/main" noGrp="1"/>
+          </p:cNvSpPr>
+          <p:nvPr/>
+        </p:nvSpPr>
+        <p:spPr>
+          <a:xfrm xmlns:a="http://schemas.openxmlformats.org/drawingml/2006/main">
+            <a:off x="723900" y="2990850"/>
+            <a:ext cx="3143250" cy="914400"/>
+          </a:xfrm>
+          <a:prstGeom xmlns:a="http://schemas.openxmlformats.org/drawingml/2006/main" prst="rect">
+            <a:avLst/>
+          </a:prstGeom>
+          <a:solidFill xmlns:a="http://schemas.openxmlformats.org/drawingml/2006/main">
+            <a:srgbClr val="FFFFFF"/>
+          </a:solidFill>
+          <a:ln xmlns:a="http://schemas.openxmlformats.org/drawingml/2006/main" w="9525">
+            <a:solidFill>
+              <a:srgbClr val="EAECF0"/>
+            </a:solidFill>
+            <a:prstDash val="solid"/>
+          </a:ln>
+        </p:spPr>
+      </p:sp>
+      <p:sp>
+        <p:nvSpPr>
+          <p:cNvPr id="7" name="">
+            <a:extLst xmlns:a="http://schemas.openxmlformats.org/drawingml/2006/main">
+              <a:ext uri="{FF2B5EF4-FFF2-40B4-BE49-F238E27FC236}">
+                <a16:creationId xmlns:a16="http://schemas.microsoft.com/office/drawing/2014/main" id="{B6E08B61-46D9-4075-85B3-AC19E6DE898C}"/>
+              </a:ext>
+            </a:extLst>
+          </p:cNvPr>
+          <p:cNvSpPr>
+            <a:spLocks xmlns:a="http://schemas.openxmlformats.org/drawingml/2006/main" noGrp="1"/>
+          </p:cNvSpPr>
+          <p:nvPr/>
+        </p:nvSpPr>
+        <p:spPr>
+          <a:xfrm xmlns:a="http://schemas.openxmlformats.org/drawingml/2006/main">
+            <a:off x="914400" y="3162300"/>
+            <a:ext cx="2571750" cy="209550"/>
+          </a:xfrm>
+          <a:prstGeom xmlns:a="http://schemas.openxmlformats.org/drawingml/2006/main" prst="rect">
+            <a:avLst/>
+          </a:prstGeom>
+          <a:solidFill xmlns:a="http://schemas.openxmlformats.org/drawingml/2006/main">
+            <a:srgbClr val="000000">
+              <a:alpha val="0"/>
+            </a:srgbClr>
+          </a:solidFill>
+          <a:ln xmlns:a="http://schemas.openxmlformats.org/drawingml/2006/main" w="0">
+            <a:solidFill>
+              <a:srgbClr val="000000">
+                <a:alpha val="0"/>
+              </a:srgbClr>
+            </a:solidFill>
+            <a:prstDash val="solid"/>
+          </a:ln>
+        </p:spPr>
+        <p:txBody>
+          <a:bodyPr xmlns:a="http://schemas.openxmlformats.org/drawingml/2006/main" lIns="0" tIns="0" rIns="0" bIns="0" anchor="t"/>
+          <a:lstStyle xmlns:a="http://schemas.openxmlformats.org/drawingml/2006/main"/>
+          <a:p xmlns:a="http://schemas.openxmlformats.org/drawingml/2006/main">
+            <a:pPr algn="l">
+              <a:defRPr sz="1275" b="1">
+                <a:solidFill>
+                  <a:srgbClr val="08111F"/>
+                </a:solidFill>
+                <a:latin typeface="Aptos"/>
+                <a:ea typeface="Aptos"/>
+                <a:cs typeface="Aptos"/>
+              </a:defRPr>
+            </a:pPr>
+            <a:r>
+              <a:rPr sz="1275" b="1">
+                <a:solidFill>
+                  <a:srgbClr val="08111F"/>
+                </a:solidFill>
+                <a:latin typeface="Aptos"/>
+                <a:ea typeface="Aptos"/>
+                <a:cs typeface="Aptos"/>
+              </a:rPr>
+              <a:t>Authentication</a:t>
+            </a:r>
+          </a:p>
+        </p:txBody>
+      </p:sp>
+      <p:sp>
+        <p:nvSpPr>
+          <p:cNvPr id="8" name="">
+            <a:extLst xmlns:a="http://schemas.openxmlformats.org/drawingml/2006/main">
+              <a:ext uri="{FF2B5EF4-FFF2-40B4-BE49-F238E27FC236}">
+                <a16:creationId xmlns:a16="http://schemas.microsoft.com/office/drawing/2014/main" id="{336723C6-0EBF-4879-B5A6-D3F01C2C484F}"/>
+              </a:ext>
+            </a:extLst>
+          </p:cNvPr>
+          <p:cNvSpPr>
+            <a:spLocks xmlns:a="http://schemas.openxmlformats.org/drawingml/2006/main" noGrp="1"/>
+          </p:cNvSpPr>
+          <p:nvPr/>
+        </p:nvSpPr>
+        <p:spPr>
+          <a:xfrm xmlns:a="http://schemas.openxmlformats.org/drawingml/2006/main">
+            <a:off x="914400" y="3448050"/>
+            <a:ext cx="2647950" cy="323850"/>
+          </a:xfrm>
+          <a:prstGeom xmlns:a="http://schemas.openxmlformats.org/drawingml/2006/main" prst="rect">
+            <a:avLst/>
+          </a:prstGeom>
+          <a:solidFill xmlns:a="http://schemas.openxmlformats.org/drawingml/2006/main">
+            <a:srgbClr val="000000">
+              <a:alpha val="0"/>
+            </a:srgbClr>
+          </a:solidFill>
+          <a:ln xmlns:a="http://schemas.openxmlformats.org/drawingml/2006/main" w="0">
+            <a:solidFill>
+              <a:srgbClr val="000000">
+                <a:alpha val="0"/>
+              </a:srgbClr>
+            </a:solidFill>
+            <a:prstDash val="solid"/>
+          </a:ln>
+        </p:spPr>
+        <p:txBody>
+          <a:bodyPr xmlns:a="http://schemas.openxmlformats.org/drawingml/2006/main" lIns="0" tIns="0" rIns="0" bIns="0" anchor="t"/>
+          <a:lstStyle xmlns:a="http://schemas.openxmlformats.org/drawingml/2006/main"/>
+          <a:p xmlns:a="http://schemas.openxmlformats.org/drawingml/2006/main">
+            <a:pPr algn="l">
+              <a:defRPr sz="863" b="0">
+                <a:solidFill>
+                  <a:srgbClr val="344054"/>
+                </a:solidFill>
+                <a:latin typeface="Aptos"/>
+                <a:ea typeface="Aptos"/>
+                <a:cs typeface="Aptos"/>
+              </a:defRPr>
+            </a:pPr>
+            <a:r>
+              <a:rPr sz="863" b="0">
+                <a:solidFill>
+                  <a:srgbClr val="344054"/>
+                </a:solidFill>
+                <a:latin typeface="Aptos"/>
+                <a:ea typeface="Aptos"/>
+                <a:cs typeface="Aptos"/>
+              </a:rPr>
+              <a:t>Active Directory and LDAP integration with multi-factor authentication.</a:t>
+            </a:r>
+          </a:p>
+        </p:txBody>
+      </p:sp>
+      <p:sp>
+        <p:nvSpPr>
+          <p:cNvPr id="9" name="">
+            <a:extLst xmlns:a="http://schemas.openxmlformats.org/drawingml/2006/main">
+              <a:ext uri="{FF2B5EF4-FFF2-40B4-BE49-F238E27FC236}">
+                <a16:creationId xmlns:a16="http://schemas.microsoft.com/office/drawing/2014/main" id="{767BDB8A-5FD1-42CA-9310-6027296E365B}"/>
+              </a:ext>
+            </a:extLst>
+          </p:cNvPr>
+          <p:cNvSpPr>
+            <a:spLocks xmlns:a="http://schemas.openxmlformats.org/drawingml/2006/main" noGrp="1"/>
+          </p:cNvSpPr>
+          <p:nvPr/>
+        </p:nvSpPr>
+        <p:spPr>
+          <a:xfrm xmlns:a="http://schemas.openxmlformats.org/drawingml/2006/main">
+            <a:off x="4152900" y="2990850"/>
+            <a:ext cx="3143250" cy="914400"/>
+          </a:xfrm>
+          <a:prstGeom xmlns:a="http://schemas.openxmlformats.org/drawingml/2006/main" prst="rect">
+            <a:avLst/>
+          </a:prstGeom>
+          <a:solidFill xmlns:a="http://schemas.openxmlformats.org/drawingml/2006/main">
+            <a:srgbClr val="FFFFFF"/>
+          </a:solidFill>
+          <a:ln xmlns:a="http://schemas.openxmlformats.org/drawingml/2006/main" w="9525">
+            <a:solidFill>
+              <a:srgbClr val="EAECF0"/>
+            </a:solidFill>
+            <a:prstDash val="solid"/>
+          </a:ln>
+        </p:spPr>
+      </p:sp>
+      <p:sp>
+        <p:nvSpPr>
+          <p:cNvPr id="10" name="">
+            <a:extLst xmlns:a="http://schemas.openxmlformats.org/drawingml/2006/main">
+              <a:ext uri="{FF2B5EF4-FFF2-40B4-BE49-F238E27FC236}">
+                <a16:creationId xmlns:a16="http://schemas.microsoft.com/office/drawing/2014/main" id="{7FD117D6-AC24-4B2D-B36A-96E0BCDB38A5}"/>
+              </a:ext>
+            </a:extLst>
+          </p:cNvPr>
+          <p:cNvSpPr>
+            <a:spLocks xmlns:a="http://schemas.openxmlformats.org/drawingml/2006/main" noGrp="1"/>
+          </p:cNvSpPr>
+          <p:nvPr/>
+        </p:nvSpPr>
+        <p:spPr>
+          <a:xfrm xmlns:a="http://schemas.openxmlformats.org/drawingml/2006/main">
+            <a:off x="4343400" y="3162300"/>
+            <a:ext cx="2571750" cy="209550"/>
+          </a:xfrm>
+          <a:prstGeom xmlns:a="http://schemas.openxmlformats.org/drawingml/2006/main" prst="rect">
+            <a:avLst/>
+          </a:prstGeom>
+          <a:solidFill xmlns:a="http://schemas.openxmlformats.org/drawingml/2006/main">
+            <a:srgbClr val="000000">
+              <a:alpha val="0"/>
+            </a:srgbClr>
+          </a:solidFill>
+          <a:ln xmlns:a="http://schemas.openxmlformats.org/drawingml/2006/main" w="0">
+            <a:solidFill>
+              <a:srgbClr val="000000">
+                <a:alpha val="0"/>
+              </a:srgbClr>
+            </a:solidFill>
+            <a:prstDash val="solid"/>
+          </a:ln>
+        </p:spPr>
+        <p:txBody>
+          <a:bodyPr xmlns:a="http://schemas.openxmlformats.org/drawingml/2006/main" lIns="0" tIns="0" rIns="0" bIns="0" anchor="t"/>
+          <a:lstStyle xmlns:a="http://schemas.openxmlformats.org/drawingml/2006/main"/>
+          <a:p xmlns:a="http://schemas.openxmlformats.org/drawingml/2006/main">
+            <a:pPr algn="l">
+              <a:defRPr sz="1275" b="1">
+                <a:solidFill>
+                  <a:srgbClr val="08111F"/>
+                </a:solidFill>
+                <a:latin typeface="Aptos"/>
+                <a:ea typeface="Aptos"/>
+                <a:cs typeface="Aptos"/>
+              </a:defRPr>
+            </a:pPr>
+            <a:r>
+              <a:rPr sz="1275" b="1">
+                <a:solidFill>
+                  <a:srgbClr val="08111F"/>
+                </a:solidFill>
+                <a:latin typeface="Aptos"/>
+                <a:ea typeface="Aptos"/>
+                <a:cs typeface="Aptos"/>
+              </a:rPr>
+              <a:t>Authorization</a:t>
+            </a:r>
+          </a:p>
+        </p:txBody>
+      </p:sp>
+      <p:sp>
+        <p:nvSpPr>
+          <p:cNvPr id="11" name="">
+            <a:extLst xmlns:a="http://schemas.openxmlformats.org/drawingml/2006/main">
+              <a:ext uri="{FF2B5EF4-FFF2-40B4-BE49-F238E27FC236}">
+                <a16:creationId xmlns:a16="http://schemas.microsoft.com/office/drawing/2014/main" id="{00FC1A7A-2A06-4506-BBDA-CCC6CBE5F4D4}"/>
+              </a:ext>
+            </a:extLst>
+          </p:cNvPr>
+          <p:cNvSpPr>
+            <a:spLocks xmlns:a="http://schemas.openxmlformats.org/drawingml/2006/main" noGrp="1"/>
+          </p:cNvSpPr>
+          <p:nvPr/>
+        </p:nvSpPr>
+        <p:spPr>
+          <a:xfrm xmlns:a="http://schemas.openxmlformats.org/drawingml/2006/main">
+            <a:off x="4343400" y="3448050"/>
+            <a:ext cx="2647950" cy="323850"/>
+          </a:xfrm>
+          <a:prstGeom xmlns:a="http://schemas.openxmlformats.org/drawingml/2006/main" prst="rect">
+            <a:avLst/>
+          </a:prstGeom>
+          <a:solidFill xmlns:a="http://schemas.openxmlformats.org/drawingml/2006/main">
+            <a:srgbClr val="000000">
+              <a:alpha val="0"/>
+            </a:srgbClr>
+          </a:solidFill>
+          <a:ln xmlns:a="http://schemas.openxmlformats.org/drawingml/2006/main" w="0">
+            <a:solidFill>
+              <a:srgbClr val="000000">
+                <a:alpha val="0"/>
+              </a:srgbClr>
+            </a:solidFill>
+            <a:prstDash val="solid"/>
+          </a:ln>
+        </p:spPr>
+        <p:txBody>
+          <a:bodyPr xmlns:a="http://schemas.openxmlformats.org/drawingml/2006/main" lIns="0" tIns="0" rIns="0" bIns="0" anchor="t"/>
+          <a:lstStyle xmlns:a="http://schemas.openxmlformats.org/drawingml/2006/main"/>
+          <a:p xmlns:a="http://schemas.openxmlformats.org/drawingml/2006/main">
+            <a:pPr algn="l">
+              <a:defRPr sz="863" b="0">
+                <a:solidFill>
+                  <a:srgbClr val="344054"/>
+                </a:solidFill>
+                <a:latin typeface="Aptos"/>
+                <a:ea typeface="Aptos"/>
+                <a:cs typeface="Aptos"/>
+              </a:defRPr>
+            </a:pPr>
+            <a:r>
+              <a:rPr sz="863" b="0">
+                <a:solidFill>
+                  <a:srgbClr val="344054"/>
+                </a:solidFill>
+                <a:latin typeface="Aptos"/>
+                <a:ea typeface="Aptos"/>
+                <a:cs typeface="Aptos"/>
+              </a:rPr>
+              <a:t>Role-based access control, segregation of duties, and maker-checker workflows.</a:t>
+            </a:r>
+          </a:p>
+        </p:txBody>
+      </p:sp>
+      <p:sp>
+        <p:nvSpPr>
+          <p:cNvPr id="12" name="">
+            <a:extLst xmlns:a="http://schemas.openxmlformats.org/drawingml/2006/main">
+              <a:ext uri="{FF2B5EF4-FFF2-40B4-BE49-F238E27FC236}">
+                <a16:creationId xmlns:a16="http://schemas.microsoft.com/office/drawing/2014/main" id="{BB342B76-39B4-4603-97FD-0351A07A919B}"/>
+              </a:ext>
+            </a:extLst>
+          </p:cNvPr>
+          <p:cNvSpPr>
+            <a:spLocks xmlns:a="http://schemas.openxmlformats.org/drawingml/2006/main" noGrp="1"/>
+          </p:cNvSpPr>
+          <p:nvPr/>
+        </p:nvSpPr>
+        <p:spPr>
+          <a:xfrm xmlns:a="http://schemas.openxmlformats.org/drawingml/2006/main">
+            <a:off x="7581900" y="2990850"/>
+            <a:ext cx="3143250" cy="914400"/>
+          </a:xfrm>
+          <a:prstGeom xmlns:a="http://schemas.openxmlformats.org/drawingml/2006/main" prst="rect">
+            <a:avLst/>
+          </a:prstGeom>
+          <a:solidFill xmlns:a="http://schemas.openxmlformats.org/drawingml/2006/main">
+            <a:srgbClr val="FFFFFF"/>
+          </a:solidFill>
+          <a:ln xmlns:a="http://schemas.openxmlformats.org/drawingml/2006/main" w="9525">
+            <a:solidFill>
+              <a:srgbClr val="EAECF0"/>
+            </a:solidFill>
+            <a:prstDash val="solid"/>
+          </a:ln>
+        </p:spPr>
+      </p:sp>
+      <p:sp>
+        <p:nvSpPr>
+          <p:cNvPr id="13" name="">
+            <a:extLst xmlns:a="http://schemas.openxmlformats.org/drawingml/2006/main">
+              <a:ext uri="{FF2B5EF4-FFF2-40B4-BE49-F238E27FC236}">
+                <a16:creationId xmlns:a16="http://schemas.microsoft.com/office/drawing/2014/main" id="{F14AD682-A06C-433F-ABC6-7AB613C54F88}"/>
+              </a:ext>
+            </a:extLst>
+          </p:cNvPr>
+          <p:cNvSpPr>
+            <a:spLocks xmlns:a="http://schemas.openxmlformats.org/drawingml/2006/main" noGrp="1"/>
+          </p:cNvSpPr>
+          <p:nvPr/>
+        </p:nvSpPr>
+        <p:spPr>
+          <a:xfrm xmlns:a="http://schemas.openxmlformats.org/drawingml/2006/main">
+            <a:off x="7772400" y="3162300"/>
+            <a:ext cx="2571750" cy="209550"/>
+          </a:xfrm>
+          <a:prstGeom xmlns:a="http://schemas.openxmlformats.org/drawingml/2006/main" prst="rect">
+            <a:avLst/>
+          </a:prstGeom>
+          <a:solidFill xmlns:a="http://schemas.openxmlformats.org/drawingml/2006/main">
+            <a:srgbClr val="000000">
+              <a:alpha val="0"/>
+            </a:srgbClr>
+          </a:solidFill>
+          <a:ln xmlns:a="http://schemas.openxmlformats.org/drawingml/2006/main" w="0">
+            <a:solidFill>
+              <a:srgbClr val="000000">
+                <a:alpha val="0"/>
+              </a:srgbClr>
+            </a:solidFill>
+            <a:prstDash val="solid"/>
+          </a:ln>
+        </p:spPr>
+        <p:txBody>
+          <a:bodyPr xmlns:a="http://schemas.openxmlformats.org/drawingml/2006/main" lIns="0" tIns="0" rIns="0" bIns="0" anchor="t"/>
+          <a:lstStyle xmlns:a="http://schemas.openxmlformats.org/drawingml/2006/main"/>
+          <a:p xmlns:a="http://schemas.openxmlformats.org/drawingml/2006/main">
+            <a:pPr algn="l">
+              <a:defRPr sz="1275" b="1">
+                <a:solidFill>
+                  <a:srgbClr val="08111F"/>
+                </a:solidFill>
+                <a:latin typeface="Aptos"/>
+                <a:ea typeface="Aptos"/>
+                <a:cs typeface="Aptos"/>
+              </a:defRPr>
+            </a:pPr>
+            <a:r>
+              <a:rPr sz="1275" b="1">
+                <a:solidFill>
+                  <a:srgbClr val="08111F"/>
+                </a:solidFill>
+                <a:latin typeface="Aptos"/>
+                <a:ea typeface="Aptos"/>
+                <a:cs typeface="Aptos"/>
+              </a:rPr>
+              <a:t>Data protection</a:t>
+            </a:r>
+          </a:p>
+        </p:txBody>
+      </p:sp>
+      <p:sp>
+        <p:nvSpPr>
+          <p:cNvPr id="14" name="">
+            <a:extLst xmlns:a="http://schemas.openxmlformats.org/drawingml/2006/main">
+              <a:ext uri="{FF2B5EF4-FFF2-40B4-BE49-F238E27FC236}">
+                <a16:creationId xmlns:a16="http://schemas.microsoft.com/office/drawing/2014/main" id="{29EB6AA4-DD50-49B6-8AD0-B08CA86FE6B5}"/>
+              </a:ext>
+            </a:extLst>
+          </p:cNvPr>
+          <p:cNvSpPr>
+            <a:spLocks xmlns:a="http://schemas.openxmlformats.org/drawingml/2006/main" noGrp="1"/>
+          </p:cNvSpPr>
+          <p:nvPr/>
+        </p:nvSpPr>
+        <p:spPr>
+          <a:xfrm xmlns:a="http://schemas.openxmlformats.org/drawingml/2006/main">
+            <a:off x="7772400" y="3448050"/>
+            <a:ext cx="2647950" cy="323850"/>
+          </a:xfrm>
+          <a:prstGeom xmlns:a="http://schemas.openxmlformats.org/drawingml/2006/main" prst="rect">
+            <a:avLst/>
+          </a:prstGeom>
+          <a:solidFill xmlns:a="http://schemas.openxmlformats.org/drawingml/2006/main">
+            <a:srgbClr val="000000">
+              <a:alpha val="0"/>
+            </a:srgbClr>
+          </a:solidFill>
+          <a:ln xmlns:a="http://schemas.openxmlformats.org/drawingml/2006/main" w="0">
+            <a:solidFill>
+              <a:srgbClr val="000000">
+                <a:alpha val="0"/>
+              </a:srgbClr>
+            </a:solidFill>
+            <a:prstDash val="solid"/>
+          </a:ln>
+        </p:spPr>
+        <p:txBody>
+          <a:bodyPr xmlns:a="http://schemas.openxmlformats.org/drawingml/2006/main" lIns="0" tIns="0" rIns="0" bIns="0" anchor="t"/>
+          <a:lstStyle xmlns:a="http://schemas.openxmlformats.org/drawingml/2006/main"/>
+          <a:p xmlns:a="http://schemas.openxmlformats.org/drawingml/2006/main">
+            <a:pPr algn="l">
+              <a:defRPr sz="863" b="0">
+                <a:solidFill>
+                  <a:srgbClr val="344054"/>
+                </a:solidFill>
+                <a:latin typeface="Aptos"/>
+                <a:ea typeface="Aptos"/>
+                <a:cs typeface="Aptos"/>
+              </a:defRPr>
+            </a:pPr>
+            <a:r>
+              <a:rPr sz="863" b="0">
+                <a:solidFill>
+                  <a:srgbClr val="344054"/>
+                </a:solidFill>
+                <a:latin typeface="Aptos"/>
+                <a:ea typeface="Aptos"/>
+                <a:cs typeface="Aptos"/>
+              </a:rPr>
+              <a:t>TLS 1.2+ in transit; credentials held as vault references, never stored raw.</a:t>
+            </a:r>
+          </a:p>
+        </p:txBody>
+      </p:sp>
+      <p:sp>
+        <p:nvSpPr>
+          <p:cNvPr id="15" name="">
+            <a:extLst xmlns:a="http://schemas.openxmlformats.org/drawingml/2006/main">
+              <a:ext uri="{FF2B5EF4-FFF2-40B4-BE49-F238E27FC236}">
+                <a16:creationId xmlns:a16="http://schemas.microsoft.com/office/drawing/2014/main" id="{D1DB0B20-9BDE-4121-AB54-C249CBB31A5C}"/>
+              </a:ext>
+            </a:extLst>
+          </p:cNvPr>
+          <p:cNvSpPr>
+            <a:spLocks xmlns:a="http://schemas.openxmlformats.org/drawingml/2006/main" noGrp="1"/>
+          </p:cNvSpPr>
+          <p:nvPr/>
+        </p:nvSpPr>
+        <p:spPr>
+          <a:xfrm xmlns:a="http://schemas.openxmlformats.org/drawingml/2006/main">
+            <a:off x="723900" y="4152900"/>
+            <a:ext cx="3143250" cy="914400"/>
+          </a:xfrm>
+          <a:prstGeom xmlns:a="http://schemas.openxmlformats.org/drawingml/2006/main" prst="rect">
+            <a:avLst/>
+          </a:prstGeom>
+          <a:solidFill xmlns:a="http://schemas.openxmlformats.org/drawingml/2006/main">
+            <a:srgbClr val="FFFFFF"/>
+          </a:solidFill>
+          <a:ln xmlns:a="http://schemas.openxmlformats.org/drawingml/2006/main" w="9525">
+            <a:solidFill>
+              <a:srgbClr val="EAECF0"/>
+            </a:solidFill>
+            <a:prstDash val="solid"/>
+          </a:ln>
+        </p:spPr>
+      </p:sp>
+      <p:sp>
+        <p:nvSpPr>
+          <p:cNvPr id="16" name="">
+            <a:extLst xmlns:a="http://schemas.openxmlformats.org/drawingml/2006/main">
+              <a:ext uri="{FF2B5EF4-FFF2-40B4-BE49-F238E27FC236}">
+                <a16:creationId xmlns:a16="http://schemas.microsoft.com/office/drawing/2014/main" id="{0366D60C-6057-45E7-96BC-6303351C3869}"/>
+              </a:ext>
+            </a:extLst>
+          </p:cNvPr>
+          <p:cNvSpPr>
+            <a:spLocks xmlns:a="http://schemas.openxmlformats.org/drawingml/2006/main" noGrp="1"/>
+          </p:cNvSpPr>
+          <p:nvPr/>
+        </p:nvSpPr>
+        <p:spPr>
+          <a:xfrm xmlns:a="http://schemas.openxmlformats.org/drawingml/2006/main">
+            <a:off x="914400" y="4324350"/>
+            <a:ext cx="2571750" cy="209550"/>
+          </a:xfrm>
+          <a:prstGeom xmlns:a="http://schemas.openxmlformats.org/drawingml/2006/main" prst="rect">
+            <a:avLst/>
+          </a:prstGeom>
+          <a:solidFill xmlns:a="http://schemas.openxmlformats.org/drawingml/2006/main">
+            <a:srgbClr val="000000">
+              <a:alpha val="0"/>
+            </a:srgbClr>
+          </a:solidFill>
+          <a:ln xmlns:a="http://schemas.openxmlformats.org/drawingml/2006/main" w="0">
+            <a:solidFill>
+              <a:srgbClr val="000000">
+                <a:alpha val="0"/>
+              </a:srgbClr>
+            </a:solidFill>
+            <a:prstDash val="solid"/>
+          </a:ln>
+        </p:spPr>
+        <p:txBody>
+          <a:bodyPr xmlns:a="http://schemas.openxmlformats.org/drawingml/2006/main" lIns="0" tIns="0" rIns="0" bIns="0" anchor="t"/>
+          <a:lstStyle xmlns:a="http://schemas.openxmlformats.org/drawingml/2006/main"/>
+          <a:p xmlns:a="http://schemas.openxmlformats.org/drawingml/2006/main">
+            <a:pPr algn="l">
+              <a:defRPr sz="1275" b="1">
+                <a:solidFill>
+                  <a:srgbClr val="08111F"/>
+                </a:solidFill>
+                <a:latin typeface="Aptos"/>
+                <a:ea typeface="Aptos"/>
+                <a:cs typeface="Aptos"/>
+              </a:defRPr>
+            </a:pPr>
+            <a:r>
+              <a:rPr sz="1275" b="1">
+                <a:solidFill>
+                  <a:srgbClr val="08111F"/>
+                </a:solidFill>
+                <a:latin typeface="Aptos"/>
+                <a:ea typeface="Aptos"/>
+                <a:cs typeface="Aptos"/>
+              </a:rPr>
+              <a:t>Availability</a:t>
+            </a:r>
+          </a:p>
+        </p:txBody>
+      </p:sp>
+      <p:sp>
+        <p:nvSpPr>
+          <p:cNvPr id="17" name="">
+            <a:extLst xmlns:a="http://schemas.openxmlformats.org/drawingml/2006/main">
+              <a:ext uri="{FF2B5EF4-FFF2-40B4-BE49-F238E27FC236}">
+                <a16:creationId xmlns:a16="http://schemas.microsoft.com/office/drawing/2014/main" id="{D9878F29-6C3C-4D50-9D2E-A76C3B799365}"/>
+              </a:ext>
+            </a:extLst>
+          </p:cNvPr>
+          <p:cNvSpPr>
+            <a:spLocks xmlns:a="http://schemas.openxmlformats.org/drawingml/2006/main" noGrp="1"/>
+          </p:cNvSpPr>
+          <p:nvPr/>
+        </p:nvSpPr>
+        <p:spPr>
+          <a:xfrm xmlns:a="http://schemas.openxmlformats.org/drawingml/2006/main">
+            <a:off x="914400" y="4610100"/>
+            <a:ext cx="2647950" cy="323850"/>
+          </a:xfrm>
+          <a:prstGeom xmlns:a="http://schemas.openxmlformats.org/drawingml/2006/main" prst="rect">
+            <a:avLst/>
+          </a:prstGeom>
+          <a:solidFill xmlns:a="http://schemas.openxmlformats.org/drawingml/2006/main">
+            <a:srgbClr val="000000">
+              <a:alpha val="0"/>
+            </a:srgbClr>
+          </a:solidFill>
+          <a:ln xmlns:a="http://schemas.openxmlformats.org/drawingml/2006/main" w="0">
+            <a:solidFill>
+              <a:srgbClr val="000000">
+                <a:alpha val="0"/>
+              </a:srgbClr>
+            </a:solidFill>
+            <a:prstDash val="solid"/>
+          </a:ln>
+        </p:spPr>
+        <p:txBody>
+          <a:bodyPr xmlns:a="http://schemas.openxmlformats.org/drawingml/2006/main" lIns="0" tIns="0" rIns="0" bIns="0" anchor="t"/>
+          <a:lstStyle xmlns:a="http://schemas.openxmlformats.org/drawingml/2006/main"/>
+          <a:p xmlns:a="http://schemas.openxmlformats.org/drawingml/2006/main">
+            <a:pPr algn="l">
+              <a:defRPr sz="863" b="0">
+                <a:solidFill>
+                  <a:srgbClr val="344054"/>
+                </a:solidFill>
+                <a:latin typeface="Aptos"/>
+                <a:ea typeface="Aptos"/>
+                <a:cs typeface="Aptos"/>
+              </a:defRPr>
+            </a:pPr>
+            <a:r>
+              <a:rPr sz="863" b="0">
+                <a:solidFill>
+                  <a:srgbClr val="344054"/>
+                </a:solidFill>
+                <a:latin typeface="Aptos"/>
+                <a:ea typeface="Aptos"/>
+                <a:cs typeface="Aptos"/>
+              </a:rPr>
+              <a:t>99.95% uptime target with Active-Active or Active-Passive disaster recovery.</a:t>
+            </a:r>
+          </a:p>
+        </p:txBody>
+      </p:sp>
+      <p:sp>
+        <p:nvSpPr>
+          <p:cNvPr id="18" name="">
+            <a:extLst xmlns:a="http://schemas.openxmlformats.org/drawingml/2006/main">
+              <a:ext uri="{FF2B5EF4-FFF2-40B4-BE49-F238E27FC236}">
+                <a16:creationId xmlns:a16="http://schemas.microsoft.com/office/drawing/2014/main" id="{D8B86DB8-5044-4714-933D-81310474BD66}"/>
+              </a:ext>
+            </a:extLst>
+          </p:cNvPr>
+          <p:cNvSpPr>
+            <a:spLocks xmlns:a="http://schemas.openxmlformats.org/drawingml/2006/main" noGrp="1"/>
+          </p:cNvSpPr>
+          <p:nvPr/>
+        </p:nvSpPr>
+        <p:spPr>
+          <a:xfrm xmlns:a="http://schemas.openxmlformats.org/drawingml/2006/main">
+            <a:off x="4152900" y="4152900"/>
+            <a:ext cx="3143250" cy="914400"/>
+          </a:xfrm>
+          <a:prstGeom xmlns:a="http://schemas.openxmlformats.org/drawingml/2006/main" prst="rect">
+            <a:avLst/>
+          </a:prstGeom>
+          <a:solidFill xmlns:a="http://schemas.openxmlformats.org/drawingml/2006/main">
+            <a:srgbClr val="FFFFFF"/>
+          </a:solidFill>
+          <a:ln xmlns:a="http://schemas.openxmlformats.org/drawingml/2006/main" w="9525">
+            <a:solidFill>
+              <a:srgbClr val="EAECF0"/>
+            </a:solidFill>
+            <a:prstDash val="solid"/>
+          </a:ln>
+        </p:spPr>
+      </p:sp>
+      <p:sp>
+        <p:nvSpPr>
+          <p:cNvPr id="19" name="">
+            <a:extLst xmlns:a="http://schemas.openxmlformats.org/drawingml/2006/main">
+              <a:ext uri="{FF2B5EF4-FFF2-40B4-BE49-F238E27FC236}">
+                <a16:creationId xmlns:a16="http://schemas.microsoft.com/office/drawing/2014/main" id="{1BDB3317-555C-46D2-B456-CD646D4C6330}"/>
+              </a:ext>
+            </a:extLst>
+          </p:cNvPr>
+          <p:cNvSpPr>
+            <a:spLocks xmlns:a="http://schemas.openxmlformats.org/drawingml/2006/main" noGrp="1"/>
+          </p:cNvSpPr>
+          <p:nvPr/>
+        </p:nvSpPr>
+        <p:spPr>
+          <a:xfrm xmlns:a="http://schemas.openxmlformats.org/drawingml/2006/main">
+            <a:off x="4343400" y="4324350"/>
+            <a:ext cx="2571750" cy="209550"/>
+          </a:xfrm>
+          <a:prstGeom xmlns:a="http://schemas.openxmlformats.org/drawingml/2006/main" prst="rect">
+            <a:avLst/>
+          </a:prstGeom>
+          <a:solidFill xmlns:a="http://schemas.openxmlformats.org/drawingml/2006/main">
+            <a:srgbClr val="000000">
+              <a:alpha val="0"/>
+            </a:srgbClr>
+          </a:solidFill>
+          <a:ln xmlns:a="http://schemas.openxmlformats.org/drawingml/2006/main" w="0">
+            <a:solidFill>
+              <a:srgbClr val="000000">
+                <a:alpha val="0"/>
+              </a:srgbClr>
+            </a:solidFill>
+            <a:prstDash val="solid"/>
+          </a:ln>
+        </p:spPr>
+        <p:txBody>
+          <a:bodyPr xmlns:a="http://schemas.openxmlformats.org/drawingml/2006/main" lIns="0" tIns="0" rIns="0" bIns="0" anchor="t"/>
+          <a:lstStyle xmlns:a="http://schemas.openxmlformats.org/drawingml/2006/main"/>
+          <a:p xmlns:a="http://schemas.openxmlformats.org/drawingml/2006/main">
+            <a:pPr algn="l">
+              <a:defRPr sz="1275" b="1">
+                <a:solidFill>
+                  <a:srgbClr val="08111F"/>
+                </a:solidFill>
+                <a:latin typeface="Aptos"/>
+                <a:ea typeface="Aptos"/>
+                <a:cs typeface="Aptos"/>
+              </a:defRPr>
+            </a:pPr>
+            <a:r>
+              <a:rPr sz="1275" b="1">
+                <a:solidFill>
+                  <a:srgbClr val="08111F"/>
+                </a:solidFill>
+                <a:latin typeface="Aptos"/>
+                <a:ea typeface="Aptos"/>
+                <a:cs typeface="Aptos"/>
+              </a:rPr>
+              <a:t>Performance</a:t>
+            </a:r>
+          </a:p>
+        </p:txBody>
+      </p:sp>
+      <p:sp>
+        <p:nvSpPr>
+          <p:cNvPr id="20" name="">
+            <a:extLst xmlns:a="http://schemas.openxmlformats.org/drawingml/2006/main">
+              <a:ext uri="{FF2B5EF4-FFF2-40B4-BE49-F238E27FC236}">
+                <a16:creationId xmlns:a16="http://schemas.microsoft.com/office/drawing/2014/main" id="{CDAB402E-B788-4D41-AC29-BDC83B346B10}"/>
+              </a:ext>
+            </a:extLst>
+          </p:cNvPr>
+          <p:cNvSpPr>
+            <a:spLocks xmlns:a="http://schemas.openxmlformats.org/drawingml/2006/main" noGrp="1"/>
+          </p:cNvSpPr>
+          <p:nvPr/>
+        </p:nvSpPr>
+        <p:spPr>
+          <a:xfrm xmlns:a="http://schemas.openxmlformats.org/drawingml/2006/main">
+            <a:off x="4343400" y="4610100"/>
+            <a:ext cx="2647950" cy="323850"/>
+          </a:xfrm>
+          <a:prstGeom xmlns:a="http://schemas.openxmlformats.org/drawingml/2006/main" prst="rect">
+            <a:avLst/>
+          </a:prstGeom>
+          <a:solidFill xmlns:a="http://schemas.openxmlformats.org/drawingml/2006/main">
+            <a:srgbClr val="000000">
+              <a:alpha val="0"/>
+            </a:srgbClr>
+          </a:solidFill>
+          <a:ln xmlns:a="http://schemas.openxmlformats.org/drawingml/2006/main" w="0">
+            <a:solidFill>
+              <a:srgbClr val="000000">
+                <a:alpha val="0"/>
+              </a:srgbClr>
+            </a:solidFill>
+            <a:prstDash val="solid"/>
+          </a:ln>
+        </p:spPr>
+        <p:txBody>
+          <a:bodyPr xmlns:a="http://schemas.openxmlformats.org/drawingml/2006/main" lIns="0" tIns="0" rIns="0" bIns="0" anchor="t"/>
+          <a:lstStyle xmlns:a="http://schemas.openxmlformats.org/drawingml/2006/main"/>
+          <a:p xmlns:a="http://schemas.openxmlformats.org/drawingml/2006/main">
+            <a:pPr algn="l">
+              <a:defRPr sz="863" b="0">
+                <a:solidFill>
+                  <a:srgbClr val="344054"/>
+                </a:solidFill>
+                <a:latin typeface="Aptos"/>
+                <a:ea typeface="Aptos"/>
+                <a:cs typeface="Aptos"/>
+              </a:defRPr>
+            </a:pPr>
+            <a:r>
+              <a:rPr sz="863" b="0">
+                <a:solidFill>
+                  <a:srgbClr val="344054"/>
+                </a:solidFill>
+                <a:latin typeface="Aptos"/>
+                <a:ea typeface="Aptos"/>
+                <a:cs typeface="Aptos"/>
+              </a:rPr>
+              <a:t>Sub-3-second transaction response at 5,000+ TPS with real-time processing.</a:t>
+            </a:r>
+          </a:p>
+        </p:txBody>
+      </p:sp>
+      <p:sp>
+        <p:nvSpPr>
+          <p:cNvPr id="21" name="">
+            <a:extLst xmlns:a="http://schemas.openxmlformats.org/drawingml/2006/main">
+              <a:ext uri="{FF2B5EF4-FFF2-40B4-BE49-F238E27FC236}">
+                <a16:creationId xmlns:a16="http://schemas.microsoft.com/office/drawing/2014/main" id="{D69E5C74-B0AB-4C0F-B84B-5687B2E02EC0}"/>
+              </a:ext>
+            </a:extLst>
+          </p:cNvPr>
+          <p:cNvSpPr>
+            <a:spLocks xmlns:a="http://schemas.openxmlformats.org/drawingml/2006/main" noGrp="1"/>
+          </p:cNvSpPr>
+          <p:nvPr/>
+        </p:nvSpPr>
+        <p:spPr>
+          <a:xfrm xmlns:a="http://schemas.openxmlformats.org/drawingml/2006/main">
+            <a:off x="7581900" y="4152900"/>
+            <a:ext cx="3143250" cy="914400"/>
+          </a:xfrm>
+          <a:prstGeom xmlns:a="http://schemas.openxmlformats.org/drawingml/2006/main" prst="rect">
+            <a:avLst/>
+          </a:prstGeom>
+          <a:solidFill xmlns:a="http://schemas.openxmlformats.org/drawingml/2006/main">
+            <a:srgbClr val="FFFFFF"/>
+          </a:solidFill>
+          <a:ln xmlns:a="http://schemas.openxmlformats.org/drawingml/2006/main" w="9525">
+            <a:solidFill>
+              <a:srgbClr val="EAECF0"/>
+            </a:solidFill>
+            <a:prstDash val="solid"/>
+          </a:ln>
+        </p:spPr>
+      </p:sp>
+      <p:sp>
+        <p:nvSpPr>
+          <p:cNvPr id="22" name="">
+            <a:extLst xmlns:a="http://schemas.openxmlformats.org/drawingml/2006/main">
+              <a:ext uri="{FF2B5EF4-FFF2-40B4-BE49-F238E27FC236}">
+                <a16:creationId xmlns:a16="http://schemas.microsoft.com/office/drawing/2014/main" id="{7044DD6C-4DF4-4D0B-B91F-ADD6C598D59D}"/>
+              </a:ext>
+            </a:extLst>
+          </p:cNvPr>
+          <p:cNvSpPr>
+            <a:spLocks xmlns:a="http://schemas.openxmlformats.org/drawingml/2006/main" noGrp="1"/>
+          </p:cNvSpPr>
+          <p:nvPr/>
+        </p:nvSpPr>
+        <p:spPr>
+          <a:xfrm xmlns:a="http://schemas.openxmlformats.org/drawingml/2006/main">
+            <a:off x="7772400" y="4324350"/>
+            <a:ext cx="2571750" cy="209550"/>
+          </a:xfrm>
+          <a:prstGeom xmlns:a="http://schemas.openxmlformats.org/drawingml/2006/main" prst="rect">
+            <a:avLst/>
+          </a:prstGeom>
+          <a:solidFill xmlns:a="http://schemas.openxmlformats.org/drawingml/2006/main">
+            <a:srgbClr val="000000">
+              <a:alpha val="0"/>
+            </a:srgbClr>
+          </a:solidFill>
+          <a:ln xmlns:a="http://schemas.openxmlformats.org/drawingml/2006/main" w="0">
+            <a:solidFill>
+              <a:srgbClr val="000000">
+                <a:alpha val="0"/>
+              </a:srgbClr>
+            </a:solidFill>
+            <a:prstDash val="solid"/>
+          </a:ln>
+        </p:spPr>
+        <p:txBody>
+          <a:bodyPr xmlns:a="http://schemas.openxmlformats.org/drawingml/2006/main" lIns="0" tIns="0" rIns="0" bIns="0" anchor="t"/>
+          <a:lstStyle xmlns:a="http://schemas.openxmlformats.org/drawingml/2006/main"/>
+          <a:p xmlns:a="http://schemas.openxmlformats.org/drawingml/2006/main">
+            <a:pPr algn="l">
+              <a:defRPr sz="1275" b="1">
+                <a:solidFill>
+                  <a:srgbClr val="08111F"/>
+                </a:solidFill>
+                <a:latin typeface="Aptos"/>
+                <a:ea typeface="Aptos"/>
+                <a:cs typeface="Aptos"/>
+              </a:defRPr>
+            </a:pPr>
+            <a:r>
+              <a:rPr sz="1275" b="1">
+                <a:solidFill>
+                  <a:srgbClr val="08111F"/>
+                </a:solidFill>
+                <a:latin typeface="Aptos"/>
+                <a:ea typeface="Aptos"/>
+                <a:cs typeface="Aptos"/>
+              </a:rPr>
+              <a:t>Audit</a:t>
+            </a:r>
+          </a:p>
+        </p:txBody>
+      </p:sp>
+      <p:sp>
+        <p:nvSpPr>
+          <p:cNvPr id="23" name="">
+            <a:extLst xmlns:a="http://schemas.openxmlformats.org/drawingml/2006/main">
+              <a:ext uri="{FF2B5EF4-FFF2-40B4-BE49-F238E27FC236}">
+                <a16:creationId xmlns:a16="http://schemas.microsoft.com/office/drawing/2014/main" id="{AD2F7E97-E08E-40F4-9947-96CDBE47336D}"/>
+              </a:ext>
+            </a:extLst>
+          </p:cNvPr>
+          <p:cNvSpPr>
+            <a:spLocks xmlns:a="http://schemas.openxmlformats.org/drawingml/2006/main" noGrp="1"/>
+          </p:cNvSpPr>
+          <p:nvPr/>
+        </p:nvSpPr>
+        <p:spPr>
+          <a:xfrm xmlns:a="http://schemas.openxmlformats.org/drawingml/2006/main">
+            <a:off x="7772400" y="4610100"/>
+            <a:ext cx="2647950" cy="323850"/>
+          </a:xfrm>
+          <a:prstGeom xmlns:a="http://schemas.openxmlformats.org/drawingml/2006/main" prst="rect">
+            <a:avLst/>
+          </a:prstGeom>
+          <a:solidFill xmlns:a="http://schemas.openxmlformats.org/drawingml/2006/main">
+            <a:srgbClr val="000000">
+              <a:alpha val="0"/>
+            </a:srgbClr>
+          </a:solidFill>
+          <a:ln xmlns:a="http://schemas.openxmlformats.org/drawingml/2006/main" w="0">
+            <a:solidFill>
+              <a:srgbClr val="000000">
+                <a:alpha val="0"/>
+              </a:srgbClr>
+            </a:solidFill>
+            <a:prstDash val="solid"/>
+          </a:ln>
+        </p:spPr>
+        <p:txBody>
+          <a:bodyPr xmlns:a="http://schemas.openxmlformats.org/drawingml/2006/main" lIns="0" tIns="0" rIns="0" bIns="0" anchor="t"/>
+          <a:lstStyle xmlns:a="http://schemas.openxmlformats.org/drawingml/2006/main"/>
+          <a:p xmlns:a="http://schemas.openxmlformats.org/drawingml/2006/main">
+            <a:pPr algn="l">
+              <a:defRPr sz="863" b="0">
+                <a:solidFill>
+                  <a:srgbClr val="344054"/>
+                </a:solidFill>
+                <a:latin typeface="Aptos"/>
+                <a:ea typeface="Aptos"/>
+                <a:cs typeface="Aptos"/>
+              </a:defRPr>
+            </a:pPr>
+            <a:r>
+              <a:rPr sz="863" b="0">
+                <a:solidFill>
+                  <a:srgbClr val="344054"/>
+                </a:solidFill>
+                <a:latin typeface="Aptos"/>
+                <a:ea typeface="Aptos"/>
+                <a:cs typeface="Aptos"/>
+              </a:rPr>
+              <a:t>Standard audit logs covering user and transaction activity end to end.</a:t>
+            </a:r>
+          </a:p>
+        </p:txBody>
+      </p:sp>
+      <p:sp>
+        <p:nvSpPr>
+          <p:cNvPr id="24" name="">
+            <a:extLst xmlns:a="http://schemas.openxmlformats.org/drawingml/2006/main">
+              <a:ext uri="{FF2B5EF4-FFF2-40B4-BE49-F238E27FC236}">
+                <a16:creationId xmlns:a16="http://schemas.microsoft.com/office/drawing/2014/main" id="{ECE8FFC2-B8FA-4265-9396-2F91E95024F6}"/>
+              </a:ext>
+            </a:extLst>
+          </p:cNvPr>
+          <p:cNvSpPr>
+            <a:spLocks xmlns:a="http://schemas.openxmlformats.org/drawingml/2006/main" noGrp="1"/>
+          </p:cNvSpPr>
+          <p:nvPr/>
+        </p:nvSpPr>
+        <p:spPr>
+          <a:xfrm xmlns:a="http://schemas.openxmlformats.org/drawingml/2006/main">
+            <a:off x="609600" y="6400800"/>
+            <a:ext cx="9829800" cy="9525"/>
+          </a:xfrm>
+          <a:prstGeom xmlns:a="http://schemas.openxmlformats.org/drawingml/2006/main" prst="rect">
+            <a:avLst/>
+          </a:prstGeom>
+          <a:solidFill xmlns:a="http://schemas.openxmlformats.org/drawingml/2006/main">
+            <a:srgbClr val="EAECF0"/>
+          </a:solidFill>
+          <a:ln xmlns:a="http://schemas.openxmlformats.org/drawingml/2006/main" w="0">
+            <a:solidFill>
+              <a:srgbClr val="000000">
+                <a:alpha val="0"/>
+              </a:srgbClr>
+            </a:solidFill>
+            <a:prstDash val="solid"/>
+          </a:ln>
+        </p:spPr>
+      </p:sp>
+      <p:sp>
+        <p:nvSpPr>
+          <p:cNvPr id="25" name="">
+            <a:extLst xmlns:a="http://schemas.openxmlformats.org/drawingml/2006/main">
+              <a:ext uri="{FF2B5EF4-FFF2-40B4-BE49-F238E27FC236}">
+                <a16:creationId xmlns:a16="http://schemas.microsoft.com/office/drawing/2014/main" id="{821D761A-C247-44D0-ACFC-F6644BB9D25C}"/>
+              </a:ext>
+            </a:extLst>
+          </p:cNvPr>
+          <p:cNvSpPr>
+            <a:spLocks xmlns:a="http://schemas.openxmlformats.org/drawingml/2006/main" noGrp="1"/>
+          </p:cNvSpPr>
+          <p:nvPr/>
+        </p:nvSpPr>
+        <p:spPr>
+          <a:xfrm xmlns:a="http://schemas.openxmlformats.org/drawingml/2006/main">
+            <a:off x="609600" y="6515100"/>
+            <a:ext cx="6858000" cy="171450"/>
+          </a:xfrm>
+          <a:prstGeom xmlns:a="http://schemas.openxmlformats.org/drawingml/2006/main" prst="rect">
+            <a:avLst/>
+          </a:prstGeom>
+          <a:solidFill xmlns:a="http://schemas.openxmlformats.org/drawingml/2006/main">
+            <a:srgbClr val="000000">
+              <a:alpha val="0"/>
+            </a:srgbClr>
+          </a:solidFill>
+          <a:ln xmlns:a="http://schemas.openxmlformats.org/drawingml/2006/main" w="0">
+            <a:solidFill>
+              <a:srgbClr val="000000">
+                <a:alpha val="0"/>
+              </a:srgbClr>
+            </a:solidFill>
+            <a:prstDash val="solid"/>
+          </a:ln>
+        </p:spPr>
+        <p:txBody>
+          <a:bodyPr xmlns:a="http://schemas.openxmlformats.org/drawingml/2006/main" lIns="0" tIns="0" rIns="0" bIns="0" anchor="t"/>
+          <a:lstStyle xmlns:a="http://schemas.openxmlformats.org/drawingml/2006/main"/>
+          <a:p xmlns:a="http://schemas.openxmlformats.org/drawingml/2006/main">
+            <a:pPr algn="l">
+              <a:defRPr sz="750" b="0">
+                <a:solidFill>
+                  <a:srgbClr val="667085"/>
+                </a:solidFill>
+                <a:latin typeface="Aptos"/>
+                <a:ea typeface="Aptos"/>
+                <a:cs typeface="Aptos"/>
+              </a:defRPr>
+            </a:pPr>
+            <a:r>
+              <a:rPr sz="750" b="0">
+                <a:solidFill>
+                  <a:srgbClr val="667085"/>
+                </a:solidFill>
+                <a:latin typeface="Aptos"/>
+                <a:ea typeface="Aptos"/>
+                <a:cs typeface="Aptos"/>
+              </a:rPr>
+              <a:t>CloudSpace Technologies / INSWITCH CIO-ED briefing</a:t>
+            </a:r>
+          </a:p>
+        </p:txBody>
+      </p:sp>
+      <p:sp>
+        <p:nvSpPr>
+          <p:cNvPr id="26" name="">
+            <a:extLst xmlns:a="http://schemas.openxmlformats.org/drawingml/2006/main">
+              <a:ext uri="{FF2B5EF4-FFF2-40B4-BE49-F238E27FC236}">
+                <a16:creationId xmlns:a16="http://schemas.microsoft.com/office/drawing/2014/main" id="{97C30600-9EB2-476E-9BD9-350775C25BD4}"/>
+              </a:ext>
+            </a:extLst>
+          </p:cNvPr>
+          <p:cNvSpPr>
+            <a:spLocks xmlns:a="http://schemas.openxmlformats.org/drawingml/2006/main" noGrp="1"/>
+          </p:cNvSpPr>
+          <p:nvPr/>
+        </p:nvSpPr>
+        <p:spPr>
+          <a:xfrm xmlns:a="http://schemas.openxmlformats.org/drawingml/2006/main">
+            <a:off x="10839450" y="6515100"/>
+            <a:ext cx="666750" cy="171450"/>
+          </a:xfrm>
+          <a:prstGeom xmlns:a="http://schemas.openxmlformats.org/drawingml/2006/main" prst="rect">
+            <a:avLst/>
+          </a:prstGeom>
+          <a:solidFill xmlns:a="http://schemas.openxmlformats.org/drawingml/2006/main">
+            <a:srgbClr val="000000">
+              <a:alpha val="0"/>
+            </a:srgbClr>
+          </a:solidFill>
+          <a:ln xmlns:a="http://schemas.openxmlformats.org/drawingml/2006/main" w="0">
+            <a:solidFill>
+              <a:srgbClr val="000000">
+                <a:alpha val="0"/>
+              </a:srgbClr>
+            </a:solidFill>
+            <a:prstDash val="solid"/>
+          </a:ln>
+        </p:spPr>
+        <p:txBody>
+          <a:bodyPr xmlns:a="http://schemas.openxmlformats.org/drawingml/2006/main" lIns="0" tIns="0" rIns="0" bIns="0" anchor="t"/>
+          <a:lstStyle xmlns:a="http://schemas.openxmlformats.org/drawingml/2006/main"/>
+          <a:p xmlns:a="http://schemas.openxmlformats.org/drawingml/2006/main">
+            <a:pPr algn="r">
+              <a:defRPr sz="900" b="0">
+                <a:solidFill>
+                  <a:srgbClr val="667085"/>
+                </a:solidFill>
+                <a:latin typeface="Aptos"/>
+                <a:ea typeface="Aptos"/>
+                <a:cs typeface="Aptos"/>
+              </a:defRPr>
+            </a:pPr>
+            <a:r>
+              <a:rPr sz="900" b="0">
+                <a:solidFill>
+                  <a:srgbClr val="667085"/>
+                </a:solidFill>
+                <a:latin typeface="Aptos"/>
+                <a:ea typeface="Aptos"/>
+                <a:cs typeface="Aptos"/>
+              </a:rPr>
+              <a:t>18</a:t>
+            </a:r>
+          </a:p>
+        </p:txBody>
+      </p:sp>
+    </p:spTree>
+    <p:extLst>
+      <p:ext uri="{BB962C8B-B14F-4D97-AF65-F5344CB8AC3E}">
+        <p14:creationId xmlns:p14="http://schemas.microsoft.com/office/powerpoint/2010/main" val="1260491181"/>
+      </p:ext>
+    </p:extLst>
+  </p:cSld>
+</p:sld>
+</file>
+
 <file path=ppt/slides/slide3.xml><?xml version="1.0" encoding="utf-8"?>
 <p:sld xmlns:p="http://schemas.openxmlformats.org/presentationml/2006/main">
   <p:cSld>
@@ -20122,7 +26126,7 @@
                 <a:ea typeface="Aptos"/>
                 <a:cs typeface="Aptos"/>
               </a:rPr>
-              <a:t>05</a:t>
+              <a:t>06</a:t>
             </a:r>
           </a:p>
         </p:txBody>
@@ -21245,7 +27249,7 @@
                 <a:ea typeface="Aptos"/>
                 <a:cs typeface="Aptos"/>
               </a:rPr>
-              <a:t>06</a:t>
+              <a:t>07</a:t>
             </a:r>
           </a:p>
         </p:txBody>
@@ -24104,7 +30108,7 @@
                 <a:ea typeface="Aptos"/>
                 <a:cs typeface="Aptos"/>
               </a:rPr>
-              <a:t>07</a:t>
+              <a:t>08</a:t>
             </a:r>
           </a:p>
         </p:txBody>
@@ -25710,7 +31714,7 @@
                 <a:ea typeface="Aptos"/>
                 <a:cs typeface="Aptos"/>
               </a:rPr>
-              <a:t>08</a:t>
+              <a:t>10</a:t>
             </a:r>
           </a:p>
         </p:txBody>
@@ -25771,6 +31775,10 @@
             <a:prstDash val="solid"/>
           </a:ln>
         </p:spPr>
+        <p:txBody xmlns:a="http://schemas.openxmlformats.org/drawingml/2006/main">
+          <a:bodyPr/>
+          <a:p/>
+        </p:txBody>
       </p:sp>
       <p:sp>
         <p:nvSpPr>
@@ -25806,6 +31814,10 @@
             <a:prstDash val="solid"/>
           </a:ln>
         </p:spPr>
+        <p:txBody xmlns:a="http://schemas.openxmlformats.org/drawingml/2006/main">
+          <a:bodyPr/>
+          <a:p/>
+        </p:txBody>
       </p:sp>
       <p:sp>
         <p:nvSpPr>
@@ -25994,7 +32006,7 @@
                 <a:ea typeface="Aptos"/>
                 <a:cs typeface="Aptos"/>
               </a:rPr>
-              <a:t>The platform speaks the language of NIP and Instant EFT operations while preserving the bank’s governance model.</a:t>
+              <a:t>INSWITCH keeps NIP webhook, TSQ/status API, ledger, escalation, and reversal evidence in one defensible case record.</a:t>
             </a:r>
           </a:p>
         </p:txBody>
@@ -26031,6 +32043,10 @@
             <a:prstDash val="solid"/>
           </a:ln>
         </p:spPr>
+        <p:txBody xmlns:a="http://schemas.openxmlformats.org/drawingml/2006/main">
+          <a:bodyPr/>
+          <a:p/>
+        </p:txBody>
       </p:sp>
       <p:sp>
         <p:nvSpPr>
@@ -26192,6 +32208,10 @@
             <a:prstDash val="solid"/>
           </a:ln>
         </p:spPr>
+        <p:txBody xmlns:a="http://schemas.openxmlformats.org/drawingml/2006/main">
+          <a:bodyPr/>
+          <a:p/>
+        </p:txBody>
       </p:sp>
       <p:sp>
         <p:nvSpPr>
@@ -26252,7 +32272,7 @@
                 <a:ea typeface="Aptos"/>
                 <a:cs typeface="Aptos"/>
               </a:rPr>
-              <a:t>TSQ response</a:t>
+              <a:t>TSQ / status API</a:t>
             </a:r>
           </a:p>
         </p:txBody>
@@ -26316,7 +32336,7 @@
                 <a:ea typeface="Aptos"/>
                 <a:cs typeface="Aptos"/>
               </a:rPr>
-              <a:t>Status query result</a:t>
+              <a:t>Latest rail status</a:t>
             </a:r>
           </a:p>
         </p:txBody>
@@ -26353,6 +32373,10 @@
             <a:prstDash val="solid"/>
           </a:ln>
         </p:spPr>
+        <p:txBody xmlns:a="http://schemas.openxmlformats.org/drawingml/2006/main">
+          <a:bodyPr/>
+          <a:p/>
+        </p:txBody>
       </p:sp>
       <p:sp>
         <p:nvSpPr>
@@ -26514,6 +32538,10 @@
             <a:prstDash val="solid"/>
           </a:ln>
         </p:spPr>
+        <p:txBody xmlns:a="http://schemas.openxmlformats.org/drawingml/2006/main">
+          <a:bodyPr/>
+          <a:p/>
+        </p:txBody>
       </p:sp>
       <p:sp>
         <p:nvSpPr>
@@ -26675,6 +32703,10 @@
             <a:prstDash val="solid"/>
           </a:ln>
         </p:spPr>
+        <p:txBody xmlns:a="http://schemas.openxmlformats.org/drawingml/2006/main">
+          <a:bodyPr/>
+          <a:p/>
+        </p:txBody>
       </p:sp>
       <p:sp>
         <p:nvSpPr>
@@ -26735,7 +32767,7 @@
                 <a:ea typeface="Aptos"/>
                 <a:cs typeface="Aptos"/>
               </a:rPr>
-              <a:t>Settlement report</a:t>
+              <a:t>Provider escalation email</a:t>
             </a:r>
           </a:p>
         </p:txBody>
@@ -26799,7 +32831,7 @@
                 <a:ea typeface="Aptos"/>
                 <a:cs typeface="Aptos"/>
               </a:rPr>
-              <a:t>Batch and reconciliation link</a:t>
+              <a:t>Timed provider response</a:t>
             </a:r>
           </a:p>
         </p:txBody>
@@ -26836,6 +32868,10 @@
             <a:prstDash val="solid"/>
           </a:ln>
         </p:spPr>
+        <p:txBody xmlns:a="http://schemas.openxmlformats.org/drawingml/2006/main">
+          <a:bodyPr/>
+          <a:p/>
+        </p:txBody>
       </p:sp>
       <p:sp>
         <p:nvSpPr>
@@ -26896,7 +32932,7 @@
                 <a:ea typeface="Aptos"/>
                 <a:cs typeface="Aptos"/>
               </a:rPr>
-              <a:t>Operator reason</a:t>
+              <a:t>Evidence note</a:t>
             </a:r>
           </a:p>
         </p:txBody>
@@ -26960,7 +32996,7 @@
                 <a:ea typeface="Aptos"/>
                 <a:cs typeface="Aptos"/>
               </a:rPr>
-              <a:t>Maker-checker and audit trail</a:t>
+              <a:t>Double-payment guard</a:t>
             </a:r>
           </a:p>
         </p:txBody>
@@ -26999,6 +33035,10 @@
             <a:prstDash val="solid"/>
           </a:ln>
         </p:spPr>
+        <p:txBody xmlns:a="http://schemas.openxmlformats.org/drawingml/2006/main">
+          <a:bodyPr/>
+          <a:p/>
+        </p:txBody>
       </p:sp>
       <p:sp>
         <p:nvSpPr>
@@ -27034,6 +33074,10 @@
             <a:prstDash val="solid"/>
           </a:ln>
         </p:spPr>
+        <p:txBody xmlns:a="http://schemas.openxmlformats.org/drawingml/2006/main">
+          <a:bodyPr/>
+          <a:p/>
+        </p:txBody>
       </p:sp>
       <p:sp>
         <p:nvSpPr>
@@ -27133,6 +33177,10 @@
             <a:prstDash val="solid"/>
           </a:ln>
         </p:spPr>
+        <p:txBody xmlns:a="http://schemas.openxmlformats.org/drawingml/2006/main">
+          <a:bodyPr/>
+          <a:p/>
+        </p:txBody>
       </p:sp>
       <p:sp>
         <p:nvSpPr>
@@ -27168,6 +33216,10 @@
             <a:prstDash val="solid"/>
           </a:ln>
         </p:spPr>
+        <p:txBody xmlns:a="http://schemas.openxmlformats.org/drawingml/2006/main">
+          <a:bodyPr/>
+          <a:p/>
+        </p:txBody>
       </p:sp>
       <p:sp>
         <p:nvSpPr>
@@ -27267,6 +33319,10 @@
             <a:prstDash val="solid"/>
           </a:ln>
         </p:spPr>
+        <p:txBody xmlns:a="http://schemas.openxmlformats.org/drawingml/2006/main">
+          <a:bodyPr/>
+          <a:p/>
+        </p:txBody>
       </p:sp>
       <p:sp>
         <p:nvSpPr>
@@ -27302,6 +33358,10 @@
             <a:prstDash val="solid"/>
           </a:ln>
         </p:spPr>
+        <p:txBody xmlns:a="http://schemas.openxmlformats.org/drawingml/2006/main">
+          <a:bodyPr/>
+          <a:p/>
+        </p:txBody>
       </p:sp>
       <p:sp>
         <p:nvSpPr>
@@ -27362,7 +33422,7 @@
                 <a:ea typeface="Aptos"/>
                 <a:cs typeface="Aptos"/>
               </a:rPr>
-              <a:t>Audit ready</a:t>
+              <a:t>No double pay</a:t>
             </a:r>
           </a:p>
         </p:txBody>
@@ -27401,6 +33461,10 @@
             <a:prstDash val="solid"/>
           </a:ln>
         </p:spPr>
+        <p:txBody xmlns:a="http://schemas.openxmlformats.org/drawingml/2006/main">
+          <a:bodyPr/>
+          <a:p/>
+        </p:txBody>
       </p:sp>
       <p:sp>
         <p:nvSpPr>
@@ -27461,7 +33525,7 @@
                 <a:ea typeface="Aptos"/>
                 <a:cs typeface="Aptos"/>
               </a:rPr>
-              <a:t>Terminology aligned to NIBSS/CBN Instant EFT operating language</a:t>
+              <a:t>Evidence aligned to NIP operations: status, ledger, escalation, reversal, and reconciliation.</a:t>
             </a:r>
           </a:p>
         </p:txBody>
@@ -27525,7 +33589,7 @@
                 <a:ea typeface="Aptos"/>
                 <a:cs typeface="Aptos"/>
               </a:rPr>
-              <a:t>09</a:t>
+              <a:t>11</a:t>
             </a:r>
           </a:p>
         </p:txBody>
